--- a/Сараева_Предзащита_ДО_ред.pptx
+++ b/Сараева_Предзащита_ДО_ред.pptx
@@ -5,10 +5,10 @@
     <p:sldMasterId id="2147483648" r:id="rId1"/>
   </p:sldMasterIdLst>
   <p:notesMasterIdLst>
-    <p:notesMasterId r:id="rId19"/>
+    <p:notesMasterId r:id="rId16"/>
   </p:notesMasterIdLst>
   <p:handoutMasterIdLst>
-    <p:handoutMasterId r:id="rId20"/>
+    <p:handoutMasterId r:id="rId17"/>
   </p:handoutMasterIdLst>
   <p:sldIdLst>
     <p:sldId id="280" r:id="rId2"/>
@@ -18,16 +18,13 @@
     <p:sldId id="284" r:id="rId6"/>
     <p:sldId id="285" r:id="rId7"/>
     <p:sldId id="306" r:id="rId8"/>
-    <p:sldId id="303" r:id="rId9"/>
-    <p:sldId id="304" r:id="rId10"/>
-    <p:sldId id="286" r:id="rId11"/>
-    <p:sldId id="287" r:id="rId12"/>
-    <p:sldId id="288" r:id="rId13"/>
-    <p:sldId id="300" r:id="rId14"/>
-    <p:sldId id="299" r:id="rId15"/>
-    <p:sldId id="290" r:id="rId16"/>
-    <p:sldId id="297" r:id="rId17"/>
-    <p:sldId id="305" r:id="rId18"/>
+    <p:sldId id="286" r:id="rId9"/>
+    <p:sldId id="287" r:id="rId10"/>
+    <p:sldId id="300" r:id="rId11"/>
+    <p:sldId id="299" r:id="rId12"/>
+    <p:sldId id="290" r:id="rId13"/>
+    <p:sldId id="297" r:id="rId14"/>
+    <p:sldId id="305" r:id="rId15"/>
   </p:sldIdLst>
   <p:sldSz cx="12192000" cy="6858000"/>
   <p:notesSz cx="6858000" cy="9144000"/>
@@ -951,164 +948,6 @@
             <a:fld id="{AEEB6FB7-BC83-48DF-A6CC-546756D80159}" type="slidenum">
               <a:rPr lang="ru-RU" smtClean="0"/>
               <a:t>7</a:t>
-            </a:fld>
-            <a:endParaRPr lang="ru-RU"/>
-          </a:p>
-        </p:txBody>
-      </p:sp>
-    </p:spTree>
-  </p:cSld>
-  <p:clrMapOvr>
-    <a:masterClrMapping/>
-  </p:clrMapOvr>
-</p:notes>
-</file>
-
-<file path=ppt/notesSlides/notesSlide5.xml><?xml version="1.0" encoding="utf-8"?>
-<p:notes xmlns:a="http://schemas.openxmlformats.org/drawingml/2006/main" xmlns:r="http://schemas.openxmlformats.org/officeDocument/2006/relationships" xmlns:p="http://schemas.openxmlformats.org/presentationml/2006/main">
-  <p:cSld>
-    <p:spTree>
-      <p:nvGrpSpPr>
-        <p:cNvPr id="1" name=""/>
-        <p:cNvGrpSpPr/>
-        <p:nvPr/>
-      </p:nvGrpSpPr>
-      <p:grpSpPr>
-        <a:xfrm>
-          <a:off x="0" y="0"/>
-          <a:ext cx="0" cy="0"/>
-          <a:chOff x="0" y="0"/>
-          <a:chExt cx="0" cy="0"/>
-        </a:xfrm>
-      </p:grpSpPr>
-      <p:sp>
-        <p:nvSpPr>
-          <p:cNvPr id="2" name="Образ слайда 1"/>
-          <p:cNvSpPr>
-            <a:spLocks noGrp="1" noRot="1" noChangeAspect="1"/>
-          </p:cNvSpPr>
-          <p:nvPr>
-            <p:ph type="sldImg"/>
-          </p:nvPr>
-        </p:nvSpPr>
-        <p:spPr/>
-      </p:sp>
-      <p:sp>
-        <p:nvSpPr>
-          <p:cNvPr id="3" name="Заметки 2"/>
-          <p:cNvSpPr>
-            <a:spLocks noGrp="1"/>
-          </p:cNvSpPr>
-          <p:nvPr>
-            <p:ph type="body" idx="1"/>
-          </p:nvPr>
-        </p:nvSpPr>
-        <p:spPr/>
-        <p:txBody>
-          <a:bodyPr/>
-          <a:lstStyle/>
-          <a:p>
-            <a:endParaRPr lang="ru-RU" dirty="0"/>
-          </a:p>
-        </p:txBody>
-      </p:sp>
-      <p:sp>
-        <p:nvSpPr>
-          <p:cNvPr id="4" name="Номер слайда 3"/>
-          <p:cNvSpPr>
-            <a:spLocks noGrp="1"/>
-          </p:cNvSpPr>
-          <p:nvPr>
-            <p:ph type="sldNum" sz="quarter" idx="10"/>
-          </p:nvPr>
-        </p:nvSpPr>
-        <p:spPr/>
-        <p:txBody>
-          <a:bodyPr/>
-          <a:lstStyle/>
-          <a:p>
-            <a:fld id="{AEEB6FB7-BC83-48DF-A6CC-546756D80159}" type="slidenum">
-              <a:rPr lang="ru-RU" smtClean="0"/>
-              <a:t>8</a:t>
-            </a:fld>
-            <a:endParaRPr lang="ru-RU"/>
-          </a:p>
-        </p:txBody>
-      </p:sp>
-    </p:spTree>
-  </p:cSld>
-  <p:clrMapOvr>
-    <a:masterClrMapping/>
-  </p:clrMapOvr>
-</p:notes>
-</file>
-
-<file path=ppt/notesSlides/notesSlide6.xml><?xml version="1.0" encoding="utf-8"?>
-<p:notes xmlns:a="http://schemas.openxmlformats.org/drawingml/2006/main" xmlns:r="http://schemas.openxmlformats.org/officeDocument/2006/relationships" xmlns:p="http://schemas.openxmlformats.org/presentationml/2006/main">
-  <p:cSld>
-    <p:spTree>
-      <p:nvGrpSpPr>
-        <p:cNvPr id="1" name=""/>
-        <p:cNvGrpSpPr/>
-        <p:nvPr/>
-      </p:nvGrpSpPr>
-      <p:grpSpPr>
-        <a:xfrm>
-          <a:off x="0" y="0"/>
-          <a:ext cx="0" cy="0"/>
-          <a:chOff x="0" y="0"/>
-          <a:chExt cx="0" cy="0"/>
-        </a:xfrm>
-      </p:grpSpPr>
-      <p:sp>
-        <p:nvSpPr>
-          <p:cNvPr id="2" name="Образ слайда 1"/>
-          <p:cNvSpPr>
-            <a:spLocks noGrp="1" noRot="1" noChangeAspect="1"/>
-          </p:cNvSpPr>
-          <p:nvPr>
-            <p:ph type="sldImg"/>
-          </p:nvPr>
-        </p:nvSpPr>
-        <p:spPr/>
-      </p:sp>
-      <p:sp>
-        <p:nvSpPr>
-          <p:cNvPr id="3" name="Заметки 2"/>
-          <p:cNvSpPr>
-            <a:spLocks noGrp="1"/>
-          </p:cNvSpPr>
-          <p:nvPr>
-            <p:ph type="body" idx="1"/>
-          </p:nvPr>
-        </p:nvSpPr>
-        <p:spPr/>
-        <p:txBody>
-          <a:bodyPr/>
-          <a:lstStyle/>
-          <a:p>
-            <a:endParaRPr lang="ru-RU" dirty="0"/>
-          </a:p>
-        </p:txBody>
-      </p:sp>
-      <p:sp>
-        <p:nvSpPr>
-          <p:cNvPr id="4" name="Номер слайда 3"/>
-          <p:cNvSpPr>
-            <a:spLocks noGrp="1"/>
-          </p:cNvSpPr>
-          <p:nvPr>
-            <p:ph type="sldNum" sz="quarter" idx="10"/>
-          </p:nvPr>
-        </p:nvSpPr>
-        <p:spPr/>
-        <p:txBody>
-          <a:bodyPr/>
-          <a:lstStyle/>
-          <a:p>
-            <a:fld id="{AEEB6FB7-BC83-48DF-A6CC-546756D80159}" type="slidenum">
-              <a:rPr lang="ru-RU" smtClean="0"/>
-              <a:t>9</a:t>
             </a:fld>
             <a:endParaRPr lang="ru-RU"/>
           </a:p>
@@ -5204,7 +5043,7 @@
       </p:grpSpPr>
       <p:sp>
         <p:nvSpPr>
-          <p:cNvPr id="1048613" name="Заголовок 1"/>
+          <p:cNvPr id="1048625" name="Заголовок 1"/>
           <p:cNvSpPr>
             <a:spLocks noGrp="1"/>
           </p:cNvSpPr>
@@ -5233,7 +5072,7 @@
       </p:sp>
       <p:sp>
         <p:nvSpPr>
-          <p:cNvPr id="1048615" name="Заголовок 1"/>
+          <p:cNvPr id="1048626" name="Заголовок 1"/>
           <p:cNvSpPr txBox="1"/>
           <p:nvPr/>
         </p:nvSpPr>
@@ -5241,6 +5080,240 @@
           <a:xfrm>
             <a:off x="997527" y="899743"/>
             <a:ext cx="10356272" cy="794085"/>
+          </a:xfrm>
+          <a:prstGeom prst="rect">
+            <a:avLst/>
+          </a:prstGeom>
+        </p:spPr>
+        <p:txBody>
+          <a:bodyPr vert="horz" lIns="91440" tIns="45720" rIns="91440" bIns="45720" rtlCol="0" anchor="ctr">
+            <a:normAutofit fontScale="92500"/>
+          </a:bodyPr>
+          <a:lstStyle>
+            <a:lvl1pPr algn="l" defTabSz="914400" rtl="0" eaLnBrk="1" latinLnBrk="0" hangingPunct="1">
+              <a:lnSpc>
+                <a:spcPct val="90000"/>
+              </a:lnSpc>
+              <a:spcBef>
+                <a:spcPct val="0"/>
+              </a:spcBef>
+              <a:buNone/>
+              <a:defRPr sz="4400" kern="1200">
+                <a:solidFill>
+                  <a:schemeClr val="tx1"/>
+                </a:solidFill>
+                <a:latin typeface="+mj-lt"/>
+                <a:ea typeface="+mj-ea"/>
+                <a:cs typeface="+mj-cs"/>
+              </a:defRPr>
+            </a:lvl1pPr>
+          </a:lstStyle>
+          <a:p>
+            <a:r>
+              <a:rPr lang="ru-RU" sz="3600" dirty="0"/>
+              <a:t>Разработка пользовательского интерфейса и сценариев</a:t>
+            </a:r>
+          </a:p>
+        </p:txBody>
+      </p:sp>
+      <p:sp>
+        <p:nvSpPr>
+          <p:cNvPr id="5" name="Заголовок 1"/>
+          <p:cNvSpPr txBox="1"/>
+          <p:nvPr/>
+        </p:nvSpPr>
+        <p:spPr>
+          <a:xfrm>
+            <a:off x="357447" y="3850536"/>
+            <a:ext cx="4434989" cy="794085"/>
+          </a:xfrm>
+          <a:prstGeom prst="rect">
+            <a:avLst/>
+          </a:prstGeom>
+        </p:spPr>
+        <p:txBody>
+          <a:bodyPr vert="horz" lIns="91440" tIns="45720" rIns="91440" bIns="45720" rtlCol="0" anchor="ctr">
+            <a:noAutofit/>
+          </a:bodyPr>
+          <a:lstStyle>
+            <a:lvl1pPr algn="l" defTabSz="914400" rtl="0" eaLnBrk="1" latinLnBrk="0" hangingPunct="1">
+              <a:lnSpc>
+                <a:spcPct val="90000"/>
+              </a:lnSpc>
+              <a:spcBef>
+                <a:spcPct val="0"/>
+              </a:spcBef>
+              <a:buNone/>
+              <a:defRPr sz="4400" kern="1200">
+                <a:solidFill>
+                  <a:schemeClr val="tx1"/>
+                </a:solidFill>
+                <a:latin typeface="+mj-lt"/>
+                <a:ea typeface="+mj-ea"/>
+                <a:cs typeface="+mj-cs"/>
+              </a:defRPr>
+            </a:lvl1pPr>
+          </a:lstStyle>
+          <a:p>
+            <a:r>
+              <a:rPr lang="ru-RU" b="1" dirty="0" smtClean="0"/>
+              <a:t>Главное меню</a:t>
+            </a:r>
+            <a:endParaRPr lang="ru-RU" b="1" dirty="0"/>
+          </a:p>
+        </p:txBody>
+      </p:sp>
+      <p:pic>
+        <p:nvPicPr>
+          <p:cNvPr id="6" name="Picture 2" descr="C:\Users\USER\Downloads\index.png"/>
+          <p:cNvPicPr>
+            <a:picLocks noChangeAspect="1" noChangeArrowheads="1"/>
+          </p:cNvPicPr>
+          <p:nvPr/>
+        </p:nvPicPr>
+        <p:blipFill>
+          <a:blip r:embed="rId2">
+            <a:extLst>
+              <a:ext uri="{28A0092B-C50C-407E-A947-70E740481C1C}">
+                <a14:useLocalDpi xmlns:a14="http://schemas.microsoft.com/office/drawing/2010/main" val="0"/>
+              </a:ext>
+            </a:extLst>
+          </a:blip>
+          <a:srcRect/>
+          <a:stretch>
+            <a:fillRect/>
+          </a:stretch>
+        </p:blipFill>
+        <p:spPr bwMode="auto">
+          <a:xfrm>
+            <a:off x="7563251" y="2065487"/>
+            <a:ext cx="2013056" cy="4364182"/>
+          </a:xfrm>
+          <a:prstGeom prst="rect">
+            <a:avLst/>
+          </a:prstGeom>
+          <a:noFill/>
+          <a:extLst>
+            <a:ext uri="{909E8E84-426E-40DD-AFC4-6F175D3DCCD1}">
+              <a14:hiddenFill xmlns:a14="http://schemas.microsoft.com/office/drawing/2010/main">
+                <a:solidFill>
+                  <a:srgbClr val="FFFFFF"/>
+                </a:solidFill>
+              </a14:hiddenFill>
+            </a:ext>
+          </a:extLst>
+        </p:spPr>
+      </p:pic>
+    </p:spTree>
+  </p:cSld>
+  <p:clrMapOvr>
+    <a:masterClrMapping/>
+  </p:clrMapOvr>
+</p:sld>
+</file>
+
+<file path=ppt/slides/slide11.xml><?xml version="1.0" encoding="utf-8"?>
+<p:sld xmlns:a="http://schemas.openxmlformats.org/drawingml/2006/main" xmlns:r="http://schemas.openxmlformats.org/officeDocument/2006/relationships" xmlns:p="http://schemas.openxmlformats.org/presentationml/2006/main">
+  <p:cSld>
+    <p:spTree>
+      <p:nvGrpSpPr>
+        <p:cNvPr id="1" name=""/>
+        <p:cNvGrpSpPr/>
+        <p:nvPr/>
+      </p:nvGrpSpPr>
+      <p:grpSpPr>
+        <a:xfrm>
+          <a:off x="0" y="0"/>
+          <a:ext cx="0" cy="0"/>
+          <a:chOff x="0" y="0"/>
+          <a:chExt cx="0" cy="0"/>
+        </a:xfrm>
+      </p:grpSpPr>
+      <p:sp>
+        <p:nvSpPr>
+          <p:cNvPr id="1048625" name="Заголовок 1"/>
+          <p:cNvSpPr>
+            <a:spLocks noGrp="1"/>
+          </p:cNvSpPr>
+          <p:nvPr>
+            <p:ph type="title"/>
+          </p:nvPr>
+        </p:nvSpPr>
+        <p:spPr>
+          <a:xfrm>
+            <a:off x="997527" y="0"/>
+            <a:ext cx="10356272" cy="1296786"/>
+          </a:xfrm>
+        </p:spPr>
+        <p:txBody>
+          <a:bodyPr>
+            <a:normAutofit/>
+          </a:bodyPr>
+          <a:lstStyle/>
+          <a:p>
+            <a:r>
+              <a:rPr lang="ru-RU" sz="4800" dirty="0"/>
+              <a:t>Разработка программного продукта</a:t>
+            </a:r>
+          </a:p>
+        </p:txBody>
+      </p:sp>
+      <p:sp>
+        <p:nvSpPr>
+          <p:cNvPr id="1048626" name="Заголовок 1"/>
+          <p:cNvSpPr txBox="1"/>
+          <p:nvPr/>
+        </p:nvSpPr>
+        <p:spPr>
+          <a:xfrm>
+            <a:off x="997527" y="899743"/>
+            <a:ext cx="10356272" cy="794085"/>
+          </a:xfrm>
+          <a:prstGeom prst="rect">
+            <a:avLst/>
+          </a:prstGeom>
+        </p:spPr>
+        <p:txBody>
+          <a:bodyPr vert="horz" lIns="91440" tIns="45720" rIns="91440" bIns="45720" rtlCol="0" anchor="ctr">
+            <a:normAutofit fontScale="92500"/>
+          </a:bodyPr>
+          <a:lstStyle>
+            <a:lvl1pPr algn="l" defTabSz="914400" rtl="0" eaLnBrk="1" latinLnBrk="0" hangingPunct="1">
+              <a:lnSpc>
+                <a:spcPct val="90000"/>
+              </a:lnSpc>
+              <a:spcBef>
+                <a:spcPct val="0"/>
+              </a:spcBef>
+              <a:buNone/>
+              <a:defRPr sz="4400" kern="1200">
+                <a:solidFill>
+                  <a:schemeClr val="tx1"/>
+                </a:solidFill>
+                <a:latin typeface="+mj-lt"/>
+                <a:ea typeface="+mj-ea"/>
+                <a:cs typeface="+mj-cs"/>
+              </a:defRPr>
+            </a:lvl1pPr>
+          </a:lstStyle>
+          <a:p>
+            <a:r>
+              <a:rPr lang="ru-RU" sz="3600" dirty="0"/>
+              <a:t>Разработка пользовательского интерфейса и сценариев</a:t>
+            </a:r>
+          </a:p>
+        </p:txBody>
+      </p:sp>
+      <p:sp>
+        <p:nvSpPr>
+          <p:cNvPr id="5" name="Заголовок 1"/>
+          <p:cNvSpPr txBox="1"/>
+          <p:nvPr/>
+        </p:nvSpPr>
+        <p:spPr>
+          <a:xfrm>
+            <a:off x="384117" y="3922694"/>
+            <a:ext cx="2454333" cy="794085"/>
           </a:xfrm>
           <a:prstGeom prst="rect">
             <a:avLst/>
@@ -5271,26 +5344,1917 @@
           </a:lstStyle>
           <a:p>
             <a:r>
+              <a:rPr lang="ru-RU" b="1" dirty="0" smtClean="0"/>
+              <a:t>Профиль</a:t>
+            </a:r>
+            <a:endParaRPr lang="ru-RU" sz="3200" b="1" dirty="0"/>
+          </a:p>
+        </p:txBody>
+      </p:sp>
+      <p:pic>
+        <p:nvPicPr>
+          <p:cNvPr id="6" name="Picture 4" descr="C:\Users\USER\Downloads\profile + data.png"/>
+          <p:cNvPicPr>
+            <a:picLocks noChangeAspect="1" noChangeArrowheads="1"/>
+          </p:cNvPicPr>
+          <p:nvPr/>
+        </p:nvPicPr>
+        <p:blipFill>
+          <a:blip r:embed="rId2">
+            <a:extLst>
+              <a:ext uri="{28A0092B-C50C-407E-A947-70E740481C1C}">
+                <a14:useLocalDpi xmlns:a14="http://schemas.microsoft.com/office/drawing/2010/main" val="0"/>
+              </a:ext>
+            </a:extLst>
+          </a:blip>
+          <a:srcRect/>
+          <a:stretch>
+            <a:fillRect/>
+          </a:stretch>
+        </p:blipFill>
+        <p:spPr bwMode="auto">
+          <a:xfrm>
+            <a:off x="6431330" y="1783635"/>
+            <a:ext cx="1762298" cy="4686009"/>
+          </a:xfrm>
+          <a:prstGeom prst="rect">
+            <a:avLst/>
+          </a:prstGeom>
+          <a:noFill/>
+          <a:extLst>
+            <a:ext uri="{909E8E84-426E-40DD-AFC4-6F175D3DCCD1}">
+              <a14:hiddenFill xmlns:a14="http://schemas.microsoft.com/office/drawing/2010/main">
+                <a:solidFill>
+                  <a:srgbClr val="FFFFFF"/>
+                </a:solidFill>
+              </a14:hiddenFill>
+            </a:ext>
+          </a:extLst>
+        </p:spPr>
+      </p:pic>
+    </p:spTree>
+  </p:cSld>
+  <p:clrMapOvr>
+    <a:masterClrMapping/>
+  </p:clrMapOvr>
+</p:sld>
+</file>
+
+<file path=ppt/slides/slide12.xml><?xml version="1.0" encoding="utf-8"?>
+<p:sld xmlns:a="http://schemas.openxmlformats.org/drawingml/2006/main" xmlns:r="http://schemas.openxmlformats.org/officeDocument/2006/relationships" xmlns:p="http://schemas.openxmlformats.org/presentationml/2006/main">
+  <p:cSld>
+    <p:spTree>
+      <p:nvGrpSpPr>
+        <p:cNvPr id="1" name=""/>
+        <p:cNvGrpSpPr/>
+        <p:nvPr/>
+      </p:nvGrpSpPr>
+      <p:grpSpPr>
+        <a:xfrm>
+          <a:off x="0" y="0"/>
+          <a:ext cx="0" cy="0"/>
+          <a:chOff x="0" y="0"/>
+          <a:chExt cx="0" cy="0"/>
+        </a:xfrm>
+      </p:grpSpPr>
+      <p:sp>
+        <p:nvSpPr>
+          <p:cNvPr id="1048625" name="Заголовок 1"/>
+          <p:cNvSpPr>
+            <a:spLocks noGrp="1"/>
+          </p:cNvSpPr>
+          <p:nvPr>
+            <p:ph type="title"/>
+          </p:nvPr>
+        </p:nvSpPr>
+        <p:spPr>
+          <a:xfrm>
+            <a:off x="997527" y="0"/>
+            <a:ext cx="10356272" cy="1296786"/>
+          </a:xfrm>
+        </p:spPr>
+        <p:txBody>
+          <a:bodyPr>
+            <a:normAutofit/>
+          </a:bodyPr>
+          <a:lstStyle/>
+          <a:p>
+            <a:r>
+              <a:rPr lang="ru-RU" sz="4800" dirty="0"/>
+              <a:t>Разработка программного продукта</a:t>
+            </a:r>
+          </a:p>
+        </p:txBody>
+      </p:sp>
+      <p:sp>
+        <p:nvSpPr>
+          <p:cNvPr id="1048626" name="Заголовок 1"/>
+          <p:cNvSpPr txBox="1"/>
+          <p:nvPr/>
+        </p:nvSpPr>
+        <p:spPr>
+          <a:xfrm>
+            <a:off x="997527" y="899743"/>
+            <a:ext cx="10356272" cy="794085"/>
+          </a:xfrm>
+          <a:prstGeom prst="rect">
+            <a:avLst/>
+          </a:prstGeom>
+        </p:spPr>
+        <p:txBody>
+          <a:bodyPr vert="horz" lIns="91440" tIns="45720" rIns="91440" bIns="45720" rtlCol="0" anchor="ctr">
+            <a:normAutofit fontScale="92500"/>
+          </a:bodyPr>
+          <a:lstStyle>
+            <a:lvl1pPr algn="l" defTabSz="914400" rtl="0" eaLnBrk="1" latinLnBrk="0" hangingPunct="1">
+              <a:lnSpc>
+                <a:spcPct val="90000"/>
+              </a:lnSpc>
+              <a:spcBef>
+                <a:spcPct val="0"/>
+              </a:spcBef>
+              <a:buNone/>
+              <a:defRPr sz="4400" kern="1200">
+                <a:solidFill>
+                  <a:schemeClr val="tx1"/>
+                </a:solidFill>
+                <a:latin typeface="+mj-lt"/>
+                <a:ea typeface="+mj-ea"/>
+                <a:cs typeface="+mj-cs"/>
+              </a:defRPr>
+            </a:lvl1pPr>
+          </a:lstStyle>
+          <a:p>
+            <a:r>
               <a:rPr lang="ru-RU" sz="3600" dirty="0"/>
-              <a:t>Выбор инструментальных средств</a:t>
-            </a:r>
-          </a:p>
-        </p:txBody>
-      </p:sp>
-      <p:sp>
-        <p:nvSpPr>
-          <p:cNvPr id="4" name="Rectangle 3"/>
-          <p:cNvSpPr>
-            <a:spLocks noGrp="1" noChangeArrowheads="1"/>
+              <a:t>Разработка пользовательского интерфейса и сценариев</a:t>
+            </a:r>
+          </a:p>
+        </p:txBody>
+      </p:sp>
+      <p:sp>
+        <p:nvSpPr>
+          <p:cNvPr id="13" name="Заголовок 1"/>
+          <p:cNvSpPr txBox="1"/>
+          <p:nvPr/>
+        </p:nvSpPr>
+        <p:spPr>
+          <a:xfrm>
+            <a:off x="346016" y="4030644"/>
+            <a:ext cx="5548597" cy="794085"/>
+          </a:xfrm>
+          <a:prstGeom prst="rect">
+            <a:avLst/>
+          </a:prstGeom>
+        </p:spPr>
+        <p:txBody>
+          <a:bodyPr vert="horz" lIns="91440" tIns="45720" rIns="91440" bIns="45720" rtlCol="0" anchor="ctr">
+            <a:noAutofit/>
+          </a:bodyPr>
+          <a:lstStyle>
+            <a:lvl1pPr algn="l" defTabSz="914400" rtl="0" eaLnBrk="1" latinLnBrk="0" hangingPunct="1">
+              <a:lnSpc>
+                <a:spcPct val="90000"/>
+              </a:lnSpc>
+              <a:spcBef>
+                <a:spcPct val="0"/>
+              </a:spcBef>
+              <a:buNone/>
+              <a:defRPr sz="4400" kern="1200">
+                <a:solidFill>
+                  <a:schemeClr val="tx1"/>
+                </a:solidFill>
+                <a:latin typeface="+mj-lt"/>
+                <a:ea typeface="+mj-ea"/>
+                <a:cs typeface="+mj-cs"/>
+              </a:defRPr>
+            </a:lvl1pPr>
+          </a:lstStyle>
+          <a:p>
+            <a:r>
+              <a:rPr lang="ru-RU" b="1" dirty="0" smtClean="0"/>
+              <a:t>Раздел «Гадание на Таро»</a:t>
+            </a:r>
+            <a:endParaRPr lang="ru-RU" b="1" dirty="0"/>
+          </a:p>
+        </p:txBody>
+      </p:sp>
+      <p:pic>
+        <p:nvPicPr>
+          <p:cNvPr id="6" name="Picture 3" descr="C:\Users\USER\Downloads\tarot.png"/>
+          <p:cNvPicPr>
+            <a:picLocks noChangeAspect="1" noChangeArrowheads="1"/>
+          </p:cNvPicPr>
+          <p:nvPr/>
+        </p:nvPicPr>
+        <p:blipFill>
+          <a:blip r:embed="rId2">
+            <a:extLst>
+              <a:ext uri="{28A0092B-C50C-407E-A947-70E740481C1C}">
+                <a14:useLocalDpi xmlns:a14="http://schemas.microsoft.com/office/drawing/2010/main" val="0"/>
+              </a:ext>
+            </a:extLst>
+          </a:blip>
+          <a:srcRect/>
+          <a:stretch>
+            <a:fillRect/>
+          </a:stretch>
+        </p:blipFill>
+        <p:spPr bwMode="auto">
+          <a:xfrm>
+            <a:off x="7102528" y="1965366"/>
+            <a:ext cx="2013056" cy="4364182"/>
+          </a:xfrm>
+          <a:prstGeom prst="rect">
+            <a:avLst/>
+          </a:prstGeom>
+          <a:noFill/>
+          <a:extLst>
+            <a:ext uri="{909E8E84-426E-40DD-AFC4-6F175D3DCCD1}">
+              <a14:hiddenFill xmlns:a14="http://schemas.microsoft.com/office/drawing/2010/main">
+                <a:solidFill>
+                  <a:srgbClr val="FFFFFF"/>
+                </a:solidFill>
+              </a14:hiddenFill>
+            </a:ext>
+          </a:extLst>
+        </p:spPr>
+      </p:pic>
+    </p:spTree>
+  </p:cSld>
+  <p:clrMapOvr>
+    <a:masterClrMapping/>
+  </p:clrMapOvr>
+</p:sld>
+</file>
+
+<file path=ppt/slides/slide13.xml><?xml version="1.0" encoding="utf-8"?>
+<p:sld xmlns:a="http://schemas.openxmlformats.org/drawingml/2006/main" xmlns:r="http://schemas.openxmlformats.org/officeDocument/2006/relationships" xmlns:p="http://schemas.openxmlformats.org/presentationml/2006/main">
+  <p:cSld>
+    <p:spTree>
+      <p:nvGrpSpPr>
+        <p:cNvPr id="1" name=""/>
+        <p:cNvGrpSpPr/>
+        <p:nvPr/>
+      </p:nvGrpSpPr>
+      <p:grpSpPr>
+        <a:xfrm>
+          <a:off x="0" y="0"/>
+          <a:ext cx="0" cy="0"/>
+          <a:chOff x="0" y="0"/>
+          <a:chExt cx="0" cy="0"/>
+        </a:xfrm>
+      </p:grpSpPr>
+      <p:sp>
+        <p:nvSpPr>
+          <p:cNvPr id="1048647" name="Заголовок 1"/>
+          <p:cNvSpPr>
+            <a:spLocks noGrp="1"/>
+          </p:cNvSpPr>
+          <p:nvPr>
+            <p:ph type="title"/>
+          </p:nvPr>
+        </p:nvSpPr>
+        <p:spPr>
+          <a:xfrm>
+            <a:off x="997527" y="240631"/>
+            <a:ext cx="10356272" cy="1296786"/>
+          </a:xfrm>
+        </p:spPr>
+        <p:txBody>
+          <a:bodyPr>
+            <a:normAutofit/>
+          </a:bodyPr>
+          <a:lstStyle/>
+          <a:p>
+            <a:r>
+              <a:rPr lang="ru-RU" sz="4800" dirty="0"/>
+              <a:t>Заключение</a:t>
+            </a:r>
+          </a:p>
+        </p:txBody>
+      </p:sp>
+      <p:sp>
+        <p:nvSpPr>
+          <p:cNvPr id="1048648" name="Объект 2"/>
+          <p:cNvSpPr>
+            <a:spLocks noGrp="1"/>
           </p:cNvSpPr>
           <p:nvPr>
             <p:ph idx="1"/>
           </p:nvPr>
         </p:nvSpPr>
+        <p:spPr>
+          <a:xfrm>
+            <a:off x="160655" y="1425575"/>
+            <a:ext cx="11877675" cy="5299710"/>
+          </a:xfrm>
+        </p:spPr>
+        <p:txBody>
+          <a:bodyPr anchor="ctr">
+            <a:noAutofit/>
+          </a:bodyPr>
+          <a:lstStyle/>
+          <a:p>
+            <a:pPr marL="0" indent="0">
+              <a:buNone/>
+            </a:pPr>
+            <a:r>
+              <a:rPr lang="ru-RU" dirty="0"/>
+              <a:t>В ходе работы над дипломным проектом </a:t>
+            </a:r>
+            <a:r>
+              <a:rPr lang="ru-RU" dirty="0" smtClean="0"/>
+              <a:t>реализован </a:t>
+            </a:r>
+            <a:r>
+              <a:rPr lang="ru-RU" dirty="0" err="1" smtClean="0"/>
+              <a:t>пользоваельскй</a:t>
+            </a:r>
+            <a:r>
+              <a:rPr lang="ru-RU" dirty="0" smtClean="0"/>
+              <a:t> </a:t>
+            </a:r>
+            <a:r>
+              <a:rPr lang="ru-RU" dirty="0" smtClean="0">
+                <a:sym typeface="+mn-ea"/>
+              </a:rPr>
+              <a:t>и</a:t>
+            </a:r>
+            <a:r>
+              <a:rPr lang="ru-RU" dirty="0" smtClean="0"/>
+              <a:t>нтерфейс мобильного приложения «</a:t>
+            </a:r>
+            <a:r>
+              <a:rPr lang="en-US" dirty="0" err="1" smtClean="0"/>
+              <a:t>Mystik</a:t>
+            </a:r>
+            <a:r>
+              <a:rPr lang="ru-RU" dirty="0" smtClean="0"/>
+              <a:t>».</a:t>
+            </a:r>
+          </a:p>
+          <a:p>
+            <a:r>
+              <a:rPr lang="ru-RU" dirty="0" smtClean="0"/>
+              <a:t>Итог</a:t>
+            </a:r>
+            <a:r>
+              <a:rPr lang="ru-RU" dirty="0"/>
+              <a:t>: разработан пользовательский интерфейс, ориентированный на комфортное восприятие информации и интуитивно понятное взаимодействие. При проектировании экранов и навигации особое внимание уделялось эргономичности и визуальной доступности</a:t>
+            </a:r>
+            <a:r>
+              <a:rPr lang="ru-RU" altLang="en-US" dirty="0" smtClean="0"/>
+              <a:t>.</a:t>
+            </a:r>
+            <a:endParaRPr lang="en-US" altLang="ru-RU" dirty="0" smtClean="0"/>
+          </a:p>
+          <a:p>
+            <a:r>
+              <a:rPr lang="ru-RU" dirty="0" smtClean="0"/>
+              <a:t>Готовность</a:t>
+            </a:r>
+            <a:r>
+              <a:rPr lang="ru-RU" dirty="0"/>
+              <a:t>: разработанный продукт объединяет эзотерическую тематику с современными технологиями разработки </a:t>
+            </a:r>
+            <a:r>
+              <a:rPr lang="ru-RU" dirty="0" smtClean="0"/>
+              <a:t>и </a:t>
+            </a:r>
+            <a:r>
+              <a:rPr lang="ru-RU" dirty="0"/>
+              <a:t>готов к </a:t>
+            </a:r>
+            <a:r>
+              <a:rPr lang="ru-RU" dirty="0" smtClean="0"/>
+              <a:t>использованию </a:t>
+            </a:r>
+            <a:r>
+              <a:rPr lang="ru-RU" dirty="0"/>
+              <a:t>среди целевой аудитории</a:t>
+            </a:r>
+            <a:r>
+              <a:rPr lang="ru-RU" dirty="0" smtClean="0"/>
+              <a:t>.</a:t>
+            </a:r>
+            <a:endParaRPr lang="ru-RU" dirty="0"/>
+          </a:p>
+        </p:txBody>
+      </p:sp>
+    </p:spTree>
+  </p:cSld>
+  <p:clrMapOvr>
+    <a:masterClrMapping/>
+  </p:clrMapOvr>
+</p:sld>
+</file>
+
+<file path=ppt/slides/slide14.xml><?xml version="1.0" encoding="utf-8"?>
+<p:sld xmlns:a="http://schemas.openxmlformats.org/drawingml/2006/main" xmlns:r="http://schemas.openxmlformats.org/officeDocument/2006/relationships" xmlns:p="http://schemas.openxmlformats.org/presentationml/2006/main">
+  <p:cSld>
+    <p:spTree>
+      <p:nvGrpSpPr>
+        <p:cNvPr id="1" name=""/>
+        <p:cNvGrpSpPr/>
+        <p:nvPr/>
+      </p:nvGrpSpPr>
+      <p:grpSpPr>
+        <a:xfrm>
+          <a:off x="0" y="0"/>
+          <a:ext cx="0" cy="0"/>
+          <a:chOff x="0" y="0"/>
+          <a:chExt cx="0" cy="0"/>
+        </a:xfrm>
+      </p:grpSpPr>
+      <p:sp>
+        <p:nvSpPr>
+          <p:cNvPr id="1048586" name="Заголовок 1"/>
+          <p:cNvSpPr>
+            <a:spLocks noGrp="1"/>
+          </p:cNvSpPr>
+          <p:nvPr>
+            <p:ph type="ctrTitle"/>
+          </p:nvPr>
+        </p:nvSpPr>
+        <p:spPr>
+          <a:xfrm>
+            <a:off x="1437138" y="1647016"/>
+            <a:ext cx="9940779" cy="2387600"/>
+          </a:xfrm>
+        </p:spPr>
+        <p:txBody>
+          <a:bodyPr anchor="ctr">
+            <a:noAutofit/>
+          </a:bodyPr>
+          <a:lstStyle/>
+          <a:p>
+            <a:r>
+              <a:rPr lang="ru-RU" sz="3600" dirty="0"/>
+              <a:t>Разработка клиентской части </a:t>
+            </a:r>
+            <a:r>
+              <a:rPr lang="ru-RU" sz="3600" dirty="0" smtClean="0"/>
+              <a:t>мобильного приложения «</a:t>
+            </a:r>
+            <a:r>
+              <a:rPr lang="en-US" sz="3600" dirty="0" err="1" smtClean="0"/>
+              <a:t>Mystik</a:t>
+            </a:r>
+            <a:r>
+              <a:rPr lang="ru-RU" sz="3600" dirty="0" smtClean="0"/>
+              <a:t>» </a:t>
+            </a:r>
+            <a:r>
+              <a:rPr lang="ru-RU" sz="3600" dirty="0"/>
+              <a:t>для </a:t>
+            </a:r>
+            <a:r>
+              <a:rPr lang="ru-RU" sz="3600" dirty="0" smtClean="0"/>
+              <a:t>астрологических прогнозов и таро предсказаний</a:t>
+            </a:r>
+            <a:endParaRPr lang="ru-RU" sz="2000" dirty="0"/>
+          </a:p>
+        </p:txBody>
+      </p:sp>
+      <p:sp>
+        <p:nvSpPr>
+          <p:cNvPr id="1048587" name="Подзаголовок 2"/>
+          <p:cNvSpPr>
+            <a:spLocks noGrp="1"/>
+          </p:cNvSpPr>
+          <p:nvPr>
+            <p:ph type="subTitle" idx="1"/>
+          </p:nvPr>
+        </p:nvSpPr>
+        <p:spPr>
+          <a:xfrm>
+            <a:off x="5899150" y="3895324"/>
+            <a:ext cx="6031684" cy="2525086"/>
+          </a:xfrm>
+        </p:spPr>
+        <p:txBody>
+          <a:bodyPr>
+            <a:noAutofit/>
+          </a:bodyPr>
+          <a:lstStyle/>
+          <a:p>
+            <a:pPr algn="r">
+              <a:lnSpc>
+                <a:spcPct val="114000"/>
+              </a:lnSpc>
+              <a:spcAft>
+                <a:spcPts val="0"/>
+              </a:spcAft>
+            </a:pPr>
+            <a:endParaRPr lang="ru-RU" sz="1600" dirty="0">
+              <a:effectLst/>
+              <a:latin typeface="Arial" panose="020B0604020202020204" pitchFamily="34" charset="0"/>
+              <a:ea typeface="Times New Roman" panose="02020603050405020304" pitchFamily="18" charset="0"/>
+              <a:cs typeface="Arial" panose="020B0604020202020204" pitchFamily="34" charset="0"/>
+            </a:endParaRPr>
+          </a:p>
+          <a:p>
+            <a:pPr algn="r">
+              <a:lnSpc>
+                <a:spcPct val="114000"/>
+              </a:lnSpc>
+              <a:spcAft>
+                <a:spcPts val="0"/>
+              </a:spcAft>
+            </a:pPr>
+            <a:r>
+              <a:rPr lang="ru-RU" sz="1600" dirty="0">
+                <a:effectLst/>
+                <a:latin typeface="Arial" panose="020B0604020202020204" pitchFamily="34" charset="0"/>
+                <a:ea typeface="Times New Roman" panose="02020603050405020304" pitchFamily="18" charset="0"/>
+                <a:cs typeface="Arial" panose="020B0604020202020204" pitchFamily="34" charset="0"/>
+              </a:rPr>
+              <a:t>Обучающийся </a:t>
+            </a:r>
+            <a:r>
+              <a:rPr lang="ru-RU" sz="1600" dirty="0" smtClean="0">
+                <a:effectLst/>
+                <a:latin typeface="Arial" panose="020B0604020202020204" pitchFamily="34" charset="0"/>
+                <a:ea typeface="Times New Roman" panose="02020603050405020304" pitchFamily="18" charset="0"/>
+                <a:cs typeface="Arial" panose="020B0604020202020204" pitchFamily="34" charset="0"/>
+              </a:rPr>
+              <a:t>422 ИСВ</a:t>
+            </a:r>
+            <a:r>
+              <a:rPr lang="en-US" sz="1600" dirty="0" smtClean="0">
+                <a:effectLst/>
+                <a:latin typeface="Arial" panose="020B0604020202020204" pitchFamily="34" charset="0"/>
+                <a:ea typeface="Times New Roman" panose="02020603050405020304" pitchFamily="18" charset="0"/>
+                <a:cs typeface="Arial" panose="020B0604020202020204" pitchFamily="34" charset="0"/>
+              </a:rPr>
+              <a:t>/</a:t>
+            </a:r>
+            <a:r>
+              <a:rPr lang="ru-RU" sz="1600" dirty="0" smtClean="0">
+                <a:effectLst/>
+                <a:latin typeface="Arial" panose="020B0604020202020204" pitchFamily="34" charset="0"/>
+                <a:ea typeface="Times New Roman" panose="02020603050405020304" pitchFamily="18" charset="0"/>
+                <a:cs typeface="Arial" panose="020B0604020202020204" pitchFamily="34" charset="0"/>
+              </a:rPr>
+              <a:t>1 </a:t>
+            </a:r>
+            <a:r>
+              <a:rPr lang="ru-RU" sz="1600" dirty="0">
+                <a:effectLst/>
+                <a:latin typeface="Arial" panose="020B0604020202020204" pitchFamily="34" charset="0"/>
+                <a:ea typeface="Times New Roman" panose="02020603050405020304" pitchFamily="18" charset="0"/>
+                <a:cs typeface="Arial" panose="020B0604020202020204" pitchFamily="34" charset="0"/>
+              </a:rPr>
+              <a:t>группы</a:t>
+            </a:r>
+            <a:br>
+              <a:rPr lang="ru-RU" sz="1600" dirty="0">
+                <a:effectLst/>
+                <a:latin typeface="Arial" panose="020B0604020202020204" pitchFamily="34" charset="0"/>
+                <a:ea typeface="Times New Roman" panose="02020603050405020304" pitchFamily="18" charset="0"/>
+                <a:cs typeface="Arial" panose="020B0604020202020204" pitchFamily="34" charset="0"/>
+              </a:rPr>
+            </a:br>
+            <a:r>
+              <a:rPr lang="ru-RU" sz="1600" dirty="0" smtClean="0">
+                <a:effectLst/>
+                <a:latin typeface="Arial" panose="020B0604020202020204" pitchFamily="34" charset="0"/>
+                <a:ea typeface="Times New Roman" panose="02020603050405020304" pitchFamily="18" charset="0"/>
+                <a:cs typeface="Arial" panose="020B0604020202020204" pitchFamily="34" charset="0"/>
+              </a:rPr>
+              <a:t>Сараева Вероника Владимировна, </a:t>
+            </a:r>
+            <a:r>
+              <a:rPr lang="ru-RU" sz="1600" dirty="0">
+                <a:effectLst/>
+                <a:latin typeface="Arial" panose="020B0604020202020204" pitchFamily="34" charset="0"/>
+                <a:ea typeface="Times New Roman" panose="02020603050405020304" pitchFamily="18" charset="0"/>
+                <a:cs typeface="Arial" panose="020B0604020202020204" pitchFamily="34" charset="0"/>
+              </a:rPr>
+              <a:t/>
+            </a:r>
+            <a:br>
+              <a:rPr lang="ru-RU" sz="1600" dirty="0">
+                <a:effectLst/>
+                <a:latin typeface="Arial" panose="020B0604020202020204" pitchFamily="34" charset="0"/>
+                <a:ea typeface="Times New Roman" panose="02020603050405020304" pitchFamily="18" charset="0"/>
+                <a:cs typeface="Arial" panose="020B0604020202020204" pitchFamily="34" charset="0"/>
+              </a:rPr>
+            </a:br>
+            <a:r>
+              <a:rPr lang="ru-RU" sz="1600" dirty="0">
+                <a:effectLst/>
+                <a:latin typeface="Arial" panose="020B0604020202020204" pitchFamily="34" charset="0"/>
+                <a:ea typeface="Times New Roman" panose="02020603050405020304" pitchFamily="18" charset="0"/>
+                <a:cs typeface="Arial" panose="020B0604020202020204" pitchFamily="34" charset="0"/>
+              </a:rPr>
+              <a:t>специальность 09.02.07 Информационные </a:t>
+            </a:r>
+            <a:r>
+              <a:rPr lang="ru-RU" sz="1600" dirty="0" smtClean="0">
+                <a:effectLst/>
+                <a:latin typeface="Arial" panose="020B0604020202020204" pitchFamily="34" charset="0"/>
+                <a:ea typeface="Times New Roman" panose="02020603050405020304" pitchFamily="18" charset="0"/>
+                <a:cs typeface="Arial" panose="020B0604020202020204" pitchFamily="34" charset="0"/>
+              </a:rPr>
+              <a:t>системы </a:t>
+            </a:r>
+            <a:r>
+              <a:rPr lang="ru-RU" sz="1600" dirty="0">
+                <a:effectLst/>
+                <a:latin typeface="Arial" panose="020B0604020202020204" pitchFamily="34" charset="0"/>
+                <a:ea typeface="Times New Roman" panose="02020603050405020304" pitchFamily="18" charset="0"/>
+                <a:cs typeface="Arial" panose="020B0604020202020204" pitchFamily="34" charset="0"/>
+              </a:rPr>
+              <a:t>и </a:t>
+            </a:r>
+            <a:r>
+              <a:rPr lang="ru-RU" sz="1600" dirty="0" smtClean="0">
+                <a:effectLst/>
+                <a:latin typeface="Arial" panose="020B0604020202020204" pitchFamily="34" charset="0"/>
+                <a:ea typeface="Times New Roman" panose="02020603050405020304" pitchFamily="18" charset="0"/>
+                <a:cs typeface="Arial" panose="020B0604020202020204" pitchFamily="34" charset="0"/>
+              </a:rPr>
+              <a:t>программирование</a:t>
+            </a:r>
+          </a:p>
+          <a:p>
+            <a:pPr algn="r">
+              <a:lnSpc>
+                <a:spcPct val="114000"/>
+              </a:lnSpc>
+              <a:spcAft>
+                <a:spcPts val="0"/>
+              </a:spcAft>
+            </a:pPr>
+            <a:r>
+              <a:rPr lang="ru-RU" sz="1600" dirty="0" smtClean="0">
+                <a:effectLst/>
+                <a:latin typeface="Arial" panose="020B0604020202020204" pitchFamily="34" charset="0"/>
+                <a:ea typeface="Times New Roman" panose="02020603050405020304" pitchFamily="18" charset="0"/>
+                <a:cs typeface="Arial" panose="020B0604020202020204" pitchFamily="34" charset="0"/>
+              </a:rPr>
+              <a:t>Руководитель дипломного проекта</a:t>
+            </a:r>
+            <a:br>
+              <a:rPr lang="ru-RU" sz="1600" dirty="0" smtClean="0">
+                <a:effectLst/>
+                <a:latin typeface="Arial" panose="020B0604020202020204" pitchFamily="34" charset="0"/>
+                <a:ea typeface="Times New Roman" panose="02020603050405020304" pitchFamily="18" charset="0"/>
+                <a:cs typeface="Arial" panose="020B0604020202020204" pitchFamily="34" charset="0"/>
+              </a:rPr>
+            </a:br>
+            <a:r>
+              <a:rPr lang="ru-RU" sz="1600" dirty="0" smtClean="0">
+                <a:latin typeface="Arial" panose="020B0604020202020204" pitchFamily="34" charset="0"/>
+                <a:ea typeface="Times New Roman" panose="02020603050405020304" pitchFamily="18" charset="0"/>
+                <a:cs typeface="Arial" panose="020B0604020202020204" pitchFamily="34" charset="0"/>
+              </a:rPr>
+              <a:t>Анна Александровна Север</a:t>
+            </a:r>
+            <a:r>
+              <a:rPr lang="ru-RU" sz="1600" dirty="0" smtClean="0">
+                <a:effectLst/>
+                <a:latin typeface="Arial" panose="020B0604020202020204" pitchFamily="34" charset="0"/>
+                <a:ea typeface="Times New Roman" panose="02020603050405020304" pitchFamily="18" charset="0"/>
+                <a:cs typeface="Arial" panose="020B0604020202020204" pitchFamily="34" charset="0"/>
+              </a:rPr>
+              <a:t>,</a:t>
+            </a:r>
+            <a:br>
+              <a:rPr lang="ru-RU" sz="1600" dirty="0" smtClean="0">
+                <a:effectLst/>
+                <a:latin typeface="Arial" panose="020B0604020202020204" pitchFamily="34" charset="0"/>
+                <a:ea typeface="Times New Roman" panose="02020603050405020304" pitchFamily="18" charset="0"/>
+                <a:cs typeface="Arial" panose="020B0604020202020204" pitchFamily="34" charset="0"/>
+              </a:rPr>
+            </a:br>
+            <a:r>
+              <a:rPr lang="ru-RU" sz="1600" dirty="0" smtClean="0">
+                <a:effectLst/>
+                <a:latin typeface="Arial" panose="020B0604020202020204" pitchFamily="34" charset="0"/>
+                <a:ea typeface="Times New Roman" panose="02020603050405020304" pitchFamily="18" charset="0"/>
+                <a:cs typeface="Arial" panose="020B0604020202020204" pitchFamily="34" charset="0"/>
+              </a:rPr>
+              <a:t>преподаватель, БУ «</a:t>
+            </a:r>
+            <a:r>
+              <a:rPr lang="ru-RU" sz="1600" dirty="0" err="1" smtClean="0">
+                <a:effectLst/>
+                <a:latin typeface="Arial" panose="020B0604020202020204" pitchFamily="34" charset="0"/>
+                <a:ea typeface="Times New Roman" panose="02020603050405020304" pitchFamily="18" charset="0"/>
+                <a:cs typeface="Arial" panose="020B0604020202020204" pitchFamily="34" charset="0"/>
+              </a:rPr>
+              <a:t>Нижневартовский</a:t>
+            </a:r>
+            <a:r>
+              <a:rPr lang="ru-RU" sz="1600" dirty="0" smtClean="0">
+                <a:effectLst/>
+                <a:latin typeface="Arial" panose="020B0604020202020204" pitchFamily="34" charset="0"/>
+                <a:ea typeface="Times New Roman" panose="02020603050405020304" pitchFamily="18" charset="0"/>
+                <a:cs typeface="Arial" panose="020B0604020202020204" pitchFamily="34" charset="0"/>
+              </a:rPr>
+              <a:t> социально-гуманитарный колледж»</a:t>
+            </a:r>
+          </a:p>
+          <a:p>
+            <a:pPr algn="r">
+              <a:lnSpc>
+                <a:spcPct val="114000"/>
+              </a:lnSpc>
+            </a:pPr>
+            <a:endParaRPr lang="ru-RU" sz="1600" dirty="0">
+              <a:latin typeface="Arial" panose="020B0604020202020204" pitchFamily="34" charset="0"/>
+              <a:cs typeface="Arial" panose="020B0604020202020204" pitchFamily="34" charset="0"/>
+            </a:endParaRPr>
+          </a:p>
+        </p:txBody>
+      </p:sp>
+      <p:sp>
+        <p:nvSpPr>
+          <p:cNvPr id="1048588" name="TextBox 3"/>
+          <p:cNvSpPr txBox="1"/>
+          <p:nvPr/>
+        </p:nvSpPr>
+        <p:spPr>
+          <a:xfrm>
+            <a:off x="1524000" y="475690"/>
+            <a:ext cx="9144000" cy="891540"/>
+          </a:xfrm>
+          <a:prstGeom prst="rect">
+            <a:avLst/>
+          </a:prstGeom>
+          <a:noFill/>
+        </p:spPr>
+        <p:txBody>
+          <a:bodyPr wrap="square" rtlCol="0">
+            <a:spAutoFit/>
+          </a:bodyPr>
+          <a:lstStyle/>
+          <a:p>
+            <a:pPr algn="ctr"/>
+            <a:r>
+              <a:rPr lang="ru-RU" b="0" i="0" dirty="0">
+                <a:solidFill>
+                  <a:srgbClr val="303030"/>
+                </a:solidFill>
+                <a:effectLst/>
+                <a:latin typeface="PT Sans"/>
+              </a:rPr>
+              <a:t>Бюджетное учреждение профессионального образования </a:t>
+            </a:r>
+            <a:br>
+              <a:rPr lang="ru-RU" b="0" i="0" dirty="0">
+                <a:solidFill>
+                  <a:srgbClr val="303030"/>
+                </a:solidFill>
+                <a:effectLst/>
+                <a:latin typeface="PT Sans"/>
+              </a:rPr>
+            </a:br>
+            <a:r>
+              <a:rPr lang="ru-RU" b="0" i="0" dirty="0">
+                <a:solidFill>
+                  <a:srgbClr val="303030"/>
+                </a:solidFill>
+                <a:effectLst/>
+                <a:latin typeface="PT Sans"/>
+              </a:rPr>
+              <a:t>Ханты-Мансийского автономного округа - Югры </a:t>
+            </a:r>
+            <a:br>
+              <a:rPr lang="ru-RU" b="0" i="0" dirty="0">
+                <a:solidFill>
+                  <a:srgbClr val="303030"/>
+                </a:solidFill>
+                <a:effectLst/>
+                <a:latin typeface="PT Sans"/>
+              </a:rPr>
+            </a:br>
+            <a:r>
+              <a:rPr lang="ru-RU" b="0" i="0" dirty="0">
+                <a:solidFill>
+                  <a:srgbClr val="303030"/>
+                </a:solidFill>
+                <a:effectLst/>
+                <a:latin typeface="PT Sans"/>
+              </a:rPr>
+              <a:t>«Нижневартовский социально-гуманитарный колледж»</a:t>
+            </a:r>
+            <a:endParaRPr lang="ru-RU" dirty="0"/>
+          </a:p>
+        </p:txBody>
+      </p:sp>
+      <p:pic>
+        <p:nvPicPr>
+          <p:cNvPr id="2097152" name="Picture 2"/>
+          <p:cNvPicPr>
+            <a:picLocks noChangeAspect="1" noChangeArrowheads="1"/>
+          </p:cNvPicPr>
+          <p:nvPr/>
+        </p:nvPicPr>
+        <p:blipFill>
+          <a:blip r:embed="rId2"/>
+          <a:srcRect/>
+          <a:stretch>
+            <a:fillRect/>
+          </a:stretch>
+        </p:blipFill>
         <p:spPr bwMode="auto">
           <a:xfrm>
-            <a:off x="838200" y="2113750"/>
-            <a:ext cx="9662159" cy="3877985"/>
+            <a:off x="8389" y="4866"/>
+            <a:ext cx="1428750" cy="1428750"/>
+          </a:xfrm>
+          <a:prstGeom prst="rect">
+            <a:avLst/>
+          </a:prstGeom>
+          <a:noFill/>
+        </p:spPr>
+      </p:pic>
+    </p:spTree>
+    <p:extLst>
+      <p:ext uri="{BB962C8B-B14F-4D97-AF65-F5344CB8AC3E}">
+        <p14:creationId xmlns:p14="http://schemas.microsoft.com/office/powerpoint/2010/main" val="3729053305"/>
+      </p:ext>
+    </p:extLst>
+  </p:cSld>
+  <p:clrMapOvr>
+    <a:masterClrMapping/>
+  </p:clrMapOvr>
+</p:sld>
+</file>
+
+<file path=ppt/slides/slide2.xml><?xml version="1.0" encoding="utf-8"?>
+<p:sld xmlns:a="http://schemas.openxmlformats.org/drawingml/2006/main" xmlns:r="http://schemas.openxmlformats.org/officeDocument/2006/relationships" xmlns:p="http://schemas.openxmlformats.org/presentationml/2006/main">
+  <p:cSld>
+    <p:spTree>
+      <p:nvGrpSpPr>
+        <p:cNvPr id="1" name=""/>
+        <p:cNvGrpSpPr/>
+        <p:nvPr/>
+      </p:nvGrpSpPr>
+      <p:grpSpPr>
+        <a:xfrm>
+          <a:off x="0" y="0"/>
+          <a:ext cx="0" cy="0"/>
+          <a:chOff x="0" y="0"/>
+          <a:chExt cx="0" cy="0"/>
+        </a:xfrm>
+      </p:grpSpPr>
+      <p:sp>
+        <p:nvSpPr>
+          <p:cNvPr id="1048596" name="Заголовок 1"/>
+          <p:cNvSpPr>
+            <a:spLocks noGrp="1"/>
+          </p:cNvSpPr>
+          <p:nvPr>
+            <p:ph type="title"/>
+          </p:nvPr>
+        </p:nvSpPr>
+        <p:spPr/>
+        <p:txBody>
+          <a:bodyPr>
+            <a:normAutofit/>
+          </a:bodyPr>
+          <a:lstStyle/>
+          <a:p>
+            <a:r>
+              <a:rPr lang="ru-RU" dirty="0" smtClean="0"/>
+              <a:t>Актуальност</a:t>
+            </a:r>
+            <a:r>
+              <a:rPr lang="ru-RU" dirty="0"/>
+              <a:t>ь</a:t>
+            </a:r>
+          </a:p>
+        </p:txBody>
+      </p:sp>
+      <p:sp>
+        <p:nvSpPr>
+          <p:cNvPr id="1048597" name="Объект 2"/>
+          <p:cNvSpPr>
+            <a:spLocks noGrp="1"/>
+          </p:cNvSpPr>
+          <p:nvPr>
+            <p:ph idx="1"/>
+          </p:nvPr>
+        </p:nvSpPr>
+        <p:spPr>
+          <a:xfrm>
+            <a:off x="838200" y="2038690"/>
+            <a:ext cx="10515600" cy="4351338"/>
+          </a:xfrm>
+        </p:spPr>
+        <p:txBody>
+          <a:bodyPr>
+            <a:normAutofit fontScale="92500" lnSpcReduction="20000"/>
+          </a:bodyPr>
+          <a:lstStyle/>
+          <a:p>
+            <a:pPr marL="0" indent="0">
+              <a:buNone/>
+            </a:pPr>
+            <a:r>
+              <a:rPr lang="ru-RU" b="1" dirty="0"/>
+              <a:t>Актуальность:</a:t>
+            </a:r>
+          </a:p>
+          <a:p>
+            <a:pPr marL="0" indent="0">
+              <a:buNone/>
+            </a:pPr>
+            <a:r>
+              <a:rPr lang="en-US" b="1" dirty="0"/>
+              <a:t>	</a:t>
+            </a:r>
+            <a:r>
+              <a:rPr lang="ru-RU" dirty="0" smtClean="0"/>
+              <a:t>Разработка </a:t>
+            </a:r>
+            <a:r>
+              <a:rPr lang="ru-RU" dirty="0"/>
+              <a:t>мобильного приложения для астрологических прогнозов и таро-предсказаний является актуальной, так как позволит предоставить пользователю доступ к персонализированному контенту в любое время и в любом </a:t>
+            </a:r>
+            <a:r>
+              <a:rPr lang="ru-RU" dirty="0" smtClean="0"/>
+              <a:t>месте.</a:t>
+            </a:r>
+            <a:endParaRPr lang="en-US" dirty="0" smtClean="0"/>
+          </a:p>
+          <a:p>
+            <a:pPr marL="0" indent="0">
+              <a:buNone/>
+            </a:pPr>
+            <a:endParaRPr lang="en-US" dirty="0"/>
+          </a:p>
+          <a:p>
+            <a:pPr marL="0" indent="0">
+              <a:buNone/>
+            </a:pPr>
+            <a:r>
+              <a:rPr lang="ru-RU" b="1" dirty="0"/>
+              <a:t>Проблема: </a:t>
+            </a:r>
+            <a:endParaRPr lang="en-US" b="1" dirty="0" smtClean="0"/>
+          </a:p>
+          <a:p>
+            <a:pPr marL="0" indent="0">
+              <a:buNone/>
+            </a:pPr>
+            <a:r>
+              <a:rPr lang="en-US" dirty="0"/>
+              <a:t>	</a:t>
+            </a:r>
+            <a:r>
+              <a:rPr lang="ru-RU" dirty="0" smtClean="0"/>
+              <a:t>Отсутствие </a:t>
+            </a:r>
+            <a:r>
+              <a:rPr lang="ru-RU" dirty="0"/>
+              <a:t>удобного и визуально привлекательного мобильного решения, которое объединяет персональные астрологические прогнозы и таро-предсказания, предоставляет структурированный контент и</a:t>
+            </a:r>
+            <a:br>
+              <a:rPr lang="ru-RU" dirty="0"/>
+            </a:br>
+            <a:r>
+              <a:rPr lang="ru-RU" dirty="0"/>
+              <a:t>обеспечивает комфортное, эстетически приятное взаимодействие</a:t>
+            </a:r>
+            <a:br>
+              <a:rPr lang="ru-RU" dirty="0"/>
+            </a:br>
+            <a:r>
+              <a:rPr lang="ru-RU" dirty="0"/>
+              <a:t>пользователя с сервисом.</a:t>
+            </a:r>
+          </a:p>
+          <a:p>
+            <a:pPr marL="0" indent="0">
+              <a:buNone/>
+            </a:pPr>
+            <a:endParaRPr lang="ru-RU" dirty="0"/>
+          </a:p>
+        </p:txBody>
+      </p:sp>
+    </p:spTree>
+  </p:cSld>
+  <p:clrMapOvr>
+    <a:masterClrMapping/>
+  </p:clrMapOvr>
+</p:sld>
+</file>
+
+<file path=ppt/slides/slide3.xml><?xml version="1.0" encoding="utf-8"?>
+<p:sld xmlns:a="http://schemas.openxmlformats.org/drawingml/2006/main" xmlns:r="http://schemas.openxmlformats.org/officeDocument/2006/relationships" xmlns:p="http://schemas.openxmlformats.org/presentationml/2006/main">
+  <p:cSld>
+    <p:spTree>
+      <p:nvGrpSpPr>
+        <p:cNvPr id="1" name=""/>
+        <p:cNvGrpSpPr/>
+        <p:nvPr/>
+      </p:nvGrpSpPr>
+      <p:grpSpPr>
+        <a:xfrm>
+          <a:off x="0" y="0"/>
+          <a:ext cx="0" cy="0"/>
+          <a:chOff x="0" y="0"/>
+          <a:chExt cx="0" cy="0"/>
+        </a:xfrm>
+      </p:grpSpPr>
+      <p:sp>
+        <p:nvSpPr>
+          <p:cNvPr id="1048598" name="Заголовок 1"/>
+          <p:cNvSpPr>
+            <a:spLocks noGrp="1"/>
+          </p:cNvSpPr>
+          <p:nvPr>
+            <p:ph type="title"/>
+          </p:nvPr>
+        </p:nvSpPr>
+        <p:spPr/>
+        <p:txBody>
+          <a:bodyPr/>
+          <a:lstStyle/>
+          <a:p>
+            <a:r>
+              <a:rPr lang="ru-RU" dirty="0"/>
+              <a:t>Цель и Задачи проекта</a:t>
+            </a:r>
+          </a:p>
+        </p:txBody>
+      </p:sp>
+      <p:sp>
+        <p:nvSpPr>
+          <p:cNvPr id="1048599" name="Объект 2"/>
+          <p:cNvSpPr>
+            <a:spLocks noGrp="1"/>
+          </p:cNvSpPr>
+          <p:nvPr>
+            <p:ph idx="1"/>
+          </p:nvPr>
+        </p:nvSpPr>
+        <p:spPr>
+          <a:xfrm>
+            <a:off x="838200" y="2056815"/>
+            <a:ext cx="10515600" cy="4719541"/>
+          </a:xfrm>
+        </p:spPr>
+        <p:txBody>
+          <a:bodyPr>
+            <a:normAutofit fontScale="36429" lnSpcReduction="20000"/>
+          </a:bodyPr>
+          <a:lstStyle/>
+          <a:p>
+            <a:pPr marL="0" indent="0">
+              <a:buNone/>
+            </a:pPr>
+            <a:r>
+              <a:rPr lang="ru-RU" sz="5500" b="1" dirty="0"/>
+              <a:t>Цель</a:t>
+            </a:r>
+            <a:r>
+              <a:rPr lang="ru-RU" sz="5500" dirty="0"/>
+              <a:t>: Разработать </a:t>
+            </a:r>
+            <a:r>
+              <a:rPr lang="ru-RU" sz="5500" dirty="0" smtClean="0"/>
+              <a:t>мобильное приложение «</a:t>
+            </a:r>
+            <a:r>
+              <a:rPr lang="en-US" sz="5500" dirty="0" err="1" smtClean="0"/>
+              <a:t>Mystik</a:t>
+            </a:r>
+            <a:r>
+              <a:rPr lang="ru-RU" sz="5500" dirty="0" smtClean="0"/>
+              <a:t>» </a:t>
+            </a:r>
+            <a:endParaRPr lang="ru-RU" sz="5500" dirty="0"/>
+          </a:p>
+          <a:p>
+            <a:pPr marL="0" indent="0">
+              <a:buNone/>
+            </a:pPr>
+            <a:r>
+              <a:rPr lang="ru-RU" sz="5500" b="1" dirty="0" smtClean="0"/>
+              <a:t>Задачи</a:t>
+            </a:r>
+            <a:r>
+              <a:rPr lang="ru-RU" sz="5500" dirty="0" smtClean="0"/>
+              <a:t>:</a:t>
+            </a:r>
+          </a:p>
+          <a:p>
+            <a:pPr marL="0" indent="457200">
+              <a:buNone/>
+            </a:pPr>
+            <a:r>
+              <a:rPr lang="ru-RU" sz="5500" dirty="0" smtClean="0"/>
+              <a:t>•</a:t>
+            </a:r>
+            <a:r>
+              <a:rPr lang="ru-RU" sz="5500" dirty="0"/>
+              <a:t>	Анализ предметной области.</a:t>
+            </a:r>
+          </a:p>
+          <a:p>
+            <a:pPr marL="0" indent="457200">
+              <a:lnSpc>
+                <a:spcPct val="120000"/>
+              </a:lnSpc>
+              <a:buNone/>
+            </a:pPr>
+            <a:r>
+              <a:rPr lang="ru-RU" sz="5500" dirty="0"/>
+              <a:t>•	Проанализировать требования к клиентской части </a:t>
+            </a:r>
+            <a:r>
+              <a:rPr lang="ru-RU" sz="5500" dirty="0" smtClean="0"/>
+              <a:t>и</a:t>
+            </a:r>
+            <a:r>
+              <a:rPr lang="en-US" sz="5500" dirty="0" smtClean="0"/>
+              <a:t> </a:t>
+            </a:r>
+            <a:r>
+              <a:rPr lang="ru-RU" sz="5500" dirty="0" smtClean="0"/>
+              <a:t>определить</a:t>
+            </a:r>
+            <a:r>
+              <a:rPr lang="en-US" sz="5500" dirty="0" smtClean="0"/>
+              <a:t> </a:t>
+            </a:r>
+            <a:r>
+              <a:rPr lang="ru-RU" sz="5500" dirty="0" smtClean="0"/>
+              <a:t>функциональные </a:t>
+            </a:r>
+            <a:r>
+              <a:rPr lang="ru-RU" sz="5500" dirty="0"/>
+              <a:t>и </a:t>
+            </a:r>
+            <a:r>
+              <a:rPr lang="en-US" sz="5500" dirty="0" smtClean="0"/>
+              <a:t>	</a:t>
+            </a:r>
+            <a:r>
+              <a:rPr lang="ru-RU" sz="5500" dirty="0" smtClean="0"/>
+              <a:t>нефункциональные </a:t>
+            </a:r>
+            <a:r>
+              <a:rPr lang="ru-RU" sz="5500" dirty="0"/>
+              <a:t>требования </a:t>
+            </a:r>
+            <a:r>
+              <a:rPr lang="ru-RU" sz="5500" dirty="0" smtClean="0"/>
+              <a:t>к </a:t>
+            </a:r>
+            <a:r>
+              <a:rPr lang="ru-RU" sz="5500" dirty="0" err="1" smtClean="0"/>
+              <a:t>фронтенду</a:t>
+            </a:r>
+            <a:r>
+              <a:rPr lang="en-US" sz="5500" dirty="0" smtClean="0"/>
+              <a:t>.</a:t>
+            </a:r>
+            <a:endParaRPr lang="ru-RU" sz="5500" dirty="0" smtClean="0"/>
+          </a:p>
+          <a:p>
+            <a:pPr marL="0" indent="457200">
+              <a:buNone/>
+            </a:pPr>
+            <a:r>
+              <a:rPr lang="ru-RU" sz="5500" dirty="0" smtClean="0"/>
+              <a:t>•	Выбор инструментальных средств.</a:t>
+            </a:r>
+          </a:p>
+          <a:p>
+            <a:pPr marL="0" indent="457200">
+              <a:buNone/>
+            </a:pPr>
+            <a:r>
+              <a:rPr lang="ru-RU" sz="5500" dirty="0" smtClean="0"/>
+              <a:t>•</a:t>
+            </a:r>
+            <a:r>
+              <a:rPr lang="ru-RU" sz="5500" dirty="0"/>
+              <a:t>	Спроектировать структуру приложения и навигацию</a:t>
+            </a:r>
+            <a:r>
+              <a:rPr lang="ru-RU" sz="5500" dirty="0" smtClean="0"/>
+              <a:t>.</a:t>
+            </a:r>
+            <a:endParaRPr lang="ru-RU" sz="5500" dirty="0"/>
+          </a:p>
+          <a:p>
+            <a:pPr marL="0" indent="457200">
+              <a:buNone/>
+            </a:pPr>
+            <a:r>
+              <a:rPr lang="ru-RU" sz="5500" dirty="0"/>
+              <a:t>•	Разработка пользовательского интерфейса.</a:t>
+            </a:r>
+          </a:p>
+          <a:p>
+            <a:pPr marL="0" indent="457200">
+              <a:buNone/>
+            </a:pPr>
+            <a:r>
+              <a:rPr lang="ru-RU" sz="5500" dirty="0"/>
+              <a:t>•	Реализовать клиентскую логику</a:t>
+            </a:r>
+            <a:r>
+              <a:rPr lang="ru-RU" sz="5500" dirty="0" smtClean="0"/>
+              <a:t>.</a:t>
+            </a:r>
+            <a:endParaRPr lang="en-US" sz="5500" dirty="0" smtClean="0"/>
+          </a:p>
+          <a:p>
+            <a:pPr marL="0" indent="457200">
+              <a:buNone/>
+            </a:pPr>
+            <a:r>
+              <a:rPr lang="ru-RU" sz="5500" dirty="0"/>
+              <a:t>•	Обеспечить взаимодействие с серверной частью</a:t>
+            </a:r>
+            <a:r>
+              <a:rPr lang="ru-RU" sz="5500" dirty="0" smtClean="0"/>
+              <a:t>.</a:t>
+            </a:r>
+            <a:endParaRPr lang="en-US" sz="5500" dirty="0" smtClean="0"/>
+          </a:p>
+          <a:p>
+            <a:pPr marL="0" indent="457200">
+              <a:buNone/>
+            </a:pPr>
+            <a:r>
+              <a:rPr lang="ru-RU" sz="5500" dirty="0"/>
+              <a:t>•	Реализовать локальное хранение данных</a:t>
+            </a:r>
+            <a:r>
+              <a:rPr lang="ru-RU" sz="5500" dirty="0" smtClean="0"/>
+              <a:t>.</a:t>
+            </a:r>
+            <a:endParaRPr lang="en-US" sz="5500" dirty="0" smtClean="0"/>
+          </a:p>
+          <a:p>
+            <a:pPr marL="0" indent="457200">
+              <a:buNone/>
+            </a:pPr>
+            <a:r>
+              <a:rPr lang="ru-RU" sz="5500" dirty="0"/>
+              <a:t>•	Обеспечить визуализацию данных и состояний</a:t>
+            </a:r>
+            <a:r>
+              <a:rPr lang="ru-RU" sz="5500" dirty="0" smtClean="0"/>
+              <a:t>.</a:t>
+            </a:r>
+            <a:endParaRPr lang="en-US" sz="5500" dirty="0"/>
+          </a:p>
+          <a:p>
+            <a:pPr marL="0" indent="457200">
+              <a:buNone/>
+            </a:pPr>
+            <a:r>
+              <a:rPr lang="ru-RU" sz="5500" dirty="0"/>
+              <a:t>•	Провести тестирование разработанного интерфейса и устранить выявленные ошибки</a:t>
+            </a:r>
+            <a:r>
+              <a:rPr lang="ru-RU" sz="5500" dirty="0" smtClean="0"/>
+              <a:t>.</a:t>
+            </a:r>
+            <a:endParaRPr lang="en-US" sz="5500" dirty="0"/>
+          </a:p>
+          <a:p>
+            <a:pPr marL="0" indent="457200">
+              <a:buNone/>
+            </a:pPr>
+            <a:endParaRPr lang="en-US" dirty="0" smtClean="0"/>
+          </a:p>
+          <a:p>
+            <a:pPr marL="0" indent="457200">
+              <a:buNone/>
+            </a:pPr>
+            <a:endParaRPr lang="en-US" dirty="0"/>
+          </a:p>
+          <a:p>
+            <a:pPr marL="0" indent="457200">
+              <a:buNone/>
+            </a:pPr>
+            <a:endParaRPr lang="en-US" dirty="0" smtClean="0"/>
+          </a:p>
+          <a:p>
+            <a:pPr marL="0" indent="457200">
+              <a:buNone/>
+            </a:pPr>
+            <a:endParaRPr lang="ru-RU" dirty="0"/>
+          </a:p>
+          <a:p>
+            <a:pPr marL="0" indent="0">
+              <a:buNone/>
+            </a:pPr>
+            <a:endParaRPr lang="ru-RU" dirty="0"/>
+          </a:p>
+        </p:txBody>
+      </p:sp>
+    </p:spTree>
+  </p:cSld>
+  <p:clrMapOvr>
+    <a:masterClrMapping/>
+  </p:clrMapOvr>
+</p:sld>
+</file>
+
+<file path=ppt/slides/slide4.xml><?xml version="1.0" encoding="utf-8"?>
+<p:sld xmlns:a="http://schemas.openxmlformats.org/drawingml/2006/main" xmlns:r="http://schemas.openxmlformats.org/officeDocument/2006/relationships" xmlns:p="http://schemas.openxmlformats.org/presentationml/2006/main">
+  <p:cSld>
+    <p:spTree>
+      <p:nvGrpSpPr>
+        <p:cNvPr id="1" name=""/>
+        <p:cNvGrpSpPr/>
+        <p:nvPr/>
+      </p:nvGrpSpPr>
+      <p:grpSpPr>
+        <a:xfrm>
+          <a:off x="0" y="0"/>
+          <a:ext cx="0" cy="0"/>
+          <a:chOff x="0" y="0"/>
+          <a:chExt cx="0" cy="0"/>
+        </a:xfrm>
+      </p:grpSpPr>
+      <p:sp>
+        <p:nvSpPr>
+          <p:cNvPr id="1048600" name="Заголовок 1"/>
+          <p:cNvSpPr>
+            <a:spLocks noGrp="1"/>
+          </p:cNvSpPr>
+          <p:nvPr>
+            <p:ph type="title"/>
+          </p:nvPr>
+        </p:nvSpPr>
+        <p:spPr/>
+        <p:txBody>
+          <a:bodyPr>
+            <a:normAutofit/>
+          </a:bodyPr>
+          <a:lstStyle/>
+          <a:p>
+            <a:r>
+              <a:rPr lang="ru-RU" dirty="0" smtClean="0"/>
+              <a:t>Объект</a:t>
+            </a:r>
+            <a:r>
+              <a:rPr lang="ru-RU" dirty="0"/>
+              <a:t> </a:t>
+            </a:r>
+            <a:r>
+              <a:rPr lang="ru-RU" dirty="0" smtClean="0"/>
+              <a:t>и Предмет исследования</a:t>
+            </a:r>
+            <a:endParaRPr lang="ru-RU" dirty="0"/>
+          </a:p>
+        </p:txBody>
+      </p:sp>
+      <p:sp>
+        <p:nvSpPr>
+          <p:cNvPr id="1048601" name="Объект 2"/>
+          <p:cNvSpPr>
+            <a:spLocks noGrp="1"/>
+          </p:cNvSpPr>
+          <p:nvPr>
+            <p:ph idx="1"/>
+          </p:nvPr>
+        </p:nvSpPr>
+        <p:spPr>
+          <a:xfrm>
+            <a:off x="352426" y="1906292"/>
+            <a:ext cx="11106149" cy="4497791"/>
+          </a:xfrm>
+        </p:spPr>
+        <p:txBody>
+          <a:bodyPr anchor="ctr">
+            <a:normAutofit/>
+          </a:bodyPr>
+          <a:lstStyle/>
+          <a:p>
+            <a:pPr marL="0" indent="0">
+              <a:buNone/>
+            </a:pPr>
+            <a:r>
+              <a:rPr lang="ru-RU" b="1" i="1" dirty="0"/>
+              <a:t>Объект исследования</a:t>
+            </a:r>
+            <a:r>
+              <a:rPr lang="ru-RU" b="1" dirty="0"/>
+              <a:t>: </a:t>
+            </a:r>
+            <a:endParaRPr lang="ru-RU" b="1" dirty="0" smtClean="0"/>
+          </a:p>
+          <a:p>
+            <a:pPr marL="0" indent="0">
+              <a:buNone/>
+            </a:pPr>
+            <a:r>
+              <a:rPr lang="ru-RU" dirty="0"/>
+              <a:t>	М</a:t>
+            </a:r>
+            <a:r>
+              <a:rPr lang="ru-RU" dirty="0" smtClean="0"/>
+              <a:t>обильное </a:t>
+            </a:r>
+            <a:r>
+              <a:rPr lang="ru-RU" dirty="0"/>
+              <a:t>приложение для эзотерических прогнозов (астрология и таро</a:t>
+            </a:r>
+            <a:r>
+              <a:rPr lang="ru-RU" dirty="0" smtClean="0"/>
+              <a:t>).</a:t>
+            </a:r>
+          </a:p>
+          <a:p>
+            <a:pPr marL="0" indent="0">
+              <a:buNone/>
+            </a:pPr>
+            <a:endParaRPr lang="ru-RU" dirty="0"/>
+          </a:p>
+          <a:p>
+            <a:pPr marL="0" indent="0">
+              <a:buNone/>
+            </a:pPr>
+            <a:r>
+              <a:rPr lang="ru-RU" b="1" i="1" dirty="0"/>
+              <a:t>Предмет исследования</a:t>
+            </a:r>
+            <a:r>
+              <a:rPr lang="ru-RU" b="1" dirty="0"/>
+              <a:t>: </a:t>
+            </a:r>
+            <a:endParaRPr lang="ru-RU" b="1" dirty="0" smtClean="0"/>
+          </a:p>
+          <a:p>
+            <a:pPr marL="0" indent="0">
+              <a:buNone/>
+            </a:pPr>
+            <a:r>
+              <a:rPr lang="ru-RU" dirty="0"/>
+              <a:t>	М</a:t>
+            </a:r>
+            <a:r>
+              <a:rPr lang="ru-RU" dirty="0" smtClean="0"/>
+              <a:t>етоды </a:t>
+            </a:r>
+            <a:r>
+              <a:rPr lang="ru-RU" dirty="0"/>
+              <a:t>и инструменты создания пользовательского интерфейса и клиентской логики, обеспечивающей формирование и отображение астрологических прогнозов и таро-предсказаний.</a:t>
+            </a:r>
+            <a:endParaRPr lang="ru-RU" dirty="0" smtClean="0"/>
+          </a:p>
+        </p:txBody>
+      </p:sp>
+    </p:spTree>
+  </p:cSld>
+  <p:clrMapOvr>
+    <a:masterClrMapping/>
+  </p:clrMapOvr>
+</p:sld>
+</file>
+
+<file path=ppt/slides/slide5.xml><?xml version="1.0" encoding="utf-8"?>
+<p:sld xmlns:a="http://schemas.openxmlformats.org/drawingml/2006/main" xmlns:r="http://schemas.openxmlformats.org/officeDocument/2006/relationships" xmlns:p="http://schemas.openxmlformats.org/presentationml/2006/main">
+  <p:cSld>
+    <p:spTree>
+      <p:nvGrpSpPr>
+        <p:cNvPr id="1" name=""/>
+        <p:cNvGrpSpPr/>
+        <p:nvPr/>
+      </p:nvGrpSpPr>
+      <p:grpSpPr>
+        <a:xfrm>
+          <a:off x="0" y="0"/>
+          <a:ext cx="0" cy="0"/>
+          <a:chOff x="0" y="0"/>
+          <a:chExt cx="0" cy="0"/>
+        </a:xfrm>
+      </p:grpSpPr>
+      <p:sp>
+        <p:nvSpPr>
+          <p:cNvPr id="1048606" name="Заголовок 1"/>
+          <p:cNvSpPr>
+            <a:spLocks noGrp="1"/>
+          </p:cNvSpPr>
+          <p:nvPr>
+            <p:ph type="title"/>
+          </p:nvPr>
+        </p:nvSpPr>
+        <p:spPr>
+          <a:xfrm>
+            <a:off x="997527" y="236764"/>
+            <a:ext cx="10356272" cy="1412422"/>
+          </a:xfrm>
+        </p:spPr>
+        <p:txBody>
+          <a:bodyPr>
+            <a:normAutofit/>
+          </a:bodyPr>
+          <a:lstStyle/>
+          <a:p>
+            <a:r>
+              <a:rPr lang="ru-RU" sz="4800" dirty="0"/>
+              <a:t>Анализ предметной области</a:t>
+            </a:r>
+          </a:p>
+        </p:txBody>
+      </p:sp>
+      <p:sp>
+        <p:nvSpPr>
+          <p:cNvPr id="1048607" name="Объект 2"/>
+          <p:cNvSpPr>
+            <a:spLocks noGrp="1"/>
+          </p:cNvSpPr>
+          <p:nvPr>
+            <p:ph idx="1"/>
+          </p:nvPr>
+        </p:nvSpPr>
+        <p:spPr>
+          <a:xfrm>
+            <a:off x="299083" y="1796142"/>
+            <a:ext cx="11498310" cy="4898572"/>
+          </a:xfrm>
+        </p:spPr>
+        <p:txBody>
+          <a:bodyPr anchor="ctr">
+            <a:normAutofit fontScale="62500" lnSpcReduction="20000"/>
+          </a:bodyPr>
+          <a:lstStyle/>
+          <a:p>
+            <a:pPr marL="0" indent="0">
+              <a:lnSpc>
+                <a:spcPct val="100000"/>
+              </a:lnSpc>
+              <a:spcBef>
+                <a:spcPts val="500"/>
+              </a:spcBef>
+              <a:spcAft>
+                <a:spcPts val="500"/>
+              </a:spcAft>
+              <a:buNone/>
+            </a:pPr>
+            <a:r>
+              <a:rPr lang="ru-RU" sz="3200" i="1" dirty="0">
+                <a:latin typeface=""/>
+                <a:cs typeface="Times New Roman" panose="02020603050405020304" pitchFamily="18" charset="0"/>
+              </a:rPr>
+              <a:t>Предметной областью проекта являются сервисы самопознания и развлекательной мистики, реализованные в формате мобильного приложения. Ключевые сущности и процессы включают: </a:t>
+            </a:r>
+          </a:p>
+          <a:p>
+            <a:pPr marL="342900" indent="-342900">
+              <a:lnSpc>
+                <a:spcPct val="100000"/>
+              </a:lnSpc>
+              <a:spcBef>
+                <a:spcPts val="500"/>
+              </a:spcBef>
+              <a:spcAft>
+                <a:spcPts val="800"/>
+              </a:spcAft>
+              <a:buAutoNum type="arabicPeriod"/>
+            </a:pPr>
+            <a:r>
+              <a:rPr lang="ru-RU" b="1" dirty="0">
+                <a:latin typeface=""/>
+                <a:cs typeface="Times New Roman" panose="02020603050405020304" pitchFamily="18" charset="0"/>
+              </a:rPr>
+              <a:t>Гадание на картах Таро: </a:t>
+            </a:r>
+            <a:r>
+              <a:rPr lang="ru-RU" dirty="0">
+                <a:latin typeface=""/>
+                <a:cs typeface="Times New Roman" panose="02020603050405020304" pitchFamily="18" charset="0"/>
+              </a:rPr>
+              <a:t>Процесс генерации случайной выборки карт из колоды для заданного расклада (например, «Карта дня», «Три карты») с последующим отображением описания и интерпретации. Доступ к части раскладов ограничен премиум-подпиской. </a:t>
+            </a:r>
+          </a:p>
+          <a:p>
+            <a:pPr marL="342900" indent="-342900">
+              <a:lnSpc>
+                <a:spcPct val="100000"/>
+              </a:lnSpc>
+              <a:spcBef>
+                <a:spcPts val="500"/>
+              </a:spcBef>
+              <a:spcAft>
+                <a:spcPts val="800"/>
+              </a:spcAft>
+              <a:buAutoNum type="arabicPeriod"/>
+            </a:pPr>
+            <a:r>
+              <a:rPr lang="ru-RU" b="1" dirty="0">
+                <a:latin typeface=""/>
+                <a:cs typeface="Times New Roman" panose="02020603050405020304" pitchFamily="18" charset="0"/>
+              </a:rPr>
+              <a:t>Персональный гороскоп: </a:t>
+            </a:r>
+            <a:r>
+              <a:rPr lang="ru-RU" dirty="0">
+                <a:latin typeface=""/>
+                <a:cs typeface="Times New Roman" panose="02020603050405020304" pitchFamily="18" charset="0"/>
+              </a:rPr>
+              <a:t>Формирование текстового прогноза на основе знака зодиака, определяемого по дате рождения пользователя. </a:t>
+            </a:r>
+          </a:p>
+          <a:p>
+            <a:pPr marL="342900" indent="-342900">
+              <a:lnSpc>
+                <a:spcPct val="100000"/>
+              </a:lnSpc>
+              <a:spcBef>
+                <a:spcPts val="500"/>
+              </a:spcBef>
+              <a:spcAft>
+                <a:spcPts val="800"/>
+              </a:spcAft>
+              <a:buAutoNum type="arabicPeriod"/>
+            </a:pPr>
+            <a:r>
+              <a:rPr lang="ru-RU" b="1" dirty="0">
+                <a:latin typeface=""/>
+                <a:cs typeface="Times New Roman" panose="02020603050405020304" pitchFamily="18" charset="0"/>
+              </a:rPr>
+              <a:t>Нумерологический расчет (Матрица судьбы): </a:t>
+            </a:r>
+            <a:r>
+              <a:rPr lang="ru-RU" dirty="0">
+                <a:latin typeface=""/>
+                <a:cs typeface="Times New Roman" panose="02020603050405020304" pitchFamily="18" charset="0"/>
+              </a:rPr>
+              <a:t>Построение и визуализация нумерологической схемы на основе даты рождения пользователя с выводом расшифровки значений. </a:t>
+            </a:r>
+          </a:p>
+          <a:p>
+            <a:pPr marL="342900" indent="-342900">
+              <a:lnSpc>
+                <a:spcPct val="100000"/>
+              </a:lnSpc>
+              <a:spcBef>
+                <a:spcPts val="500"/>
+              </a:spcBef>
+              <a:spcAft>
+                <a:spcPts val="800"/>
+              </a:spcAft>
+              <a:buAutoNum type="arabicPeriod"/>
+            </a:pPr>
+            <a:r>
+              <a:rPr lang="ru-RU" b="1" dirty="0">
+                <a:latin typeface=""/>
+                <a:cs typeface="Times New Roman" panose="02020603050405020304" pitchFamily="18" charset="0"/>
+              </a:rPr>
+              <a:t>Психологические тесты: </a:t>
+            </a:r>
+            <a:r>
+              <a:rPr lang="ru-RU" dirty="0">
+                <a:latin typeface=""/>
+                <a:cs typeface="Times New Roman" panose="02020603050405020304" pitchFamily="18" charset="0"/>
+              </a:rPr>
+              <a:t>Интерактивные опросники (включая методики, аналогичные тесту </a:t>
+            </a:r>
+            <a:r>
+              <a:rPr lang="ru-RU" dirty="0" err="1">
+                <a:latin typeface=""/>
+                <a:cs typeface="Times New Roman" panose="02020603050405020304" pitchFamily="18" charset="0"/>
+              </a:rPr>
+              <a:t>Клифтона</a:t>
+            </a:r>
+            <a:r>
+              <a:rPr lang="ru-RU" dirty="0">
+                <a:latin typeface=""/>
+                <a:cs typeface="Times New Roman" panose="02020603050405020304" pitchFamily="18" charset="0"/>
+              </a:rPr>
+              <a:t>), где на основе ответов пользователя вычисляется результат и отображается интерпретация. Часть тестов является премиум-контентом. </a:t>
+            </a:r>
+          </a:p>
+          <a:p>
+            <a:pPr marL="342900" indent="-342900">
+              <a:lnSpc>
+                <a:spcPct val="100000"/>
+              </a:lnSpc>
+              <a:spcBef>
+                <a:spcPts val="500"/>
+              </a:spcBef>
+              <a:spcAft>
+                <a:spcPts val="800"/>
+              </a:spcAft>
+              <a:buAutoNum type="arabicPeriod"/>
+            </a:pPr>
+            <a:r>
+              <a:rPr lang="ru-RU" b="1" dirty="0">
+                <a:latin typeface=""/>
+                <a:cs typeface="Times New Roman" panose="02020603050405020304" pitchFamily="18" charset="0"/>
+              </a:rPr>
+              <a:t>Управление пользователями и монетизация: </a:t>
+            </a:r>
+            <a:r>
+              <a:rPr lang="ru-RU" dirty="0">
+                <a:latin typeface=""/>
+                <a:cs typeface="Times New Roman" panose="02020603050405020304" pitchFamily="18" charset="0"/>
+              </a:rPr>
+              <a:t>Поддержка гостевого режима и авторизованных пользователей (по e-</a:t>
+            </a:r>
+            <a:r>
+              <a:rPr lang="ru-RU" dirty="0" err="1">
+                <a:latin typeface=""/>
+                <a:cs typeface="Times New Roman" panose="02020603050405020304" pitchFamily="18" charset="0"/>
+              </a:rPr>
+              <a:t>mail</a:t>
+            </a:r>
+            <a:r>
+              <a:rPr lang="ru-RU" dirty="0">
+                <a:latin typeface=""/>
+                <a:cs typeface="Times New Roman" panose="02020603050405020304" pitchFamily="18" charset="0"/>
+              </a:rPr>
+              <a:t> и паролю) с хранением данных локально на устройстве (</a:t>
+            </a:r>
+            <a:r>
+              <a:rPr lang="ru-RU" dirty="0" err="1">
+                <a:latin typeface=""/>
+                <a:cs typeface="Times New Roman" panose="02020603050405020304" pitchFamily="18" charset="0"/>
+              </a:rPr>
+              <a:t>SQLite</a:t>
+            </a:r>
+            <a:r>
+              <a:rPr lang="ru-RU" dirty="0">
+                <a:latin typeface=""/>
+                <a:cs typeface="Times New Roman" panose="02020603050405020304" pitchFamily="18" charset="0"/>
+              </a:rPr>
+              <a:t>). Монетизация реализована через премиум-подписку, открывающую расширенный функционал. Попытка оформить подписку без авторизации инициирует переход на экран входа.</a:t>
+            </a:r>
+            <a:endParaRPr lang="ru-RU" sz="2200" dirty="0" smtClean="0"/>
+          </a:p>
+        </p:txBody>
+      </p:sp>
+    </p:spTree>
+  </p:cSld>
+  <p:clrMapOvr>
+    <a:masterClrMapping/>
+  </p:clrMapOvr>
+</p:sld>
+</file>
+
+<file path=ppt/slides/slide6.xml><?xml version="1.0" encoding="utf-8"?>
+<p:sld xmlns:a="http://schemas.openxmlformats.org/drawingml/2006/main" xmlns:r="http://schemas.openxmlformats.org/officeDocument/2006/relationships" xmlns:p="http://schemas.openxmlformats.org/presentationml/2006/main">
+  <p:cSld>
+    <p:spTree>
+      <p:nvGrpSpPr>
+        <p:cNvPr id="1" name=""/>
+        <p:cNvGrpSpPr/>
+        <p:nvPr/>
+      </p:nvGrpSpPr>
+      <p:grpSpPr>
+        <a:xfrm>
+          <a:off x="0" y="0"/>
+          <a:ext cx="0" cy="0"/>
+          <a:chOff x="0" y="0"/>
+          <a:chExt cx="0" cy="0"/>
+        </a:xfrm>
+      </p:grpSpPr>
+      <p:sp>
+        <p:nvSpPr>
+          <p:cNvPr id="1048611" name="Заголовок 1"/>
+          <p:cNvSpPr>
+            <a:spLocks noGrp="1"/>
+          </p:cNvSpPr>
+          <p:nvPr>
+            <p:ph type="title"/>
+          </p:nvPr>
+        </p:nvSpPr>
+        <p:spPr>
+          <a:xfrm>
+            <a:off x="997527" y="0"/>
+            <a:ext cx="10356272" cy="1296786"/>
+          </a:xfrm>
+        </p:spPr>
+        <p:txBody>
+          <a:bodyPr>
+            <a:normAutofit/>
+          </a:bodyPr>
+          <a:lstStyle/>
+          <a:p>
+            <a:r>
+              <a:rPr lang="ru-RU" sz="4800" dirty="0"/>
+              <a:t>Анализ предметной области</a:t>
+            </a:r>
+          </a:p>
+        </p:txBody>
+      </p:sp>
+      <p:sp>
+        <p:nvSpPr>
+          <p:cNvPr id="1048612" name="Заголовок 1"/>
+          <p:cNvSpPr txBox="1"/>
+          <p:nvPr/>
+        </p:nvSpPr>
+        <p:spPr>
+          <a:xfrm>
+            <a:off x="997527" y="824813"/>
+            <a:ext cx="10356272" cy="794085"/>
+          </a:xfrm>
+          <a:prstGeom prst="rect">
+            <a:avLst/>
+          </a:prstGeom>
+        </p:spPr>
+        <p:txBody>
+          <a:bodyPr vert="horz" lIns="91440" tIns="45720" rIns="91440" bIns="45720" rtlCol="0" anchor="ctr">
+            <a:normAutofit/>
+          </a:bodyPr>
+          <a:lstStyle>
+            <a:lvl1pPr algn="l" defTabSz="914400" rtl="0" eaLnBrk="1" latinLnBrk="0" hangingPunct="1">
+              <a:lnSpc>
+                <a:spcPct val="90000"/>
+              </a:lnSpc>
+              <a:spcBef>
+                <a:spcPct val="0"/>
+              </a:spcBef>
+              <a:buNone/>
+              <a:defRPr sz="4400" kern="1200">
+                <a:solidFill>
+                  <a:schemeClr val="tx1"/>
+                </a:solidFill>
+                <a:latin typeface="+mj-lt"/>
+                <a:ea typeface="+mj-ea"/>
+                <a:cs typeface="+mj-cs"/>
+              </a:defRPr>
+            </a:lvl1pPr>
+          </a:lstStyle>
+          <a:p>
+            <a:r>
+              <a:rPr lang="ru-RU" sz="2800" dirty="0"/>
+              <a:t>Функциональные возможности пользователей</a:t>
+            </a:r>
+          </a:p>
+        </p:txBody>
+      </p:sp>
+      <p:sp>
+        <p:nvSpPr>
+          <p:cNvPr id="2" name="AutoShape 2" descr="blob:https://web.telegram.org/2cfdf163-70d9-483c-a6ac-5ad7afbca373"/>
+          <p:cNvSpPr>
+            <a:spLocks noChangeAspect="1" noChangeArrowheads="1"/>
+          </p:cNvSpPr>
+          <p:nvPr/>
+        </p:nvSpPr>
+        <p:spPr bwMode="auto">
+          <a:xfrm>
+            <a:off x="155575" y="-144463"/>
+            <a:ext cx="304800" cy="304801"/>
+          </a:xfrm>
+          <a:prstGeom prst="rect">
+            <a:avLst/>
+          </a:prstGeom>
+          <a:noFill/>
+          <a:extLst>
+            <a:ext uri="{909E8E84-426E-40DD-AFC4-6F175D3DCCD1}">
+              <a14:hiddenFill xmlns:a14="http://schemas.microsoft.com/office/drawing/2010/main">
+                <a:solidFill>
+                  <a:srgbClr val="FFFFFF"/>
+                </a:solidFill>
+              </a14:hiddenFill>
+            </a:ext>
+          </a:extLst>
+        </p:spPr>
+        <p:txBody>
+          <a:bodyPr vert="horz" wrap="square" lIns="91440" tIns="45720" rIns="91440" bIns="45720" numCol="1" anchor="t" anchorCtr="0" compatLnSpc="1">
+            <a:prstTxWarp prst="textNoShape">
+              <a:avLst/>
+            </a:prstTxWarp>
+          </a:bodyPr>
+          <a:lstStyle/>
+          <a:p>
+            <a:endParaRPr lang="ru-RU"/>
+          </a:p>
+        </p:txBody>
+      </p:sp>
+      <p:pic>
+        <p:nvPicPr>
+          <p:cNvPr id="1027" name="Picture 3"/>
+          <p:cNvPicPr>
+            <a:picLocks noChangeAspect="1" noChangeArrowheads="1"/>
+          </p:cNvPicPr>
+          <p:nvPr/>
+        </p:nvPicPr>
+        <p:blipFill>
+          <a:blip r:embed="rId3">
+            <a:extLst>
+              <a:ext uri="{28A0092B-C50C-407E-A947-70E740481C1C}">
+                <a14:useLocalDpi xmlns:a14="http://schemas.microsoft.com/office/drawing/2010/main" val="0"/>
+              </a:ext>
+            </a:extLst>
+          </a:blip>
+          <a:srcRect/>
+          <a:stretch>
+            <a:fillRect/>
+          </a:stretch>
+        </p:blipFill>
+        <p:spPr bwMode="auto">
+          <a:xfrm>
+            <a:off x="1604189" y="1922752"/>
+            <a:ext cx="8016277" cy="4853605"/>
           </a:xfrm>
           <a:prstGeom prst="rect">
             <a:avLst/>
@@ -5329,206 +7293,7 @@
             </a:ext>
           </a:extLst>
         </p:spPr>
-        <p:txBody>
-          <a:bodyPr vert="horz" wrap="square" lIns="91440" tIns="45720" rIns="91440" bIns="45720" numCol="1" anchor="ctr" anchorCtr="0" compatLnSpc="1">
-            <a:spAutoFit/>
-          </a:bodyPr>
-          <a:lstStyle/>
-          <a:p>
-            <a:pPr marL="0" marR="0" lvl="0" indent="0" algn="just" defTabSz="914400" rtl="0" eaLnBrk="0" fontAlgn="base" latinLnBrk="0" hangingPunct="0">
-              <a:lnSpc>
-                <a:spcPct val="100000"/>
-              </a:lnSpc>
-              <a:spcBef>
-                <a:spcPct val="0"/>
-              </a:spcBef>
-              <a:spcAft>
-                <a:spcPct val="0"/>
-              </a:spcAft>
-              <a:buClrTx/>
-              <a:buSzTx/>
-              <a:buNone/>
-            </a:pPr>
-            <a:r>
-              <a:rPr kumimoji="0" lang="ru-RU" altLang="ru-RU" sz="2400" b="1" i="0" u="none" strike="noStrike" cap="none" normalizeH="0" baseline="0" dirty="0" err="1" smtClean="0">
-                <a:ln>
-                  <a:noFill/>
-                </a:ln>
-                <a:solidFill>
-                  <a:schemeClr val="tx1"/>
-                </a:solidFill>
-                <a:effectLst/>
-              </a:rPr>
-              <a:t>TypeScript</a:t>
-            </a:r>
-            <a:r>
-              <a:rPr kumimoji="0" lang="ru-RU" altLang="ru-RU" sz="2400" b="0" i="0" u="none" strike="noStrike" cap="none" normalizeH="0" baseline="0" dirty="0" smtClean="0">
-                <a:ln>
-                  <a:noFill/>
-                </a:ln>
-                <a:solidFill>
-                  <a:schemeClr val="tx1"/>
-                </a:solidFill>
-                <a:effectLst/>
-              </a:rPr>
-              <a:t> — типизированный язык разработки клиентской части приложения</a:t>
-            </a:r>
-          </a:p>
-          <a:p>
-            <a:pPr marL="0" lvl="0" indent="0" algn="just" eaLnBrk="0" fontAlgn="base" hangingPunct="0">
-              <a:lnSpc>
-                <a:spcPct val="100000"/>
-              </a:lnSpc>
-              <a:spcBef>
-                <a:spcPct val="0"/>
-              </a:spcBef>
-              <a:spcAft>
-                <a:spcPct val="0"/>
-              </a:spcAft>
-              <a:buNone/>
-            </a:pPr>
-            <a:r>
-              <a:rPr lang="en-US" sz="2400" b="1" dirty="0"/>
-              <a:t>React Native</a:t>
-            </a:r>
-            <a:r>
-              <a:rPr lang="ru-RU" sz="2400" b="1" dirty="0"/>
-              <a:t> </a:t>
-            </a:r>
-            <a:r>
-              <a:rPr lang="ru-RU" sz="2400" dirty="0"/>
-              <a:t>— кроссплатформенный </a:t>
-            </a:r>
-            <a:r>
-              <a:rPr lang="ru-RU" sz="2400" dirty="0" err="1"/>
-              <a:t>фреймворк</a:t>
-            </a:r>
-            <a:r>
-              <a:rPr lang="ru-RU" sz="2400" dirty="0"/>
-              <a:t> для разработки мобильных приложений под платформы </a:t>
-            </a:r>
-            <a:r>
-              <a:rPr lang="en-US" sz="2400" dirty="0"/>
-              <a:t>iOS</a:t>
-            </a:r>
-            <a:r>
-              <a:rPr lang="ru-RU" sz="2400" dirty="0"/>
-              <a:t> и </a:t>
-            </a:r>
-            <a:r>
-              <a:rPr lang="en-US" sz="2400" dirty="0"/>
-              <a:t>Android</a:t>
-            </a:r>
-            <a:r>
-              <a:rPr lang="ru-RU" sz="2400" dirty="0"/>
-              <a:t> с использованием языков </a:t>
-            </a:r>
-            <a:r>
-              <a:rPr lang="en-US" sz="2400" dirty="0"/>
-              <a:t>JavaScript</a:t>
-            </a:r>
-            <a:r>
-              <a:rPr lang="ru-RU" sz="2400" dirty="0"/>
-              <a:t> или </a:t>
-            </a:r>
-            <a:r>
-              <a:rPr lang="en-US" sz="2400" dirty="0" err="1" smtClean="0"/>
-              <a:t>TypeScript</a:t>
-            </a:r>
-            <a:endParaRPr kumimoji="0" lang="ru-RU" altLang="ru-RU" sz="2600" b="0" i="0" u="none" strike="noStrike" cap="none" normalizeH="0" baseline="0" dirty="0" smtClean="0">
-              <a:ln>
-                <a:noFill/>
-              </a:ln>
-              <a:solidFill>
-                <a:schemeClr val="tx1"/>
-              </a:solidFill>
-              <a:effectLst/>
-            </a:endParaRPr>
-          </a:p>
-          <a:p>
-            <a:pPr marL="0" lvl="0" indent="0" algn="just" eaLnBrk="0" fontAlgn="base" hangingPunct="0">
-              <a:lnSpc>
-                <a:spcPct val="100000"/>
-              </a:lnSpc>
-              <a:spcBef>
-                <a:spcPct val="0"/>
-              </a:spcBef>
-              <a:spcAft>
-                <a:spcPct val="0"/>
-              </a:spcAft>
-              <a:buNone/>
-            </a:pPr>
-            <a:r>
-              <a:rPr lang="ru-RU" sz="2400" b="1" dirty="0" err="1"/>
-              <a:t>Expo</a:t>
-            </a:r>
-            <a:r>
-              <a:rPr lang="ru-RU" sz="2400" dirty="0"/>
-              <a:t> — платформа и набор инструментов для разработки мобильных приложений на основе </a:t>
-            </a:r>
-            <a:r>
-              <a:rPr lang="ru-RU" sz="2400" dirty="0" err="1"/>
-              <a:t>React</a:t>
-            </a:r>
-            <a:r>
-              <a:rPr lang="ru-RU" sz="2400" dirty="0"/>
-              <a:t> </a:t>
-            </a:r>
-            <a:r>
-              <a:rPr lang="ru-RU" sz="2400" dirty="0" err="1"/>
-              <a:t>Native</a:t>
-            </a:r>
-            <a:r>
-              <a:rPr lang="ru-RU" sz="2400" dirty="0"/>
-              <a:t>, предназначенные для ускорения процессов разработки, тестирования и сборки </a:t>
-            </a:r>
-            <a:r>
-              <a:rPr lang="ru-RU" sz="2400" dirty="0" smtClean="0"/>
-              <a:t>приложений</a:t>
-            </a:r>
-            <a:endParaRPr kumimoji="0" lang="ru-RU" altLang="ru-RU" sz="2600" b="0" i="0" u="none" strike="noStrike" cap="none" normalizeH="0" baseline="0" dirty="0" smtClean="0">
-              <a:ln>
-                <a:noFill/>
-              </a:ln>
-              <a:solidFill>
-                <a:schemeClr val="tx1"/>
-              </a:solidFill>
-              <a:effectLst/>
-            </a:endParaRPr>
-          </a:p>
-          <a:p>
-            <a:pPr marL="0" lvl="0" indent="0" algn="just" eaLnBrk="0" fontAlgn="base" hangingPunct="0">
-              <a:lnSpc>
-                <a:spcPct val="100000"/>
-              </a:lnSpc>
-              <a:spcBef>
-                <a:spcPct val="0"/>
-              </a:spcBef>
-              <a:spcAft>
-                <a:spcPct val="0"/>
-              </a:spcAft>
-              <a:buNone/>
-            </a:pPr>
-            <a:r>
-              <a:rPr lang="en-US" sz="2400" b="1" dirty="0" err="1"/>
-              <a:t>Pixso</a:t>
-            </a:r>
-            <a:r>
-              <a:rPr lang="ru-RU" sz="2400" dirty="0"/>
-              <a:t> — облачный графический редактор и платформа для совместного проектирования интерфейсов сайтов и мобильных приложений.</a:t>
-            </a:r>
-            <a:endParaRPr kumimoji="0" lang="ru-RU" altLang="ru-RU" sz="2600" b="0" i="0" u="none" strike="noStrike" cap="none" normalizeH="0" baseline="0" dirty="0" smtClean="0">
-              <a:ln>
-                <a:noFill/>
-              </a:ln>
-              <a:solidFill>
-                <a:schemeClr val="tx1"/>
-              </a:solidFill>
-              <a:effectLst/>
-            </a:endParaRPr>
-          </a:p>
-        </p:txBody>
-      </p:sp>
+      </p:pic>
     </p:spTree>
   </p:cSld>
   <p:clrMapOvr>
@@ -5537,7 +7302,661 @@
 </p:sld>
 </file>
 
-<file path=ppt/slides/slide11.xml><?xml version="1.0" encoding="utf-8"?>
+<file path=ppt/slides/slide7.xml><?xml version="1.0" encoding="utf-8"?>
+<p:sld xmlns:a="http://schemas.openxmlformats.org/drawingml/2006/main" xmlns:r="http://schemas.openxmlformats.org/officeDocument/2006/relationships" xmlns:p="http://schemas.openxmlformats.org/presentationml/2006/main">
+  <p:cSld>
+    <p:spTree>
+      <p:nvGrpSpPr>
+        <p:cNvPr id="1" name=""/>
+        <p:cNvGrpSpPr/>
+        <p:nvPr/>
+      </p:nvGrpSpPr>
+      <p:grpSpPr>
+        <a:xfrm>
+          <a:off x="0" y="0"/>
+          <a:ext cx="0" cy="0"/>
+          <a:chOff x="0" y="0"/>
+          <a:chExt cx="0" cy="0"/>
+        </a:xfrm>
+      </p:grpSpPr>
+      <p:sp>
+        <p:nvSpPr>
+          <p:cNvPr id="1048611" name="Заголовок 1"/>
+          <p:cNvSpPr>
+            <a:spLocks noGrp="1"/>
+          </p:cNvSpPr>
+          <p:nvPr>
+            <p:ph type="title"/>
+          </p:nvPr>
+        </p:nvSpPr>
+        <p:spPr>
+          <a:xfrm>
+            <a:off x="997527" y="0"/>
+            <a:ext cx="10356272" cy="1296786"/>
+          </a:xfrm>
+        </p:spPr>
+        <p:txBody>
+          <a:bodyPr>
+            <a:normAutofit/>
+          </a:bodyPr>
+          <a:lstStyle/>
+          <a:p>
+            <a:r>
+              <a:rPr lang="ru-RU" sz="4800" dirty="0"/>
+              <a:t>Анализ предметной области</a:t>
+            </a:r>
+          </a:p>
+        </p:txBody>
+      </p:sp>
+      <p:sp>
+        <p:nvSpPr>
+          <p:cNvPr id="1048612" name="Заголовок 1"/>
+          <p:cNvSpPr txBox="1"/>
+          <p:nvPr/>
+        </p:nvSpPr>
+        <p:spPr>
+          <a:xfrm>
+            <a:off x="997527" y="824813"/>
+            <a:ext cx="10356272" cy="794085"/>
+          </a:xfrm>
+          <a:prstGeom prst="rect">
+            <a:avLst/>
+          </a:prstGeom>
+        </p:spPr>
+        <p:txBody>
+          <a:bodyPr vert="horz" lIns="91440" tIns="45720" rIns="91440" bIns="45720" rtlCol="0" anchor="ctr">
+            <a:normAutofit/>
+          </a:bodyPr>
+          <a:lstStyle>
+            <a:lvl1pPr algn="l" defTabSz="914400" rtl="0" eaLnBrk="1" latinLnBrk="0" hangingPunct="1">
+              <a:lnSpc>
+                <a:spcPct val="90000"/>
+              </a:lnSpc>
+              <a:spcBef>
+                <a:spcPct val="0"/>
+              </a:spcBef>
+              <a:buNone/>
+              <a:defRPr sz="4400" kern="1200">
+                <a:solidFill>
+                  <a:schemeClr val="tx1"/>
+                </a:solidFill>
+                <a:latin typeface="+mj-lt"/>
+                <a:ea typeface="+mj-ea"/>
+                <a:cs typeface="+mj-cs"/>
+              </a:defRPr>
+            </a:lvl1pPr>
+          </a:lstStyle>
+          <a:p>
+            <a:r>
+              <a:rPr lang="ru-RU" sz="2800" dirty="0"/>
+              <a:t>Функциональные возможности пользователей</a:t>
+            </a:r>
+          </a:p>
+        </p:txBody>
+      </p:sp>
+      <p:sp>
+        <p:nvSpPr>
+          <p:cNvPr id="2" name="AutoShape 2" descr="blob:https://web.telegram.org/2cfdf163-70d9-483c-a6ac-5ad7afbca373"/>
+          <p:cNvSpPr>
+            <a:spLocks noChangeAspect="1" noChangeArrowheads="1"/>
+          </p:cNvSpPr>
+          <p:nvPr/>
+        </p:nvSpPr>
+        <p:spPr bwMode="auto">
+          <a:xfrm>
+            <a:off x="155575" y="-144463"/>
+            <a:ext cx="304800" cy="304801"/>
+          </a:xfrm>
+          <a:prstGeom prst="rect">
+            <a:avLst/>
+          </a:prstGeom>
+          <a:noFill/>
+          <a:extLst>
+            <a:ext uri="{909E8E84-426E-40DD-AFC4-6F175D3DCCD1}">
+              <a14:hiddenFill xmlns:a14="http://schemas.microsoft.com/office/drawing/2010/main">
+                <a:solidFill>
+                  <a:srgbClr val="FFFFFF"/>
+                </a:solidFill>
+              </a14:hiddenFill>
+            </a:ext>
+          </a:extLst>
+        </p:spPr>
+        <p:txBody>
+          <a:bodyPr vert="horz" wrap="square" lIns="91440" tIns="45720" rIns="91440" bIns="45720" numCol="1" anchor="t" anchorCtr="0" compatLnSpc="1">
+            <a:prstTxWarp prst="textNoShape">
+              <a:avLst/>
+            </a:prstTxWarp>
+          </a:bodyPr>
+          <a:lstStyle/>
+          <a:p>
+            <a:endParaRPr lang="ru-RU"/>
+          </a:p>
+        </p:txBody>
+      </p:sp>
+      <p:sp>
+        <p:nvSpPr>
+          <p:cNvPr id="3" name="Прямоугольник 2"/>
+          <p:cNvSpPr/>
+          <p:nvPr/>
+        </p:nvSpPr>
+        <p:spPr>
+          <a:xfrm>
+            <a:off x="155575" y="1898968"/>
+            <a:ext cx="5575754" cy="4570482"/>
+          </a:xfrm>
+          <a:prstGeom prst="rect">
+            <a:avLst/>
+          </a:prstGeom>
+        </p:spPr>
+        <p:txBody>
+          <a:bodyPr wrap="square">
+            <a:spAutoFit/>
+          </a:bodyPr>
+          <a:lstStyle/>
+          <a:p>
+            <a:r>
+              <a:rPr lang="ru-RU" sz="2400" b="1" dirty="0" smtClean="0"/>
+              <a:t>Функциональный сценарий клиента: </a:t>
+            </a:r>
+          </a:p>
+          <a:p>
+            <a:endParaRPr lang="ru-RU" sz="2400" b="1" dirty="0" smtClean="0"/>
+          </a:p>
+          <a:p>
+            <a:pPr>
+              <a:lnSpc>
+                <a:spcPct val="150000"/>
+              </a:lnSpc>
+            </a:pPr>
+            <a:r>
+              <a:rPr lang="ru-RU" dirty="0" smtClean="0"/>
+              <a:t>Первый </a:t>
+            </a:r>
+            <a:r>
+              <a:rPr lang="ru-RU" dirty="0"/>
+              <a:t>запуск приложения (новый пользователь, гость</a:t>
+            </a:r>
+            <a:r>
+              <a:rPr lang="ru-RU" dirty="0" smtClean="0"/>
+              <a:t>): </a:t>
+            </a:r>
+          </a:p>
+          <a:p>
+            <a:pPr marL="342900" indent="-342900">
+              <a:lnSpc>
+                <a:spcPct val="150000"/>
+              </a:lnSpc>
+              <a:buAutoNum type="arabicPeriod"/>
+            </a:pPr>
+            <a:r>
+              <a:rPr lang="ru-RU" dirty="0" smtClean="0"/>
+              <a:t>Пользователь </a:t>
+            </a:r>
+            <a:r>
+              <a:rPr lang="ru-RU" dirty="0"/>
+              <a:t>открывает приложение впервые</a:t>
+            </a:r>
+            <a:r>
+              <a:rPr lang="ru-RU" dirty="0" smtClean="0"/>
+              <a:t>.</a:t>
+            </a:r>
+          </a:p>
+          <a:p>
+            <a:pPr marL="342900" indent="-342900">
+              <a:lnSpc>
+                <a:spcPct val="150000"/>
+              </a:lnSpc>
+              <a:buAutoNum type="arabicPeriod"/>
+            </a:pPr>
+            <a:r>
+              <a:rPr lang="ru-RU" dirty="0" smtClean="0"/>
+              <a:t>Приложение </a:t>
+            </a:r>
+            <a:r>
+              <a:rPr lang="ru-RU" dirty="0"/>
+              <a:t>проверяет: есть ли </a:t>
+            </a:r>
+            <a:r>
+              <a:rPr lang="ru-RU" dirty="0" smtClean="0"/>
+              <a:t>сохранённый идентификатор </a:t>
+            </a:r>
+            <a:r>
+              <a:rPr lang="ru-RU" dirty="0"/>
+              <a:t>пользователя в </a:t>
+            </a:r>
+            <a:r>
+              <a:rPr lang="ru-RU" dirty="0" err="1"/>
+              <a:t>AsyncStorage</a:t>
+            </a:r>
+            <a:r>
+              <a:rPr lang="ru-RU" dirty="0"/>
+              <a:t>? - Ответ: Нет (первый запуск). </a:t>
+            </a:r>
+            <a:endParaRPr lang="ru-RU" dirty="0" smtClean="0"/>
+          </a:p>
+          <a:p>
+            <a:pPr marL="342900" indent="-342900">
+              <a:lnSpc>
+                <a:spcPct val="150000"/>
+              </a:lnSpc>
+              <a:buAutoNum type="arabicPeriod"/>
+            </a:pPr>
+            <a:r>
+              <a:rPr lang="ru-RU" dirty="0" smtClean="0"/>
+              <a:t>Устанавливается </a:t>
+            </a:r>
+            <a:r>
+              <a:rPr lang="ru-RU" dirty="0"/>
+              <a:t>гостевой режим (</a:t>
+            </a:r>
+            <a:r>
+              <a:rPr lang="ru-RU" dirty="0" err="1"/>
+              <a:t>isGuest</a:t>
+            </a:r>
+            <a:r>
+              <a:rPr lang="ru-RU" dirty="0"/>
+              <a:t> = </a:t>
+            </a:r>
+            <a:r>
+              <a:rPr lang="ru-RU" dirty="0" err="1"/>
+              <a:t>true</a:t>
+            </a:r>
+            <a:r>
+              <a:rPr lang="ru-RU" dirty="0" smtClean="0"/>
+              <a:t>).</a:t>
+            </a:r>
+          </a:p>
+          <a:p>
+            <a:pPr marL="342900" indent="-342900">
+              <a:lnSpc>
+                <a:spcPct val="150000"/>
+              </a:lnSpc>
+              <a:buAutoNum type="arabicPeriod"/>
+            </a:pPr>
+            <a:r>
+              <a:rPr lang="ru-RU" dirty="0" smtClean="0"/>
+              <a:t>Открывается </a:t>
+            </a:r>
+            <a:r>
+              <a:rPr lang="ru-RU" dirty="0"/>
+              <a:t>главный экран (вкладки: </a:t>
+            </a:r>
+            <a:r>
+              <a:rPr lang="ru-RU" dirty="0" smtClean="0"/>
+              <a:t>Таро, Гороскоп</a:t>
+            </a:r>
+            <a:r>
+              <a:rPr lang="ru-RU" dirty="0"/>
+              <a:t>, Тесты, Профиль). </a:t>
+            </a:r>
+          </a:p>
+        </p:txBody>
+      </p:sp>
+      <p:sp>
+        <p:nvSpPr>
+          <p:cNvPr id="4" name="Прямоугольник 3"/>
+          <p:cNvSpPr/>
+          <p:nvPr/>
+        </p:nvSpPr>
+        <p:spPr>
+          <a:xfrm>
+            <a:off x="5921828" y="1437189"/>
+            <a:ext cx="6096000" cy="5770811"/>
+          </a:xfrm>
+          <a:prstGeom prst="rect">
+            <a:avLst/>
+          </a:prstGeom>
+        </p:spPr>
+        <p:txBody>
+          <a:bodyPr>
+            <a:spAutoFit/>
+          </a:bodyPr>
+          <a:lstStyle/>
+          <a:p>
+            <a:pPr marL="342900" indent="-342900">
+              <a:lnSpc>
+                <a:spcPct val="150000"/>
+              </a:lnSpc>
+              <a:buAutoNum type="arabicPeriod" startAt="5"/>
+            </a:pPr>
+            <a:r>
+              <a:rPr lang="ru-RU" dirty="0" smtClean="0"/>
+              <a:t>Пользователь </a:t>
+            </a:r>
+            <a:r>
+              <a:rPr lang="ru-RU" dirty="0"/>
+              <a:t>может: - Вытянуть карту дня (</a:t>
+            </a:r>
+            <a:r>
+              <a:rPr lang="ru-RU" dirty="0" err="1"/>
+              <a:t>useDailyCard</a:t>
+            </a:r>
+            <a:r>
+              <a:rPr lang="ru-RU" dirty="0"/>
+              <a:t> проверяет дату → если новый день — можно вытянуть). - Сделать до 3 раскладов Таро за день (</a:t>
+            </a:r>
+            <a:r>
+              <a:rPr lang="ru-RU" dirty="0" err="1"/>
+              <a:t>useTarotReadings</a:t>
+            </a:r>
+            <a:r>
+              <a:rPr lang="ru-RU" dirty="0"/>
+              <a:t> считает количество). - Посмотреть урезанную версию матрицы судьбы / гороскопа (без ввода даты рождения или с ограничениями). - Пройти бесплатные тесты (результаты сохраняются в </a:t>
+            </a:r>
+            <a:r>
+              <a:rPr lang="ru-RU" dirty="0" err="1"/>
+              <a:t>AsyncStorage</a:t>
+            </a:r>
+            <a:r>
+              <a:rPr lang="ru-RU" dirty="0" smtClean="0"/>
+              <a:t>). </a:t>
+            </a:r>
+          </a:p>
+          <a:p>
+            <a:pPr marL="342900" indent="-342900">
+              <a:lnSpc>
+                <a:spcPct val="150000"/>
+              </a:lnSpc>
+              <a:buFontTx/>
+              <a:buAutoNum type="arabicPeriod" startAt="5"/>
+            </a:pPr>
+            <a:r>
+              <a:rPr lang="ru-RU" dirty="0"/>
+              <a:t>При попытке открыть премиум-функцию (например, 4-й расклад Таро, полный тест или расширенную матрицу): - Появляется сообщение: «Функция доступна только по подписке». - Происходит переход на экран авторизации (/</a:t>
+            </a:r>
+            <a:r>
+              <a:rPr lang="ru-RU" dirty="0" err="1"/>
+              <a:t>auth</a:t>
+            </a:r>
+            <a:r>
+              <a:rPr lang="ru-RU" dirty="0"/>
+              <a:t>), так как гость не может оформить подписку без аккаунта.</a:t>
+            </a:r>
+          </a:p>
+          <a:p>
+            <a:pPr marL="342900" indent="-342900">
+              <a:buAutoNum type="arabicPeriod" startAt="5"/>
+            </a:pPr>
+            <a:endParaRPr lang="ru-RU" dirty="0"/>
+          </a:p>
+        </p:txBody>
+      </p:sp>
+    </p:spTree>
+    <p:extLst>
+      <p:ext uri="{BB962C8B-B14F-4D97-AF65-F5344CB8AC3E}">
+        <p14:creationId xmlns:p14="http://schemas.microsoft.com/office/powerpoint/2010/main" val="172459090"/>
+      </p:ext>
+    </p:extLst>
+  </p:cSld>
+  <p:clrMapOvr>
+    <a:masterClrMapping/>
+  </p:clrMapOvr>
+</p:sld>
+</file>
+
+<file path=ppt/slides/slide8.xml><?xml version="1.0" encoding="utf-8"?>
+<p:sld xmlns:a="http://schemas.openxmlformats.org/drawingml/2006/main" xmlns:r="http://schemas.openxmlformats.org/officeDocument/2006/relationships" xmlns:p="http://schemas.openxmlformats.org/presentationml/2006/main">
+  <p:cSld>
+    <p:spTree>
+      <p:nvGrpSpPr>
+        <p:cNvPr id="1" name=""/>
+        <p:cNvGrpSpPr/>
+        <p:nvPr/>
+      </p:nvGrpSpPr>
+      <p:grpSpPr>
+        <a:xfrm>
+          <a:off x="0" y="0"/>
+          <a:ext cx="0" cy="0"/>
+          <a:chOff x="0" y="0"/>
+          <a:chExt cx="0" cy="0"/>
+        </a:xfrm>
+      </p:grpSpPr>
+      <p:sp>
+        <p:nvSpPr>
+          <p:cNvPr id="1048613" name="Заголовок 1"/>
+          <p:cNvSpPr>
+            <a:spLocks noGrp="1"/>
+          </p:cNvSpPr>
+          <p:nvPr>
+            <p:ph type="title"/>
+          </p:nvPr>
+        </p:nvSpPr>
+        <p:spPr>
+          <a:xfrm>
+            <a:off x="997527" y="0"/>
+            <a:ext cx="10356272" cy="1296786"/>
+          </a:xfrm>
+        </p:spPr>
+        <p:txBody>
+          <a:bodyPr>
+            <a:normAutofit/>
+          </a:bodyPr>
+          <a:lstStyle/>
+          <a:p>
+            <a:r>
+              <a:rPr lang="ru-RU" sz="4800" dirty="0"/>
+              <a:t>Разработка программного продукта</a:t>
+            </a:r>
+          </a:p>
+        </p:txBody>
+      </p:sp>
+      <p:sp>
+        <p:nvSpPr>
+          <p:cNvPr id="1048615" name="Заголовок 1"/>
+          <p:cNvSpPr txBox="1"/>
+          <p:nvPr/>
+        </p:nvSpPr>
+        <p:spPr>
+          <a:xfrm>
+            <a:off x="997527" y="899743"/>
+            <a:ext cx="10356272" cy="794085"/>
+          </a:xfrm>
+          <a:prstGeom prst="rect">
+            <a:avLst/>
+          </a:prstGeom>
+        </p:spPr>
+        <p:txBody>
+          <a:bodyPr vert="horz" lIns="91440" tIns="45720" rIns="91440" bIns="45720" rtlCol="0" anchor="ctr">
+            <a:normAutofit/>
+          </a:bodyPr>
+          <a:lstStyle>
+            <a:lvl1pPr algn="l" defTabSz="914400" rtl="0" eaLnBrk="1" latinLnBrk="0" hangingPunct="1">
+              <a:lnSpc>
+                <a:spcPct val="90000"/>
+              </a:lnSpc>
+              <a:spcBef>
+                <a:spcPct val="0"/>
+              </a:spcBef>
+              <a:buNone/>
+              <a:defRPr sz="4400" kern="1200">
+                <a:solidFill>
+                  <a:schemeClr val="tx1"/>
+                </a:solidFill>
+                <a:latin typeface="+mj-lt"/>
+                <a:ea typeface="+mj-ea"/>
+                <a:cs typeface="+mj-cs"/>
+              </a:defRPr>
+            </a:lvl1pPr>
+          </a:lstStyle>
+          <a:p>
+            <a:r>
+              <a:rPr lang="ru-RU" sz="3600" dirty="0"/>
+              <a:t>Выбор инструментальных средств</a:t>
+            </a:r>
+          </a:p>
+        </p:txBody>
+      </p:sp>
+      <p:pic>
+        <p:nvPicPr>
+          <p:cNvPr id="5" name="Рисунок 4" descr="Picture background"/>
+          <p:cNvPicPr/>
+          <p:nvPr/>
+        </p:nvPicPr>
+        <p:blipFill>
+          <a:blip r:embed="rId2" cstate="print">
+            <a:extLst>
+              <a:ext uri="{28A0092B-C50C-407E-A947-70E740481C1C}">
+                <a14:useLocalDpi xmlns:a14="http://schemas.microsoft.com/office/drawing/2010/main" val="0"/>
+              </a:ext>
+            </a:extLst>
+          </a:blip>
+          <a:srcRect/>
+          <a:stretch>
+            <a:fillRect/>
+          </a:stretch>
+        </p:blipFill>
+        <p:spPr bwMode="auto">
+          <a:xfrm>
+            <a:off x="1738312" y="2337026"/>
+            <a:ext cx="1845809" cy="1845809"/>
+          </a:xfrm>
+          <a:prstGeom prst="rect">
+            <a:avLst/>
+          </a:prstGeom>
+          <a:noFill/>
+          <a:ln>
+            <a:noFill/>
+          </a:ln>
+        </p:spPr>
+      </p:pic>
+      <p:pic>
+        <p:nvPicPr>
+          <p:cNvPr id="6" name="Рисунок 5" descr="E:\!!!КУРСОВАЯ\!Курсовая работа\Доп файлы\vs code logo.png"/>
+          <p:cNvPicPr/>
+          <p:nvPr/>
+        </p:nvPicPr>
+        <p:blipFill>
+          <a:blip r:embed="rId3">
+            <a:extLst>
+              <a:ext uri="{28A0092B-C50C-407E-A947-70E740481C1C}">
+                <a14:useLocalDpi xmlns:a14="http://schemas.microsoft.com/office/drawing/2010/main" val="0"/>
+              </a:ext>
+            </a:extLst>
+          </a:blip>
+          <a:srcRect/>
+          <a:stretch>
+            <a:fillRect/>
+          </a:stretch>
+        </p:blipFill>
+        <p:spPr bwMode="auto">
+          <a:xfrm>
+            <a:off x="5372100" y="2608148"/>
+            <a:ext cx="1303564" cy="1303564"/>
+          </a:xfrm>
+          <a:prstGeom prst="rect">
+            <a:avLst/>
+          </a:prstGeom>
+          <a:noFill/>
+          <a:ln>
+            <a:noFill/>
+          </a:ln>
+        </p:spPr>
+      </p:pic>
+      <p:pic>
+        <p:nvPicPr>
+          <p:cNvPr id="7" name="Рисунок 6" descr="Picture background"/>
+          <p:cNvPicPr/>
+          <p:nvPr/>
+        </p:nvPicPr>
+        <p:blipFill>
+          <a:blip r:embed="rId4" cstate="print">
+            <a:extLst>
+              <a:ext uri="{28A0092B-C50C-407E-A947-70E740481C1C}">
+                <a14:useLocalDpi xmlns:a14="http://schemas.microsoft.com/office/drawing/2010/main" val="0"/>
+              </a:ext>
+            </a:extLst>
+          </a:blip>
+          <a:srcRect/>
+          <a:stretch>
+            <a:fillRect/>
+          </a:stretch>
+        </p:blipFill>
+        <p:spPr bwMode="auto">
+          <a:xfrm>
+            <a:off x="8954860" y="2593860"/>
+            <a:ext cx="1332139" cy="1332139"/>
+          </a:xfrm>
+          <a:prstGeom prst="rect">
+            <a:avLst/>
+          </a:prstGeom>
+          <a:noFill/>
+          <a:ln>
+            <a:noFill/>
+          </a:ln>
+        </p:spPr>
+      </p:pic>
+      <p:pic>
+        <p:nvPicPr>
+          <p:cNvPr id="8" name="Рисунок 7" descr="Picture background"/>
+          <p:cNvPicPr/>
+          <p:nvPr/>
+        </p:nvPicPr>
+        <p:blipFill>
+          <a:blip r:embed="rId5" cstate="print">
+            <a:extLst>
+              <a:ext uri="{28A0092B-C50C-407E-A947-70E740481C1C}">
+                <a14:useLocalDpi xmlns:a14="http://schemas.microsoft.com/office/drawing/2010/main" val="0"/>
+              </a:ext>
+            </a:extLst>
+          </a:blip>
+          <a:srcRect/>
+          <a:stretch>
+            <a:fillRect/>
+          </a:stretch>
+        </p:blipFill>
+        <p:spPr bwMode="auto">
+          <a:xfrm>
+            <a:off x="3329666" y="4545465"/>
+            <a:ext cx="1642383" cy="1642383"/>
+          </a:xfrm>
+          <a:prstGeom prst="rect">
+            <a:avLst/>
+          </a:prstGeom>
+          <a:noFill/>
+          <a:ln>
+            <a:noFill/>
+          </a:ln>
+        </p:spPr>
+      </p:pic>
+      <p:pic>
+        <p:nvPicPr>
+          <p:cNvPr id="9" name="Рисунок 8"/>
+          <p:cNvPicPr/>
+          <p:nvPr/>
+        </p:nvPicPr>
+        <p:blipFill>
+          <a:blip r:embed="rId6" cstate="print">
+            <a:extLst>
+              <a:ext uri="{28A0092B-C50C-407E-A947-70E740481C1C}">
+                <a14:useLocalDpi xmlns:a14="http://schemas.microsoft.com/office/drawing/2010/main" val="0"/>
+              </a:ext>
+            </a:extLst>
+          </a:blip>
+          <a:srcRect/>
+          <a:stretch>
+            <a:fillRect/>
+          </a:stretch>
+        </p:blipFill>
+        <p:spPr bwMode="auto">
+          <a:xfrm>
+            <a:off x="7379153" y="4673712"/>
+            <a:ext cx="1385887" cy="1385887"/>
+          </a:xfrm>
+          <a:prstGeom prst="rect">
+            <a:avLst/>
+          </a:prstGeom>
+          <a:noFill/>
+        </p:spPr>
+      </p:pic>
+    </p:spTree>
+  </p:cSld>
+  <p:clrMapOvr>
+    <a:masterClrMapping/>
+  </p:clrMapOvr>
+</p:sld>
+</file>
+
+<file path=ppt/slides/slide9.xml><?xml version="1.0" encoding="utf-8"?>
 <p:sld xmlns:a="http://schemas.openxmlformats.org/drawingml/2006/main" xmlns:r="http://schemas.openxmlformats.org/officeDocument/2006/relationships" xmlns:p="http://schemas.openxmlformats.org/presentationml/2006/main">
   <p:cSld>
     <p:spTree>
@@ -5942,3424 +8361,6 @@
   <p:clrMapOvr>
     <a:masterClrMapping/>
   </p:clrMapOvr>
-</p:sld>
-</file>
-
-<file path=ppt/slides/slide12.xml><?xml version="1.0" encoding="utf-8"?>
-<p:sld xmlns:a="http://schemas.openxmlformats.org/drawingml/2006/main" xmlns:r="http://schemas.openxmlformats.org/officeDocument/2006/relationships" xmlns:p="http://schemas.openxmlformats.org/presentationml/2006/main">
-  <p:cSld>
-    <p:spTree>
-      <p:nvGrpSpPr>
-        <p:cNvPr id="1" name=""/>
-        <p:cNvGrpSpPr/>
-        <p:nvPr/>
-      </p:nvGrpSpPr>
-      <p:grpSpPr>
-        <a:xfrm>
-          <a:off x="0" y="0"/>
-          <a:ext cx="0" cy="0"/>
-          <a:chOff x="0" y="0"/>
-          <a:chExt cx="0" cy="0"/>
-        </a:xfrm>
-      </p:grpSpPr>
-      <p:sp>
-        <p:nvSpPr>
-          <p:cNvPr id="1048619" name="Заголовок 1"/>
-          <p:cNvSpPr>
-            <a:spLocks noGrp="1"/>
-          </p:cNvSpPr>
-          <p:nvPr>
-            <p:ph type="title"/>
-          </p:nvPr>
-        </p:nvSpPr>
-        <p:spPr>
-          <a:xfrm>
-            <a:off x="997527" y="0"/>
-            <a:ext cx="10356272" cy="1296786"/>
-          </a:xfrm>
-        </p:spPr>
-        <p:txBody>
-          <a:bodyPr>
-            <a:normAutofit/>
-          </a:bodyPr>
-          <a:lstStyle/>
-          <a:p>
-            <a:r>
-              <a:rPr lang="ru-RU" sz="4800" dirty="0"/>
-              <a:t>Разработка программного продукта</a:t>
-            </a:r>
-          </a:p>
-        </p:txBody>
-      </p:sp>
-      <p:sp>
-        <p:nvSpPr>
-          <p:cNvPr id="1048620" name="Объект 2"/>
-          <p:cNvSpPr>
-            <a:spLocks noGrp="1"/>
-          </p:cNvSpPr>
-          <p:nvPr>
-            <p:ph idx="1"/>
-          </p:nvPr>
-        </p:nvSpPr>
-        <p:spPr>
-          <a:xfrm>
-            <a:off x="459105" y="1792605"/>
-            <a:ext cx="11262360" cy="4936490"/>
-          </a:xfrm>
-        </p:spPr>
-        <p:txBody>
-          <a:bodyPr anchor="ctr">
-            <a:normAutofit/>
-          </a:bodyPr>
-          <a:lstStyle/>
-          <a:p>
-            <a:pPr marL="0" indent="0" algn="just">
-              <a:buNone/>
-            </a:pPr>
-            <a:r>
-              <a:rPr lang="ru-RU" sz="2400" b="1" dirty="0" smtClean="0"/>
-              <a:t>Основная проблема </a:t>
-            </a:r>
-            <a:r>
-              <a:rPr lang="ru-RU" sz="2400" b="1" dirty="0"/>
-              <a:t>существующих решений</a:t>
-            </a:r>
-          </a:p>
-          <a:p>
-            <a:pPr algn="just"/>
-            <a:r>
-              <a:rPr lang="ru-RU" sz="2400" dirty="0"/>
-              <a:t>Отсутствие качественных бесплатных мобильных приложений, объединяющих астрологические прогнозы и таро-расклады в едином </a:t>
-            </a:r>
-            <a:r>
-              <a:rPr lang="ru-RU" sz="2400" dirty="0" smtClean="0"/>
-              <a:t>интерфейсе</a:t>
-            </a:r>
-            <a:endParaRPr lang="ru-RU" sz="2400" dirty="0" smtClean="0"/>
-          </a:p>
-          <a:p>
-            <a:pPr algn="just"/>
-            <a:r>
-              <a:rPr lang="ru-RU" sz="2400" dirty="0"/>
-              <a:t>Недостаточная проработанность пользовательского опыта</a:t>
-            </a:r>
-            <a:endParaRPr lang="ru-RU" sz="2400" dirty="0" smtClean="0"/>
-          </a:p>
-          <a:p>
-            <a:pPr marL="0" indent="0" algn="just">
-              <a:buNone/>
-            </a:pPr>
-            <a:r>
-              <a:rPr lang="ru-RU" sz="2400" b="1" dirty="0" smtClean="0"/>
-              <a:t>Причины разработки новой системы</a:t>
-            </a:r>
-          </a:p>
-          <a:p>
-            <a:r>
-              <a:rPr lang="ru-RU" sz="2400" dirty="0"/>
-              <a:t>Потребность пользователей в удобном и визуально приятном инструменте для персонализированных прогнозов и самопознания</a:t>
-            </a:r>
-          </a:p>
-          <a:p>
-            <a:r>
-              <a:rPr lang="ru-RU" sz="2400" dirty="0"/>
-              <a:t>Преимущества современных кроссплатформенных технологий: доступность на </a:t>
-            </a:r>
-            <a:r>
-              <a:rPr lang="ru-RU" sz="2400" dirty="0" err="1"/>
-              <a:t>Android</a:t>
-            </a:r>
-            <a:r>
-              <a:rPr lang="ru-RU" sz="2400" dirty="0"/>
-              <a:t> и </a:t>
-            </a:r>
-            <a:r>
-              <a:rPr lang="ru-RU" sz="2400" dirty="0" err="1"/>
-              <a:t>iOS</a:t>
-            </a:r>
-            <a:r>
-              <a:rPr lang="ru-RU" sz="2400" dirty="0"/>
-              <a:t>, единая кодовая база, простота использования и </a:t>
-            </a:r>
-            <a:r>
-              <a:rPr lang="ru-RU" sz="2400" dirty="0" smtClean="0"/>
-              <a:t>обновления</a:t>
-            </a:r>
-            <a:endParaRPr lang="ru-RU" sz="2100" dirty="0" smtClean="0"/>
-          </a:p>
-          <a:p>
-            <a:pPr marL="0" indent="0">
-              <a:lnSpc>
-                <a:spcPct val="100000"/>
-              </a:lnSpc>
-              <a:buNone/>
-            </a:pPr>
-            <a:r>
-              <a:rPr lang="ru-RU" sz="2400" b="1" dirty="0" smtClean="0"/>
-              <a:t>Цель </a:t>
-            </a:r>
-            <a:r>
-              <a:rPr lang="ru-RU" sz="2400" b="1" dirty="0"/>
-              <a:t>новой </a:t>
-            </a:r>
-            <a:r>
-              <a:rPr lang="ru-RU" sz="2400" b="1" dirty="0" smtClean="0"/>
-              <a:t>системы</a:t>
-            </a:r>
-            <a:r>
-              <a:rPr lang="en-US" sz="2400" b="1" dirty="0" smtClean="0"/>
-              <a:t> -</a:t>
-            </a:r>
-            <a:r>
-              <a:rPr lang="en-US" sz="2400" b="1" dirty="0"/>
-              <a:t> </a:t>
-            </a:r>
-            <a:r>
-              <a:rPr lang="ru-RU" sz="2400" dirty="0"/>
-              <a:t>Обеспечить целостный клиентский инструмент, объединяющий интерактивные сценарии получения прогнозов и раскладов, понятную визуализацию данных и лёгкую интеграцию с серверной частью</a:t>
-            </a:r>
-            <a:r>
-              <a:rPr lang="ru-RU" sz="2400" dirty="0" smtClean="0"/>
-              <a:t>.</a:t>
-            </a:r>
-            <a:endParaRPr lang="ru-RU" sz="2400" dirty="0"/>
-          </a:p>
-        </p:txBody>
-      </p:sp>
-      <p:sp>
-        <p:nvSpPr>
-          <p:cNvPr id="1048621" name="Заголовок 1"/>
-          <p:cNvSpPr txBox="1"/>
-          <p:nvPr/>
-        </p:nvSpPr>
-        <p:spPr>
-          <a:xfrm>
-            <a:off x="997527" y="899743"/>
-            <a:ext cx="10356272" cy="794085"/>
-          </a:xfrm>
-          <a:prstGeom prst="rect">
-            <a:avLst/>
-          </a:prstGeom>
-        </p:spPr>
-        <p:txBody>
-          <a:bodyPr vert="horz" lIns="91440" tIns="45720" rIns="91440" bIns="45720" rtlCol="0" anchor="ctr">
-            <a:normAutofit fontScale="92500"/>
-          </a:bodyPr>
-          <a:lstStyle>
-            <a:lvl1pPr algn="l" defTabSz="914400" rtl="0" eaLnBrk="1" latinLnBrk="0" hangingPunct="1">
-              <a:lnSpc>
-                <a:spcPct val="90000"/>
-              </a:lnSpc>
-              <a:spcBef>
-                <a:spcPct val="0"/>
-              </a:spcBef>
-              <a:buNone/>
-              <a:defRPr sz="4400" kern="1200">
-                <a:solidFill>
-                  <a:schemeClr val="tx1"/>
-                </a:solidFill>
-                <a:latin typeface="+mj-lt"/>
-                <a:ea typeface="+mj-ea"/>
-                <a:cs typeface="+mj-cs"/>
-              </a:defRPr>
-            </a:lvl1pPr>
-          </a:lstStyle>
-          <a:p>
-            <a:r>
-              <a:rPr lang="ru-RU" sz="3600" dirty="0" smtClean="0"/>
-              <a:t>Обоснование </a:t>
-            </a:r>
-            <a:r>
-              <a:rPr lang="ru-RU" sz="3600" dirty="0"/>
-              <a:t>необходимости разработки новой системы </a:t>
-            </a:r>
-          </a:p>
-        </p:txBody>
-      </p:sp>
-    </p:spTree>
-  </p:cSld>
-  <p:clrMapOvr>
-    <a:masterClrMapping/>
-  </p:clrMapOvr>
-</p:sld>
-</file>
-
-<file path=ppt/slides/slide13.xml><?xml version="1.0" encoding="utf-8"?>
-<p:sld xmlns:a="http://schemas.openxmlformats.org/drawingml/2006/main" xmlns:r="http://schemas.openxmlformats.org/officeDocument/2006/relationships" xmlns:p="http://schemas.openxmlformats.org/presentationml/2006/main">
-  <p:cSld>
-    <p:spTree>
-      <p:nvGrpSpPr>
-        <p:cNvPr id="1" name=""/>
-        <p:cNvGrpSpPr/>
-        <p:nvPr/>
-      </p:nvGrpSpPr>
-      <p:grpSpPr>
-        <a:xfrm>
-          <a:off x="0" y="0"/>
-          <a:ext cx="0" cy="0"/>
-          <a:chOff x="0" y="0"/>
-          <a:chExt cx="0" cy="0"/>
-        </a:xfrm>
-      </p:grpSpPr>
-      <p:sp>
-        <p:nvSpPr>
-          <p:cNvPr id="1048625" name="Заголовок 1"/>
-          <p:cNvSpPr>
-            <a:spLocks noGrp="1"/>
-          </p:cNvSpPr>
-          <p:nvPr>
-            <p:ph type="title"/>
-          </p:nvPr>
-        </p:nvSpPr>
-        <p:spPr>
-          <a:xfrm>
-            <a:off x="997527" y="0"/>
-            <a:ext cx="10356272" cy="1296786"/>
-          </a:xfrm>
-        </p:spPr>
-        <p:txBody>
-          <a:bodyPr>
-            <a:normAutofit/>
-          </a:bodyPr>
-          <a:lstStyle/>
-          <a:p>
-            <a:r>
-              <a:rPr lang="ru-RU" sz="4800" dirty="0"/>
-              <a:t>Разработка программного продукта</a:t>
-            </a:r>
-          </a:p>
-        </p:txBody>
-      </p:sp>
-      <p:sp>
-        <p:nvSpPr>
-          <p:cNvPr id="1048626" name="Заголовок 1"/>
-          <p:cNvSpPr txBox="1"/>
-          <p:nvPr/>
-        </p:nvSpPr>
-        <p:spPr>
-          <a:xfrm>
-            <a:off x="997527" y="899743"/>
-            <a:ext cx="10356272" cy="794085"/>
-          </a:xfrm>
-          <a:prstGeom prst="rect">
-            <a:avLst/>
-          </a:prstGeom>
-        </p:spPr>
-        <p:txBody>
-          <a:bodyPr vert="horz" lIns="91440" tIns="45720" rIns="91440" bIns="45720" rtlCol="0" anchor="ctr">
-            <a:normAutofit fontScale="92500"/>
-          </a:bodyPr>
-          <a:lstStyle>
-            <a:lvl1pPr algn="l" defTabSz="914400" rtl="0" eaLnBrk="1" latinLnBrk="0" hangingPunct="1">
-              <a:lnSpc>
-                <a:spcPct val="90000"/>
-              </a:lnSpc>
-              <a:spcBef>
-                <a:spcPct val="0"/>
-              </a:spcBef>
-              <a:buNone/>
-              <a:defRPr sz="4400" kern="1200">
-                <a:solidFill>
-                  <a:schemeClr val="tx1"/>
-                </a:solidFill>
-                <a:latin typeface="+mj-lt"/>
-                <a:ea typeface="+mj-ea"/>
-                <a:cs typeface="+mj-cs"/>
-              </a:defRPr>
-            </a:lvl1pPr>
-          </a:lstStyle>
-          <a:p>
-            <a:r>
-              <a:rPr lang="ru-RU" sz="3600" dirty="0"/>
-              <a:t>Разработка пользовательского интерфейса и сценариев</a:t>
-            </a:r>
-          </a:p>
-        </p:txBody>
-      </p:sp>
-      <p:sp>
-        <p:nvSpPr>
-          <p:cNvPr id="5" name="Заголовок 1"/>
-          <p:cNvSpPr txBox="1"/>
-          <p:nvPr/>
-        </p:nvSpPr>
-        <p:spPr>
-          <a:xfrm>
-            <a:off x="357447" y="3850536"/>
-            <a:ext cx="4434989" cy="794085"/>
-          </a:xfrm>
-          <a:prstGeom prst="rect">
-            <a:avLst/>
-          </a:prstGeom>
-        </p:spPr>
-        <p:txBody>
-          <a:bodyPr vert="horz" lIns="91440" tIns="45720" rIns="91440" bIns="45720" rtlCol="0" anchor="ctr">
-            <a:noAutofit/>
-          </a:bodyPr>
-          <a:lstStyle>
-            <a:lvl1pPr algn="l" defTabSz="914400" rtl="0" eaLnBrk="1" latinLnBrk="0" hangingPunct="1">
-              <a:lnSpc>
-                <a:spcPct val="90000"/>
-              </a:lnSpc>
-              <a:spcBef>
-                <a:spcPct val="0"/>
-              </a:spcBef>
-              <a:buNone/>
-              <a:defRPr sz="4400" kern="1200">
-                <a:solidFill>
-                  <a:schemeClr val="tx1"/>
-                </a:solidFill>
-                <a:latin typeface="+mj-lt"/>
-                <a:ea typeface="+mj-ea"/>
-                <a:cs typeface="+mj-cs"/>
-              </a:defRPr>
-            </a:lvl1pPr>
-          </a:lstStyle>
-          <a:p>
-            <a:r>
-              <a:rPr lang="ru-RU" b="1" dirty="0" smtClean="0"/>
-              <a:t>Главное меню</a:t>
-            </a:r>
-            <a:endParaRPr lang="ru-RU" b="1" dirty="0"/>
-          </a:p>
-        </p:txBody>
-      </p:sp>
-      <p:pic>
-        <p:nvPicPr>
-          <p:cNvPr id="6" name="Picture 2" descr="C:\Users\USER\Downloads\index.png"/>
-          <p:cNvPicPr>
-            <a:picLocks noChangeAspect="1" noChangeArrowheads="1"/>
-          </p:cNvPicPr>
-          <p:nvPr/>
-        </p:nvPicPr>
-        <p:blipFill>
-          <a:blip r:embed="rId2">
-            <a:extLst>
-              <a:ext uri="{28A0092B-C50C-407E-A947-70E740481C1C}">
-                <a14:useLocalDpi xmlns:a14="http://schemas.microsoft.com/office/drawing/2010/main" val="0"/>
-              </a:ext>
-            </a:extLst>
-          </a:blip>
-          <a:srcRect/>
-          <a:stretch>
-            <a:fillRect/>
-          </a:stretch>
-        </p:blipFill>
-        <p:spPr bwMode="auto">
-          <a:xfrm>
-            <a:off x="7563251" y="2065487"/>
-            <a:ext cx="2013056" cy="4364182"/>
-          </a:xfrm>
-          <a:prstGeom prst="rect">
-            <a:avLst/>
-          </a:prstGeom>
-          <a:noFill/>
-          <a:extLst>
-            <a:ext uri="{909E8E84-426E-40DD-AFC4-6F175D3DCCD1}">
-              <a14:hiddenFill xmlns:a14="http://schemas.microsoft.com/office/drawing/2010/main">
-                <a:solidFill>
-                  <a:srgbClr val="FFFFFF"/>
-                </a:solidFill>
-              </a14:hiddenFill>
-            </a:ext>
-          </a:extLst>
-        </p:spPr>
-      </p:pic>
-    </p:spTree>
-  </p:cSld>
-  <p:clrMapOvr>
-    <a:masterClrMapping/>
-  </p:clrMapOvr>
-</p:sld>
-</file>
-
-<file path=ppt/slides/slide14.xml><?xml version="1.0" encoding="utf-8"?>
-<p:sld xmlns:a="http://schemas.openxmlformats.org/drawingml/2006/main" xmlns:r="http://schemas.openxmlformats.org/officeDocument/2006/relationships" xmlns:p="http://schemas.openxmlformats.org/presentationml/2006/main">
-  <p:cSld>
-    <p:spTree>
-      <p:nvGrpSpPr>
-        <p:cNvPr id="1" name=""/>
-        <p:cNvGrpSpPr/>
-        <p:nvPr/>
-      </p:nvGrpSpPr>
-      <p:grpSpPr>
-        <a:xfrm>
-          <a:off x="0" y="0"/>
-          <a:ext cx="0" cy="0"/>
-          <a:chOff x="0" y="0"/>
-          <a:chExt cx="0" cy="0"/>
-        </a:xfrm>
-      </p:grpSpPr>
-      <p:sp>
-        <p:nvSpPr>
-          <p:cNvPr id="1048625" name="Заголовок 1"/>
-          <p:cNvSpPr>
-            <a:spLocks noGrp="1"/>
-          </p:cNvSpPr>
-          <p:nvPr>
-            <p:ph type="title"/>
-          </p:nvPr>
-        </p:nvSpPr>
-        <p:spPr>
-          <a:xfrm>
-            <a:off x="997527" y="0"/>
-            <a:ext cx="10356272" cy="1296786"/>
-          </a:xfrm>
-        </p:spPr>
-        <p:txBody>
-          <a:bodyPr>
-            <a:normAutofit/>
-          </a:bodyPr>
-          <a:lstStyle/>
-          <a:p>
-            <a:r>
-              <a:rPr lang="ru-RU" sz="4800" dirty="0"/>
-              <a:t>Разработка программного продукта</a:t>
-            </a:r>
-          </a:p>
-        </p:txBody>
-      </p:sp>
-      <p:sp>
-        <p:nvSpPr>
-          <p:cNvPr id="1048626" name="Заголовок 1"/>
-          <p:cNvSpPr txBox="1"/>
-          <p:nvPr/>
-        </p:nvSpPr>
-        <p:spPr>
-          <a:xfrm>
-            <a:off x="997527" y="899743"/>
-            <a:ext cx="10356272" cy="794085"/>
-          </a:xfrm>
-          <a:prstGeom prst="rect">
-            <a:avLst/>
-          </a:prstGeom>
-        </p:spPr>
-        <p:txBody>
-          <a:bodyPr vert="horz" lIns="91440" tIns="45720" rIns="91440" bIns="45720" rtlCol="0" anchor="ctr">
-            <a:normAutofit fontScale="92500"/>
-          </a:bodyPr>
-          <a:lstStyle>
-            <a:lvl1pPr algn="l" defTabSz="914400" rtl="0" eaLnBrk="1" latinLnBrk="0" hangingPunct="1">
-              <a:lnSpc>
-                <a:spcPct val="90000"/>
-              </a:lnSpc>
-              <a:spcBef>
-                <a:spcPct val="0"/>
-              </a:spcBef>
-              <a:buNone/>
-              <a:defRPr sz="4400" kern="1200">
-                <a:solidFill>
-                  <a:schemeClr val="tx1"/>
-                </a:solidFill>
-                <a:latin typeface="+mj-lt"/>
-                <a:ea typeface="+mj-ea"/>
-                <a:cs typeface="+mj-cs"/>
-              </a:defRPr>
-            </a:lvl1pPr>
-          </a:lstStyle>
-          <a:p>
-            <a:r>
-              <a:rPr lang="ru-RU" sz="3600" dirty="0"/>
-              <a:t>Разработка пользовательского интерфейса и сценариев</a:t>
-            </a:r>
-          </a:p>
-        </p:txBody>
-      </p:sp>
-      <p:sp>
-        <p:nvSpPr>
-          <p:cNvPr id="5" name="Заголовок 1"/>
-          <p:cNvSpPr txBox="1"/>
-          <p:nvPr/>
-        </p:nvSpPr>
-        <p:spPr>
-          <a:xfrm>
-            <a:off x="384117" y="3922694"/>
-            <a:ext cx="2454333" cy="794085"/>
-          </a:xfrm>
-          <a:prstGeom prst="rect">
-            <a:avLst/>
-          </a:prstGeom>
-        </p:spPr>
-        <p:txBody>
-          <a:bodyPr vert="horz" lIns="91440" tIns="45720" rIns="91440" bIns="45720" rtlCol="0" anchor="ctr">
-            <a:normAutofit/>
-          </a:bodyPr>
-          <a:lstStyle>
-            <a:lvl1pPr algn="l" defTabSz="914400" rtl="0" eaLnBrk="1" latinLnBrk="0" hangingPunct="1">
-              <a:lnSpc>
-                <a:spcPct val="90000"/>
-              </a:lnSpc>
-              <a:spcBef>
-                <a:spcPct val="0"/>
-              </a:spcBef>
-              <a:buNone/>
-              <a:defRPr sz="4400" kern="1200">
-                <a:solidFill>
-                  <a:schemeClr val="tx1"/>
-                </a:solidFill>
-                <a:latin typeface="+mj-lt"/>
-                <a:ea typeface="+mj-ea"/>
-                <a:cs typeface="+mj-cs"/>
-              </a:defRPr>
-            </a:lvl1pPr>
-          </a:lstStyle>
-          <a:p>
-            <a:r>
-              <a:rPr lang="ru-RU" b="1" dirty="0" smtClean="0"/>
-              <a:t>Профиль</a:t>
-            </a:r>
-            <a:endParaRPr lang="ru-RU" sz="3200" b="1" dirty="0"/>
-          </a:p>
-        </p:txBody>
-      </p:sp>
-      <p:pic>
-        <p:nvPicPr>
-          <p:cNvPr id="6" name="Picture 4" descr="C:\Users\USER\Downloads\profile + data.png"/>
-          <p:cNvPicPr>
-            <a:picLocks noChangeAspect="1" noChangeArrowheads="1"/>
-          </p:cNvPicPr>
-          <p:nvPr/>
-        </p:nvPicPr>
-        <p:blipFill>
-          <a:blip r:embed="rId2">
-            <a:extLst>
-              <a:ext uri="{28A0092B-C50C-407E-A947-70E740481C1C}">
-                <a14:useLocalDpi xmlns:a14="http://schemas.microsoft.com/office/drawing/2010/main" val="0"/>
-              </a:ext>
-            </a:extLst>
-          </a:blip>
-          <a:srcRect/>
-          <a:stretch>
-            <a:fillRect/>
-          </a:stretch>
-        </p:blipFill>
-        <p:spPr bwMode="auto">
-          <a:xfrm>
-            <a:off x="6431330" y="1783635"/>
-            <a:ext cx="1762298" cy="4686009"/>
-          </a:xfrm>
-          <a:prstGeom prst="rect">
-            <a:avLst/>
-          </a:prstGeom>
-          <a:noFill/>
-          <a:extLst>
-            <a:ext uri="{909E8E84-426E-40DD-AFC4-6F175D3DCCD1}">
-              <a14:hiddenFill xmlns:a14="http://schemas.microsoft.com/office/drawing/2010/main">
-                <a:solidFill>
-                  <a:srgbClr val="FFFFFF"/>
-                </a:solidFill>
-              </a14:hiddenFill>
-            </a:ext>
-          </a:extLst>
-        </p:spPr>
-      </p:pic>
-    </p:spTree>
-  </p:cSld>
-  <p:clrMapOvr>
-    <a:masterClrMapping/>
-  </p:clrMapOvr>
-</p:sld>
-</file>
-
-<file path=ppt/slides/slide15.xml><?xml version="1.0" encoding="utf-8"?>
-<p:sld xmlns:a="http://schemas.openxmlformats.org/drawingml/2006/main" xmlns:r="http://schemas.openxmlformats.org/officeDocument/2006/relationships" xmlns:p="http://schemas.openxmlformats.org/presentationml/2006/main">
-  <p:cSld>
-    <p:spTree>
-      <p:nvGrpSpPr>
-        <p:cNvPr id="1" name=""/>
-        <p:cNvGrpSpPr/>
-        <p:nvPr/>
-      </p:nvGrpSpPr>
-      <p:grpSpPr>
-        <a:xfrm>
-          <a:off x="0" y="0"/>
-          <a:ext cx="0" cy="0"/>
-          <a:chOff x="0" y="0"/>
-          <a:chExt cx="0" cy="0"/>
-        </a:xfrm>
-      </p:grpSpPr>
-      <p:sp>
-        <p:nvSpPr>
-          <p:cNvPr id="1048625" name="Заголовок 1"/>
-          <p:cNvSpPr>
-            <a:spLocks noGrp="1"/>
-          </p:cNvSpPr>
-          <p:nvPr>
-            <p:ph type="title"/>
-          </p:nvPr>
-        </p:nvSpPr>
-        <p:spPr>
-          <a:xfrm>
-            <a:off x="997527" y="0"/>
-            <a:ext cx="10356272" cy="1296786"/>
-          </a:xfrm>
-        </p:spPr>
-        <p:txBody>
-          <a:bodyPr>
-            <a:normAutofit/>
-          </a:bodyPr>
-          <a:lstStyle/>
-          <a:p>
-            <a:r>
-              <a:rPr lang="ru-RU" sz="4800" dirty="0"/>
-              <a:t>Разработка программного продукта</a:t>
-            </a:r>
-          </a:p>
-        </p:txBody>
-      </p:sp>
-      <p:sp>
-        <p:nvSpPr>
-          <p:cNvPr id="1048626" name="Заголовок 1"/>
-          <p:cNvSpPr txBox="1"/>
-          <p:nvPr/>
-        </p:nvSpPr>
-        <p:spPr>
-          <a:xfrm>
-            <a:off x="997527" y="899743"/>
-            <a:ext cx="10356272" cy="794085"/>
-          </a:xfrm>
-          <a:prstGeom prst="rect">
-            <a:avLst/>
-          </a:prstGeom>
-        </p:spPr>
-        <p:txBody>
-          <a:bodyPr vert="horz" lIns="91440" tIns="45720" rIns="91440" bIns="45720" rtlCol="0" anchor="ctr">
-            <a:normAutofit fontScale="92500"/>
-          </a:bodyPr>
-          <a:lstStyle>
-            <a:lvl1pPr algn="l" defTabSz="914400" rtl="0" eaLnBrk="1" latinLnBrk="0" hangingPunct="1">
-              <a:lnSpc>
-                <a:spcPct val="90000"/>
-              </a:lnSpc>
-              <a:spcBef>
-                <a:spcPct val="0"/>
-              </a:spcBef>
-              <a:buNone/>
-              <a:defRPr sz="4400" kern="1200">
-                <a:solidFill>
-                  <a:schemeClr val="tx1"/>
-                </a:solidFill>
-                <a:latin typeface="+mj-lt"/>
-                <a:ea typeface="+mj-ea"/>
-                <a:cs typeface="+mj-cs"/>
-              </a:defRPr>
-            </a:lvl1pPr>
-          </a:lstStyle>
-          <a:p>
-            <a:r>
-              <a:rPr lang="ru-RU" sz="3600" dirty="0"/>
-              <a:t>Разработка пользовательского интерфейса и сценариев</a:t>
-            </a:r>
-          </a:p>
-        </p:txBody>
-      </p:sp>
-      <p:sp>
-        <p:nvSpPr>
-          <p:cNvPr id="13" name="Заголовок 1"/>
-          <p:cNvSpPr txBox="1"/>
-          <p:nvPr/>
-        </p:nvSpPr>
-        <p:spPr>
-          <a:xfrm>
-            <a:off x="346016" y="4030644"/>
-            <a:ext cx="5548597" cy="794085"/>
-          </a:xfrm>
-          <a:prstGeom prst="rect">
-            <a:avLst/>
-          </a:prstGeom>
-        </p:spPr>
-        <p:txBody>
-          <a:bodyPr vert="horz" lIns="91440" tIns="45720" rIns="91440" bIns="45720" rtlCol="0" anchor="ctr">
-            <a:noAutofit/>
-          </a:bodyPr>
-          <a:lstStyle>
-            <a:lvl1pPr algn="l" defTabSz="914400" rtl="0" eaLnBrk="1" latinLnBrk="0" hangingPunct="1">
-              <a:lnSpc>
-                <a:spcPct val="90000"/>
-              </a:lnSpc>
-              <a:spcBef>
-                <a:spcPct val="0"/>
-              </a:spcBef>
-              <a:buNone/>
-              <a:defRPr sz="4400" kern="1200">
-                <a:solidFill>
-                  <a:schemeClr val="tx1"/>
-                </a:solidFill>
-                <a:latin typeface="+mj-lt"/>
-                <a:ea typeface="+mj-ea"/>
-                <a:cs typeface="+mj-cs"/>
-              </a:defRPr>
-            </a:lvl1pPr>
-          </a:lstStyle>
-          <a:p>
-            <a:r>
-              <a:rPr lang="ru-RU" b="1" dirty="0" smtClean="0"/>
-              <a:t>Раздел «Гадание на Таро»</a:t>
-            </a:r>
-            <a:endParaRPr lang="ru-RU" b="1" dirty="0"/>
-          </a:p>
-        </p:txBody>
-      </p:sp>
-      <p:pic>
-        <p:nvPicPr>
-          <p:cNvPr id="6" name="Picture 3" descr="C:\Users\USER\Downloads\tarot.png"/>
-          <p:cNvPicPr>
-            <a:picLocks noChangeAspect="1" noChangeArrowheads="1"/>
-          </p:cNvPicPr>
-          <p:nvPr/>
-        </p:nvPicPr>
-        <p:blipFill>
-          <a:blip r:embed="rId2">
-            <a:extLst>
-              <a:ext uri="{28A0092B-C50C-407E-A947-70E740481C1C}">
-                <a14:useLocalDpi xmlns:a14="http://schemas.microsoft.com/office/drawing/2010/main" val="0"/>
-              </a:ext>
-            </a:extLst>
-          </a:blip>
-          <a:srcRect/>
-          <a:stretch>
-            <a:fillRect/>
-          </a:stretch>
-        </p:blipFill>
-        <p:spPr bwMode="auto">
-          <a:xfrm>
-            <a:off x="7102528" y="1965366"/>
-            <a:ext cx="2013056" cy="4364182"/>
-          </a:xfrm>
-          <a:prstGeom prst="rect">
-            <a:avLst/>
-          </a:prstGeom>
-          <a:noFill/>
-          <a:extLst>
-            <a:ext uri="{909E8E84-426E-40DD-AFC4-6F175D3DCCD1}">
-              <a14:hiddenFill xmlns:a14="http://schemas.microsoft.com/office/drawing/2010/main">
-                <a:solidFill>
-                  <a:srgbClr val="FFFFFF"/>
-                </a:solidFill>
-              </a14:hiddenFill>
-            </a:ext>
-          </a:extLst>
-        </p:spPr>
-      </p:pic>
-    </p:spTree>
-  </p:cSld>
-  <p:clrMapOvr>
-    <a:masterClrMapping/>
-  </p:clrMapOvr>
-</p:sld>
-</file>
-
-<file path=ppt/slides/slide16.xml><?xml version="1.0" encoding="utf-8"?>
-<p:sld xmlns:a="http://schemas.openxmlformats.org/drawingml/2006/main" xmlns:r="http://schemas.openxmlformats.org/officeDocument/2006/relationships" xmlns:p="http://schemas.openxmlformats.org/presentationml/2006/main">
-  <p:cSld>
-    <p:spTree>
-      <p:nvGrpSpPr>
-        <p:cNvPr id="1" name=""/>
-        <p:cNvGrpSpPr/>
-        <p:nvPr/>
-      </p:nvGrpSpPr>
-      <p:grpSpPr>
-        <a:xfrm>
-          <a:off x="0" y="0"/>
-          <a:ext cx="0" cy="0"/>
-          <a:chOff x="0" y="0"/>
-          <a:chExt cx="0" cy="0"/>
-        </a:xfrm>
-      </p:grpSpPr>
-      <p:sp>
-        <p:nvSpPr>
-          <p:cNvPr id="1048647" name="Заголовок 1"/>
-          <p:cNvSpPr>
-            <a:spLocks noGrp="1"/>
-          </p:cNvSpPr>
-          <p:nvPr>
-            <p:ph type="title"/>
-          </p:nvPr>
-        </p:nvSpPr>
-        <p:spPr>
-          <a:xfrm>
-            <a:off x="997527" y="240631"/>
-            <a:ext cx="10356272" cy="1296786"/>
-          </a:xfrm>
-        </p:spPr>
-        <p:txBody>
-          <a:bodyPr>
-            <a:normAutofit/>
-          </a:bodyPr>
-          <a:lstStyle/>
-          <a:p>
-            <a:r>
-              <a:rPr lang="ru-RU" sz="4800" dirty="0"/>
-              <a:t>Заключение</a:t>
-            </a:r>
-          </a:p>
-        </p:txBody>
-      </p:sp>
-      <p:sp>
-        <p:nvSpPr>
-          <p:cNvPr id="1048648" name="Объект 2"/>
-          <p:cNvSpPr>
-            <a:spLocks noGrp="1"/>
-          </p:cNvSpPr>
-          <p:nvPr>
-            <p:ph idx="1"/>
-          </p:nvPr>
-        </p:nvSpPr>
-        <p:spPr>
-          <a:xfrm>
-            <a:off x="160655" y="1425575"/>
-            <a:ext cx="11877675" cy="5299710"/>
-          </a:xfrm>
-        </p:spPr>
-        <p:txBody>
-          <a:bodyPr anchor="ctr">
-            <a:noAutofit/>
-          </a:bodyPr>
-          <a:lstStyle/>
-          <a:p>
-            <a:pPr marL="0" indent="0">
-              <a:buNone/>
-            </a:pPr>
-            <a:r>
-              <a:rPr lang="ru-RU" dirty="0"/>
-              <a:t>В ходе работы над дипломным проектом </a:t>
-            </a:r>
-            <a:r>
-              <a:rPr lang="ru-RU" dirty="0" smtClean="0"/>
-              <a:t>реализован </a:t>
-            </a:r>
-            <a:r>
-              <a:rPr lang="ru-RU" dirty="0" err="1" smtClean="0"/>
-              <a:t>пользоваельскй</a:t>
-            </a:r>
-            <a:r>
-              <a:rPr lang="ru-RU" dirty="0" smtClean="0"/>
-              <a:t> </a:t>
-            </a:r>
-            <a:r>
-              <a:rPr lang="ru-RU" dirty="0" smtClean="0">
-                <a:sym typeface="+mn-ea"/>
-              </a:rPr>
-              <a:t>и</a:t>
-            </a:r>
-            <a:r>
-              <a:rPr lang="ru-RU" dirty="0" smtClean="0"/>
-              <a:t>нтерфейс мобильного приложения «</a:t>
-            </a:r>
-            <a:r>
-              <a:rPr lang="en-US" dirty="0" err="1" smtClean="0"/>
-              <a:t>Mystik</a:t>
-            </a:r>
-            <a:r>
-              <a:rPr lang="ru-RU" dirty="0" smtClean="0"/>
-              <a:t>».</a:t>
-            </a:r>
-            <a:endParaRPr lang="ru-RU" dirty="0" smtClean="0"/>
-          </a:p>
-          <a:p>
-            <a:r>
-              <a:rPr lang="ru-RU" dirty="0" smtClean="0"/>
-              <a:t>Итог</a:t>
-            </a:r>
-            <a:r>
-              <a:rPr lang="ru-RU" dirty="0"/>
-              <a:t>: </a:t>
-            </a:r>
-            <a:r>
-              <a:rPr lang="ru-RU" dirty="0"/>
-              <a:t>разработан пользовательский интерфейс, ориентированный на комфортное восприятие информации и интуитивно понятное взаимодействие. При проектировании экранов и навигации особое внимание уделялось эргономичности и визуальной доступности</a:t>
-            </a:r>
-            <a:r>
-              <a:rPr lang="ru-RU" altLang="en-US" dirty="0" smtClean="0"/>
-              <a:t>.</a:t>
-            </a:r>
-            <a:endParaRPr lang="en-US" altLang="ru-RU" dirty="0" smtClean="0"/>
-          </a:p>
-          <a:p>
-            <a:r>
-              <a:rPr lang="ru-RU" dirty="0" smtClean="0"/>
-              <a:t>Готовность</a:t>
-            </a:r>
-            <a:r>
-              <a:rPr lang="ru-RU" dirty="0"/>
-              <a:t>: </a:t>
-            </a:r>
-            <a:r>
-              <a:rPr lang="ru-RU" dirty="0"/>
-              <a:t>разработанный продукт объединяет эзотерическую тематику с современными технологиями разработки </a:t>
-            </a:r>
-            <a:r>
-              <a:rPr lang="ru-RU" dirty="0" smtClean="0"/>
-              <a:t>и </a:t>
-            </a:r>
-            <a:r>
-              <a:rPr lang="ru-RU" dirty="0"/>
-              <a:t>готов к </a:t>
-            </a:r>
-            <a:r>
-              <a:rPr lang="ru-RU" dirty="0" smtClean="0"/>
-              <a:t>использованию </a:t>
-            </a:r>
-            <a:r>
-              <a:rPr lang="ru-RU" dirty="0"/>
-              <a:t>среди целевой аудитории</a:t>
-            </a:r>
-            <a:r>
-              <a:rPr lang="ru-RU" dirty="0" smtClean="0"/>
-              <a:t>.</a:t>
-            </a:r>
-            <a:endParaRPr lang="ru-RU" dirty="0"/>
-          </a:p>
-        </p:txBody>
-      </p:sp>
-    </p:spTree>
-  </p:cSld>
-  <p:clrMapOvr>
-    <a:masterClrMapping/>
-  </p:clrMapOvr>
-</p:sld>
-</file>
-
-<file path=ppt/slides/slide17.xml><?xml version="1.0" encoding="utf-8"?>
-<p:sld xmlns:a="http://schemas.openxmlformats.org/drawingml/2006/main" xmlns:r="http://schemas.openxmlformats.org/officeDocument/2006/relationships" xmlns:p="http://schemas.openxmlformats.org/presentationml/2006/main">
-  <p:cSld>
-    <p:spTree>
-      <p:nvGrpSpPr>
-        <p:cNvPr id="1" name=""/>
-        <p:cNvGrpSpPr/>
-        <p:nvPr/>
-      </p:nvGrpSpPr>
-      <p:grpSpPr>
-        <a:xfrm>
-          <a:off x="0" y="0"/>
-          <a:ext cx="0" cy="0"/>
-          <a:chOff x="0" y="0"/>
-          <a:chExt cx="0" cy="0"/>
-        </a:xfrm>
-      </p:grpSpPr>
-      <p:sp>
-        <p:nvSpPr>
-          <p:cNvPr id="1048586" name="Заголовок 1"/>
-          <p:cNvSpPr>
-            <a:spLocks noGrp="1"/>
-          </p:cNvSpPr>
-          <p:nvPr>
-            <p:ph type="ctrTitle"/>
-          </p:nvPr>
-        </p:nvSpPr>
-        <p:spPr>
-          <a:xfrm>
-            <a:off x="1437138" y="1647016"/>
-            <a:ext cx="9940779" cy="2387600"/>
-          </a:xfrm>
-        </p:spPr>
-        <p:txBody>
-          <a:bodyPr anchor="ctr">
-            <a:noAutofit/>
-          </a:bodyPr>
-          <a:lstStyle/>
-          <a:p>
-            <a:r>
-              <a:rPr lang="ru-RU" sz="3600" dirty="0"/>
-              <a:t>Разработка клиентской части </a:t>
-            </a:r>
-            <a:r>
-              <a:rPr lang="ru-RU" sz="3600" dirty="0" smtClean="0"/>
-              <a:t>мобильного приложения «</a:t>
-            </a:r>
-            <a:r>
-              <a:rPr lang="en-US" sz="3600" dirty="0" err="1" smtClean="0"/>
-              <a:t>Mystik</a:t>
-            </a:r>
-            <a:r>
-              <a:rPr lang="ru-RU" sz="3600" dirty="0" smtClean="0"/>
-              <a:t>» </a:t>
-            </a:r>
-            <a:r>
-              <a:rPr lang="ru-RU" sz="3600" dirty="0"/>
-              <a:t>для </a:t>
-            </a:r>
-            <a:r>
-              <a:rPr lang="ru-RU" sz="3600" dirty="0" smtClean="0"/>
-              <a:t>астрологических прогнозов и таро предсказаний</a:t>
-            </a:r>
-            <a:endParaRPr lang="ru-RU" sz="2000" dirty="0"/>
-          </a:p>
-        </p:txBody>
-      </p:sp>
-      <p:sp>
-        <p:nvSpPr>
-          <p:cNvPr id="1048587" name="Подзаголовок 2"/>
-          <p:cNvSpPr>
-            <a:spLocks noGrp="1"/>
-          </p:cNvSpPr>
-          <p:nvPr>
-            <p:ph type="subTitle" idx="1"/>
-          </p:nvPr>
-        </p:nvSpPr>
-        <p:spPr>
-          <a:xfrm>
-            <a:off x="5899150" y="3895324"/>
-            <a:ext cx="6031684" cy="2525086"/>
-          </a:xfrm>
-        </p:spPr>
-        <p:txBody>
-          <a:bodyPr>
-            <a:noAutofit/>
-          </a:bodyPr>
-          <a:lstStyle/>
-          <a:p>
-            <a:pPr algn="r">
-              <a:lnSpc>
-                <a:spcPct val="114000"/>
-              </a:lnSpc>
-              <a:spcAft>
-                <a:spcPts val="0"/>
-              </a:spcAft>
-            </a:pPr>
-            <a:endParaRPr lang="ru-RU" sz="1600" dirty="0">
-              <a:effectLst/>
-              <a:latin typeface="Arial" panose="020B0604020202020204" pitchFamily="34" charset="0"/>
-              <a:ea typeface="Times New Roman" panose="02020603050405020304" pitchFamily="18" charset="0"/>
-              <a:cs typeface="Arial" panose="020B0604020202020204" pitchFamily="34" charset="0"/>
-            </a:endParaRPr>
-          </a:p>
-          <a:p>
-            <a:pPr algn="r">
-              <a:lnSpc>
-                <a:spcPct val="114000"/>
-              </a:lnSpc>
-              <a:spcAft>
-                <a:spcPts val="0"/>
-              </a:spcAft>
-            </a:pPr>
-            <a:r>
-              <a:rPr lang="ru-RU" sz="1600" dirty="0">
-                <a:effectLst/>
-                <a:latin typeface="Arial" panose="020B0604020202020204" pitchFamily="34" charset="0"/>
-                <a:ea typeface="Times New Roman" panose="02020603050405020304" pitchFamily="18" charset="0"/>
-                <a:cs typeface="Arial" panose="020B0604020202020204" pitchFamily="34" charset="0"/>
-              </a:rPr>
-              <a:t>Обучающийся </a:t>
-            </a:r>
-            <a:r>
-              <a:rPr lang="ru-RU" sz="1600" dirty="0" smtClean="0">
-                <a:effectLst/>
-                <a:latin typeface="Arial" panose="020B0604020202020204" pitchFamily="34" charset="0"/>
-                <a:ea typeface="Times New Roman" panose="02020603050405020304" pitchFamily="18" charset="0"/>
-                <a:cs typeface="Arial" panose="020B0604020202020204" pitchFamily="34" charset="0"/>
-              </a:rPr>
-              <a:t>422 ИСВ</a:t>
-            </a:r>
-            <a:r>
-              <a:rPr lang="en-US" sz="1600" dirty="0" smtClean="0">
-                <a:effectLst/>
-                <a:latin typeface="Arial" panose="020B0604020202020204" pitchFamily="34" charset="0"/>
-                <a:ea typeface="Times New Roman" panose="02020603050405020304" pitchFamily="18" charset="0"/>
-                <a:cs typeface="Arial" panose="020B0604020202020204" pitchFamily="34" charset="0"/>
-              </a:rPr>
-              <a:t>/</a:t>
-            </a:r>
-            <a:r>
-              <a:rPr lang="ru-RU" sz="1600" dirty="0" smtClean="0">
-                <a:effectLst/>
-                <a:latin typeface="Arial" panose="020B0604020202020204" pitchFamily="34" charset="0"/>
-                <a:ea typeface="Times New Roman" panose="02020603050405020304" pitchFamily="18" charset="0"/>
-                <a:cs typeface="Arial" panose="020B0604020202020204" pitchFamily="34" charset="0"/>
-              </a:rPr>
-              <a:t>1 </a:t>
-            </a:r>
-            <a:r>
-              <a:rPr lang="ru-RU" sz="1600" dirty="0">
-                <a:effectLst/>
-                <a:latin typeface="Arial" panose="020B0604020202020204" pitchFamily="34" charset="0"/>
-                <a:ea typeface="Times New Roman" panose="02020603050405020304" pitchFamily="18" charset="0"/>
-                <a:cs typeface="Arial" panose="020B0604020202020204" pitchFamily="34" charset="0"/>
-              </a:rPr>
-              <a:t>группы</a:t>
-            </a:r>
-            <a:br>
-              <a:rPr lang="ru-RU" sz="1600" dirty="0">
-                <a:effectLst/>
-                <a:latin typeface="Arial" panose="020B0604020202020204" pitchFamily="34" charset="0"/>
-                <a:ea typeface="Times New Roman" panose="02020603050405020304" pitchFamily="18" charset="0"/>
-                <a:cs typeface="Arial" panose="020B0604020202020204" pitchFamily="34" charset="0"/>
-              </a:rPr>
-            </a:br>
-            <a:r>
-              <a:rPr lang="ru-RU" sz="1600" dirty="0" smtClean="0">
-                <a:effectLst/>
-                <a:latin typeface="Arial" panose="020B0604020202020204" pitchFamily="34" charset="0"/>
-                <a:ea typeface="Times New Roman" panose="02020603050405020304" pitchFamily="18" charset="0"/>
-                <a:cs typeface="Arial" panose="020B0604020202020204" pitchFamily="34" charset="0"/>
-              </a:rPr>
-              <a:t>Сараева Вероника Владимировна, </a:t>
-            </a:r>
-            <a:r>
-              <a:rPr lang="ru-RU" sz="1600" dirty="0">
-                <a:effectLst/>
-                <a:latin typeface="Arial" panose="020B0604020202020204" pitchFamily="34" charset="0"/>
-                <a:ea typeface="Times New Roman" panose="02020603050405020304" pitchFamily="18" charset="0"/>
-                <a:cs typeface="Arial" panose="020B0604020202020204" pitchFamily="34" charset="0"/>
-              </a:rPr>
-              <a:t/>
-            </a:r>
-            <a:br>
-              <a:rPr lang="ru-RU" sz="1600" dirty="0">
-                <a:effectLst/>
-                <a:latin typeface="Arial" panose="020B0604020202020204" pitchFamily="34" charset="0"/>
-                <a:ea typeface="Times New Roman" panose="02020603050405020304" pitchFamily="18" charset="0"/>
-                <a:cs typeface="Arial" panose="020B0604020202020204" pitchFamily="34" charset="0"/>
-              </a:rPr>
-            </a:br>
-            <a:r>
-              <a:rPr lang="ru-RU" sz="1600" dirty="0">
-                <a:effectLst/>
-                <a:latin typeface="Arial" panose="020B0604020202020204" pitchFamily="34" charset="0"/>
-                <a:ea typeface="Times New Roman" panose="02020603050405020304" pitchFamily="18" charset="0"/>
-                <a:cs typeface="Arial" panose="020B0604020202020204" pitchFamily="34" charset="0"/>
-              </a:rPr>
-              <a:t>специальность 09.02.07 Информационные </a:t>
-            </a:r>
-            <a:r>
-              <a:rPr lang="ru-RU" sz="1600" dirty="0" smtClean="0">
-                <a:effectLst/>
-                <a:latin typeface="Arial" panose="020B0604020202020204" pitchFamily="34" charset="0"/>
-                <a:ea typeface="Times New Roman" panose="02020603050405020304" pitchFamily="18" charset="0"/>
-                <a:cs typeface="Arial" panose="020B0604020202020204" pitchFamily="34" charset="0"/>
-              </a:rPr>
-              <a:t>системы </a:t>
-            </a:r>
-            <a:r>
-              <a:rPr lang="ru-RU" sz="1600" dirty="0">
-                <a:effectLst/>
-                <a:latin typeface="Arial" panose="020B0604020202020204" pitchFamily="34" charset="0"/>
-                <a:ea typeface="Times New Roman" panose="02020603050405020304" pitchFamily="18" charset="0"/>
-                <a:cs typeface="Arial" panose="020B0604020202020204" pitchFamily="34" charset="0"/>
-              </a:rPr>
-              <a:t>и </a:t>
-            </a:r>
-            <a:r>
-              <a:rPr lang="ru-RU" sz="1600" dirty="0" smtClean="0">
-                <a:effectLst/>
-                <a:latin typeface="Arial" panose="020B0604020202020204" pitchFamily="34" charset="0"/>
-                <a:ea typeface="Times New Roman" panose="02020603050405020304" pitchFamily="18" charset="0"/>
-                <a:cs typeface="Arial" panose="020B0604020202020204" pitchFamily="34" charset="0"/>
-              </a:rPr>
-              <a:t>программирование</a:t>
-            </a:r>
-          </a:p>
-          <a:p>
-            <a:pPr algn="r">
-              <a:lnSpc>
-                <a:spcPct val="114000"/>
-              </a:lnSpc>
-              <a:spcAft>
-                <a:spcPts val="0"/>
-              </a:spcAft>
-            </a:pPr>
-            <a:r>
-              <a:rPr lang="ru-RU" sz="1600" dirty="0" smtClean="0">
-                <a:effectLst/>
-                <a:latin typeface="Arial" panose="020B0604020202020204" pitchFamily="34" charset="0"/>
-                <a:ea typeface="Times New Roman" panose="02020603050405020304" pitchFamily="18" charset="0"/>
-                <a:cs typeface="Arial" panose="020B0604020202020204" pitchFamily="34" charset="0"/>
-              </a:rPr>
-              <a:t>Руководитель дипломного проекта</a:t>
-            </a:r>
-            <a:br>
-              <a:rPr lang="ru-RU" sz="1600" dirty="0" smtClean="0">
-                <a:effectLst/>
-                <a:latin typeface="Arial" panose="020B0604020202020204" pitchFamily="34" charset="0"/>
-                <a:ea typeface="Times New Roman" panose="02020603050405020304" pitchFamily="18" charset="0"/>
-                <a:cs typeface="Arial" panose="020B0604020202020204" pitchFamily="34" charset="0"/>
-              </a:rPr>
-            </a:br>
-            <a:r>
-              <a:rPr lang="ru-RU" sz="1600" dirty="0" smtClean="0">
-                <a:latin typeface="Arial" panose="020B0604020202020204" pitchFamily="34" charset="0"/>
-                <a:ea typeface="Times New Roman" panose="02020603050405020304" pitchFamily="18" charset="0"/>
-                <a:cs typeface="Arial" panose="020B0604020202020204" pitchFamily="34" charset="0"/>
-              </a:rPr>
-              <a:t>Анна Александровна Север</a:t>
-            </a:r>
-            <a:r>
-              <a:rPr lang="ru-RU" sz="1600" dirty="0" smtClean="0">
-                <a:effectLst/>
-                <a:latin typeface="Arial" panose="020B0604020202020204" pitchFamily="34" charset="0"/>
-                <a:ea typeface="Times New Roman" panose="02020603050405020304" pitchFamily="18" charset="0"/>
-                <a:cs typeface="Arial" panose="020B0604020202020204" pitchFamily="34" charset="0"/>
-              </a:rPr>
-              <a:t>,</a:t>
-            </a:r>
-            <a:br>
-              <a:rPr lang="ru-RU" sz="1600" dirty="0" smtClean="0">
-                <a:effectLst/>
-                <a:latin typeface="Arial" panose="020B0604020202020204" pitchFamily="34" charset="0"/>
-                <a:ea typeface="Times New Roman" panose="02020603050405020304" pitchFamily="18" charset="0"/>
-                <a:cs typeface="Arial" panose="020B0604020202020204" pitchFamily="34" charset="0"/>
-              </a:rPr>
-            </a:br>
-            <a:r>
-              <a:rPr lang="ru-RU" sz="1600" dirty="0" smtClean="0">
-                <a:effectLst/>
-                <a:latin typeface="Arial" panose="020B0604020202020204" pitchFamily="34" charset="0"/>
-                <a:ea typeface="Times New Roman" panose="02020603050405020304" pitchFamily="18" charset="0"/>
-                <a:cs typeface="Arial" panose="020B0604020202020204" pitchFamily="34" charset="0"/>
-              </a:rPr>
-              <a:t>преподаватель, БУ «</a:t>
-            </a:r>
-            <a:r>
-              <a:rPr lang="ru-RU" sz="1600" dirty="0" err="1" smtClean="0">
-                <a:effectLst/>
-                <a:latin typeface="Arial" panose="020B0604020202020204" pitchFamily="34" charset="0"/>
-                <a:ea typeface="Times New Roman" panose="02020603050405020304" pitchFamily="18" charset="0"/>
-                <a:cs typeface="Arial" panose="020B0604020202020204" pitchFamily="34" charset="0"/>
-              </a:rPr>
-              <a:t>Нижневартовский</a:t>
-            </a:r>
-            <a:r>
-              <a:rPr lang="ru-RU" sz="1600" dirty="0" smtClean="0">
-                <a:effectLst/>
-                <a:latin typeface="Arial" panose="020B0604020202020204" pitchFamily="34" charset="0"/>
-                <a:ea typeface="Times New Roman" panose="02020603050405020304" pitchFamily="18" charset="0"/>
-                <a:cs typeface="Arial" panose="020B0604020202020204" pitchFamily="34" charset="0"/>
-              </a:rPr>
-              <a:t> социально-гуманитарный колледж»</a:t>
-            </a:r>
-          </a:p>
-          <a:p>
-            <a:pPr algn="r">
-              <a:lnSpc>
-                <a:spcPct val="114000"/>
-              </a:lnSpc>
-            </a:pPr>
-            <a:endParaRPr lang="ru-RU" sz="1600" dirty="0">
-              <a:latin typeface="Arial" panose="020B0604020202020204" pitchFamily="34" charset="0"/>
-              <a:cs typeface="Arial" panose="020B0604020202020204" pitchFamily="34" charset="0"/>
-            </a:endParaRPr>
-          </a:p>
-        </p:txBody>
-      </p:sp>
-      <p:sp>
-        <p:nvSpPr>
-          <p:cNvPr id="1048588" name="TextBox 3"/>
-          <p:cNvSpPr txBox="1"/>
-          <p:nvPr/>
-        </p:nvSpPr>
-        <p:spPr>
-          <a:xfrm>
-            <a:off x="1524000" y="475690"/>
-            <a:ext cx="9144000" cy="891540"/>
-          </a:xfrm>
-          <a:prstGeom prst="rect">
-            <a:avLst/>
-          </a:prstGeom>
-          <a:noFill/>
-        </p:spPr>
-        <p:txBody>
-          <a:bodyPr wrap="square" rtlCol="0">
-            <a:spAutoFit/>
-          </a:bodyPr>
-          <a:lstStyle/>
-          <a:p>
-            <a:pPr algn="ctr"/>
-            <a:r>
-              <a:rPr lang="ru-RU" b="0" i="0" dirty="0">
-                <a:solidFill>
-                  <a:srgbClr val="303030"/>
-                </a:solidFill>
-                <a:effectLst/>
-                <a:latin typeface="PT Sans"/>
-              </a:rPr>
-              <a:t>Бюджетное учреждение профессионального образования </a:t>
-            </a:r>
-            <a:br>
-              <a:rPr lang="ru-RU" b="0" i="0" dirty="0">
-                <a:solidFill>
-                  <a:srgbClr val="303030"/>
-                </a:solidFill>
-                <a:effectLst/>
-                <a:latin typeface="PT Sans"/>
-              </a:rPr>
-            </a:br>
-            <a:r>
-              <a:rPr lang="ru-RU" b="0" i="0" dirty="0">
-                <a:solidFill>
-                  <a:srgbClr val="303030"/>
-                </a:solidFill>
-                <a:effectLst/>
-                <a:latin typeface="PT Sans"/>
-              </a:rPr>
-              <a:t>Ханты-Мансийского автономного округа - Югры </a:t>
-            </a:r>
-            <a:br>
-              <a:rPr lang="ru-RU" b="0" i="0" dirty="0">
-                <a:solidFill>
-                  <a:srgbClr val="303030"/>
-                </a:solidFill>
-                <a:effectLst/>
-                <a:latin typeface="PT Sans"/>
-              </a:rPr>
-            </a:br>
-            <a:r>
-              <a:rPr lang="ru-RU" b="0" i="0" dirty="0">
-                <a:solidFill>
-                  <a:srgbClr val="303030"/>
-                </a:solidFill>
-                <a:effectLst/>
-                <a:latin typeface="PT Sans"/>
-              </a:rPr>
-              <a:t>«Нижневартовский социально-гуманитарный колледж»</a:t>
-            </a:r>
-            <a:endParaRPr lang="ru-RU" dirty="0"/>
-          </a:p>
-        </p:txBody>
-      </p:sp>
-      <p:pic>
-        <p:nvPicPr>
-          <p:cNvPr id="2097152" name="Picture 2"/>
-          <p:cNvPicPr>
-            <a:picLocks noChangeAspect="1" noChangeArrowheads="1"/>
-          </p:cNvPicPr>
-          <p:nvPr/>
-        </p:nvPicPr>
-        <p:blipFill>
-          <a:blip r:embed="rId2"/>
-          <a:srcRect/>
-          <a:stretch>
-            <a:fillRect/>
-          </a:stretch>
-        </p:blipFill>
-        <p:spPr bwMode="auto">
-          <a:xfrm>
-            <a:off x="8389" y="4866"/>
-            <a:ext cx="1428750" cy="1428750"/>
-          </a:xfrm>
-          <a:prstGeom prst="rect">
-            <a:avLst/>
-          </a:prstGeom>
-          <a:noFill/>
-        </p:spPr>
-      </p:pic>
-    </p:spTree>
-    <p:extLst>
-      <p:ext uri="{BB962C8B-B14F-4D97-AF65-F5344CB8AC3E}">
-        <p14:creationId xmlns:p14="http://schemas.microsoft.com/office/powerpoint/2010/main" val="3729053305"/>
-      </p:ext>
-    </p:extLst>
-  </p:cSld>
-  <p:clrMapOvr>
-    <a:masterClrMapping/>
-  </p:clrMapOvr>
-</p:sld>
-</file>
-
-<file path=ppt/slides/slide2.xml><?xml version="1.0" encoding="utf-8"?>
-<p:sld xmlns:a="http://schemas.openxmlformats.org/drawingml/2006/main" xmlns:r="http://schemas.openxmlformats.org/officeDocument/2006/relationships" xmlns:p="http://schemas.openxmlformats.org/presentationml/2006/main">
-  <p:cSld>
-    <p:spTree>
-      <p:nvGrpSpPr>
-        <p:cNvPr id="1" name=""/>
-        <p:cNvGrpSpPr/>
-        <p:nvPr/>
-      </p:nvGrpSpPr>
-      <p:grpSpPr>
-        <a:xfrm>
-          <a:off x="0" y="0"/>
-          <a:ext cx="0" cy="0"/>
-          <a:chOff x="0" y="0"/>
-          <a:chExt cx="0" cy="0"/>
-        </a:xfrm>
-      </p:grpSpPr>
-      <p:sp>
-        <p:nvSpPr>
-          <p:cNvPr id="1048596" name="Заголовок 1"/>
-          <p:cNvSpPr>
-            <a:spLocks noGrp="1"/>
-          </p:cNvSpPr>
-          <p:nvPr>
-            <p:ph type="title"/>
-          </p:nvPr>
-        </p:nvSpPr>
-        <p:spPr/>
-        <p:txBody>
-          <a:bodyPr>
-            <a:normAutofit/>
-          </a:bodyPr>
-          <a:lstStyle/>
-          <a:p>
-            <a:r>
-              <a:rPr lang="ru-RU" dirty="0" smtClean="0"/>
-              <a:t>Актуальност</a:t>
-            </a:r>
-            <a:r>
-              <a:rPr lang="ru-RU" dirty="0"/>
-              <a:t>ь</a:t>
-            </a:r>
-          </a:p>
-        </p:txBody>
-      </p:sp>
-      <p:sp>
-        <p:nvSpPr>
-          <p:cNvPr id="1048597" name="Объект 2"/>
-          <p:cNvSpPr>
-            <a:spLocks noGrp="1"/>
-          </p:cNvSpPr>
-          <p:nvPr>
-            <p:ph idx="1"/>
-          </p:nvPr>
-        </p:nvSpPr>
-        <p:spPr>
-          <a:xfrm>
-            <a:off x="838200" y="2038690"/>
-            <a:ext cx="10515600" cy="4351338"/>
-          </a:xfrm>
-        </p:spPr>
-        <p:txBody>
-          <a:bodyPr>
-            <a:normAutofit fontScale="92500" lnSpcReduction="20000"/>
-          </a:bodyPr>
-          <a:lstStyle/>
-          <a:p>
-            <a:pPr marL="0" indent="0">
-              <a:buNone/>
-            </a:pPr>
-            <a:r>
-              <a:rPr lang="ru-RU" b="1" dirty="0"/>
-              <a:t>Актуальность:</a:t>
-            </a:r>
-          </a:p>
-          <a:p>
-            <a:pPr marL="0" indent="0">
-              <a:buNone/>
-            </a:pPr>
-            <a:r>
-              <a:rPr lang="en-US" b="1" dirty="0"/>
-              <a:t>	</a:t>
-            </a:r>
-            <a:r>
-              <a:rPr lang="ru-RU" dirty="0" smtClean="0"/>
-              <a:t>Разработка </a:t>
-            </a:r>
-            <a:r>
-              <a:rPr lang="ru-RU" dirty="0"/>
-              <a:t>мобильного приложения для астрологических прогнозов и таро-предсказаний является актуальной, так как позволит предоставить пользователю доступ к персонализированному контенту в любое время и в любом </a:t>
-            </a:r>
-            <a:r>
-              <a:rPr lang="ru-RU" dirty="0" smtClean="0"/>
-              <a:t>месте</a:t>
-            </a:r>
-            <a:r>
-              <a:rPr lang="ru-RU" dirty="0" smtClean="0"/>
-              <a:t>.</a:t>
-            </a:r>
-            <a:endParaRPr lang="en-US" dirty="0" smtClean="0"/>
-          </a:p>
-          <a:p>
-            <a:pPr marL="0" indent="0">
-              <a:buNone/>
-            </a:pPr>
-            <a:endParaRPr lang="en-US" dirty="0"/>
-          </a:p>
-          <a:p>
-            <a:pPr marL="0" indent="0">
-              <a:buNone/>
-            </a:pPr>
-            <a:r>
-              <a:rPr lang="ru-RU" b="1" dirty="0"/>
-              <a:t>Проблема: </a:t>
-            </a:r>
-            <a:endParaRPr lang="en-US" b="1" dirty="0" smtClean="0"/>
-          </a:p>
-          <a:p>
-            <a:pPr marL="0" indent="0">
-              <a:buNone/>
-            </a:pPr>
-            <a:r>
-              <a:rPr lang="en-US" dirty="0"/>
-              <a:t>	</a:t>
-            </a:r>
-            <a:r>
-              <a:rPr lang="ru-RU" dirty="0" smtClean="0"/>
-              <a:t>Отсутствие </a:t>
-            </a:r>
-            <a:r>
-              <a:rPr lang="ru-RU" dirty="0"/>
-              <a:t>удобного и визуально привлекательного мобильного решения, которое объединяет персональные астрологические прогнозы и таро-предсказания, предоставляет структурированный контент и</a:t>
-            </a:r>
-            <a:br>
-              <a:rPr lang="ru-RU" dirty="0"/>
-            </a:br>
-            <a:r>
-              <a:rPr lang="ru-RU" dirty="0"/>
-              <a:t>обеспечивает комфортное, эстетически приятное взаимодействие</a:t>
-            </a:r>
-            <a:br>
-              <a:rPr lang="ru-RU" dirty="0"/>
-            </a:br>
-            <a:r>
-              <a:rPr lang="ru-RU" dirty="0"/>
-              <a:t>пользователя с сервисом.</a:t>
-            </a:r>
-          </a:p>
-          <a:p>
-            <a:pPr marL="0" indent="0">
-              <a:buNone/>
-            </a:pPr>
-            <a:endParaRPr lang="ru-RU" dirty="0"/>
-          </a:p>
-        </p:txBody>
-      </p:sp>
-    </p:spTree>
-  </p:cSld>
-  <p:clrMapOvr>
-    <a:masterClrMapping/>
-  </p:clrMapOvr>
-</p:sld>
-</file>
-
-<file path=ppt/slides/slide3.xml><?xml version="1.0" encoding="utf-8"?>
-<p:sld xmlns:a="http://schemas.openxmlformats.org/drawingml/2006/main" xmlns:r="http://schemas.openxmlformats.org/officeDocument/2006/relationships" xmlns:p="http://schemas.openxmlformats.org/presentationml/2006/main">
-  <p:cSld>
-    <p:spTree>
-      <p:nvGrpSpPr>
-        <p:cNvPr id="1" name=""/>
-        <p:cNvGrpSpPr/>
-        <p:nvPr/>
-      </p:nvGrpSpPr>
-      <p:grpSpPr>
-        <a:xfrm>
-          <a:off x="0" y="0"/>
-          <a:ext cx="0" cy="0"/>
-          <a:chOff x="0" y="0"/>
-          <a:chExt cx="0" cy="0"/>
-        </a:xfrm>
-      </p:grpSpPr>
-      <p:sp>
-        <p:nvSpPr>
-          <p:cNvPr id="1048598" name="Заголовок 1"/>
-          <p:cNvSpPr>
-            <a:spLocks noGrp="1"/>
-          </p:cNvSpPr>
-          <p:nvPr>
-            <p:ph type="title"/>
-          </p:nvPr>
-        </p:nvSpPr>
-        <p:spPr/>
-        <p:txBody>
-          <a:bodyPr/>
-          <a:lstStyle/>
-          <a:p>
-            <a:r>
-              <a:rPr lang="ru-RU" dirty="0"/>
-              <a:t>Цель и Задачи проекта</a:t>
-            </a:r>
-          </a:p>
-        </p:txBody>
-      </p:sp>
-      <p:sp>
-        <p:nvSpPr>
-          <p:cNvPr id="1048599" name="Объект 2"/>
-          <p:cNvSpPr>
-            <a:spLocks noGrp="1"/>
-          </p:cNvSpPr>
-          <p:nvPr>
-            <p:ph idx="1"/>
-          </p:nvPr>
-        </p:nvSpPr>
-        <p:spPr>
-          <a:xfrm>
-            <a:off x="838200" y="2056815"/>
-            <a:ext cx="10515600" cy="4719541"/>
-          </a:xfrm>
-        </p:spPr>
-        <p:txBody>
-          <a:bodyPr>
-            <a:normAutofit fontScale="36429" lnSpcReduction="20000"/>
-          </a:bodyPr>
-          <a:lstStyle/>
-          <a:p>
-            <a:pPr marL="0" indent="0">
-              <a:buNone/>
-            </a:pPr>
-            <a:r>
-              <a:rPr lang="ru-RU" sz="5500" b="1" dirty="0"/>
-              <a:t>Цель</a:t>
-            </a:r>
-            <a:r>
-              <a:rPr lang="ru-RU" sz="5500" dirty="0"/>
-              <a:t>: Разработать </a:t>
-            </a:r>
-            <a:r>
-              <a:rPr lang="ru-RU" sz="5500" dirty="0" smtClean="0"/>
-              <a:t>мобильное приложение «</a:t>
-            </a:r>
-            <a:r>
-              <a:rPr lang="en-US" sz="5500" dirty="0" err="1" smtClean="0"/>
-              <a:t>Mystik</a:t>
-            </a:r>
-            <a:r>
-              <a:rPr lang="ru-RU" sz="5500" dirty="0" smtClean="0"/>
-              <a:t>» </a:t>
-            </a:r>
-            <a:endParaRPr lang="ru-RU" sz="5500" dirty="0"/>
-          </a:p>
-          <a:p>
-            <a:pPr marL="0" indent="0">
-              <a:buNone/>
-            </a:pPr>
-            <a:r>
-              <a:rPr lang="ru-RU" sz="5500" b="1" dirty="0" smtClean="0"/>
-              <a:t>Задачи</a:t>
-            </a:r>
-            <a:r>
-              <a:rPr lang="ru-RU" sz="5500" dirty="0" smtClean="0"/>
-              <a:t>:</a:t>
-            </a:r>
-          </a:p>
-          <a:p>
-            <a:pPr marL="0" indent="457200">
-              <a:buNone/>
-            </a:pPr>
-            <a:r>
-              <a:rPr lang="ru-RU" sz="5500" dirty="0" smtClean="0"/>
-              <a:t>•</a:t>
-            </a:r>
-            <a:r>
-              <a:rPr lang="ru-RU" sz="5500" dirty="0"/>
-              <a:t>	Анализ предметной области.</a:t>
-            </a:r>
-          </a:p>
-          <a:p>
-            <a:pPr marL="0" indent="457200">
-              <a:lnSpc>
-                <a:spcPct val="120000"/>
-              </a:lnSpc>
-              <a:buNone/>
-            </a:pPr>
-            <a:r>
-              <a:rPr lang="ru-RU" sz="5500" dirty="0"/>
-              <a:t>•	</a:t>
-            </a:r>
-            <a:r>
-              <a:rPr lang="ru-RU" sz="5500" dirty="0"/>
-              <a:t>Проанализировать требования к клиентской части </a:t>
-            </a:r>
-            <a:r>
-              <a:rPr lang="ru-RU" sz="5500" dirty="0" smtClean="0"/>
-              <a:t>и</a:t>
-            </a:r>
-            <a:r>
-              <a:rPr lang="en-US" sz="5500" dirty="0" smtClean="0"/>
-              <a:t> </a:t>
-            </a:r>
-            <a:r>
-              <a:rPr lang="ru-RU" sz="5500" dirty="0" smtClean="0"/>
-              <a:t>определить</a:t>
-            </a:r>
-            <a:r>
-              <a:rPr lang="en-US" sz="5500" dirty="0" smtClean="0"/>
-              <a:t> </a:t>
-            </a:r>
-            <a:r>
-              <a:rPr lang="ru-RU" sz="5500" dirty="0" smtClean="0"/>
-              <a:t>функциональные </a:t>
-            </a:r>
-            <a:r>
-              <a:rPr lang="ru-RU" sz="5500" dirty="0"/>
-              <a:t>и </a:t>
-            </a:r>
-            <a:r>
-              <a:rPr lang="en-US" sz="5500" dirty="0" smtClean="0"/>
-              <a:t>	</a:t>
-            </a:r>
-            <a:r>
-              <a:rPr lang="ru-RU" sz="5500" dirty="0" smtClean="0"/>
-              <a:t>нефункциональные </a:t>
-            </a:r>
-            <a:r>
-              <a:rPr lang="ru-RU" sz="5500" dirty="0"/>
-              <a:t>требования </a:t>
-            </a:r>
-            <a:r>
-              <a:rPr lang="ru-RU" sz="5500" dirty="0" smtClean="0"/>
-              <a:t>к </a:t>
-            </a:r>
-            <a:r>
-              <a:rPr lang="ru-RU" sz="5500" dirty="0" err="1" smtClean="0"/>
-              <a:t>фронтенду</a:t>
-            </a:r>
-            <a:r>
-              <a:rPr lang="en-US" sz="5500" dirty="0" smtClean="0"/>
-              <a:t>.</a:t>
-            </a:r>
-            <a:endParaRPr lang="ru-RU" sz="5500" dirty="0" smtClean="0"/>
-          </a:p>
-          <a:p>
-            <a:pPr marL="0" indent="457200">
-              <a:buNone/>
-            </a:pPr>
-            <a:r>
-              <a:rPr lang="ru-RU" sz="5500" dirty="0" smtClean="0"/>
-              <a:t>•	Выбор инструментальных средств.</a:t>
-            </a:r>
-          </a:p>
-          <a:p>
-            <a:pPr marL="0" indent="457200">
-              <a:buNone/>
-            </a:pPr>
-            <a:r>
-              <a:rPr lang="ru-RU" sz="5500" dirty="0" smtClean="0"/>
-              <a:t>•</a:t>
-            </a:r>
-            <a:r>
-              <a:rPr lang="ru-RU" sz="5500" dirty="0"/>
-              <a:t>	</a:t>
-            </a:r>
-            <a:r>
-              <a:rPr lang="ru-RU" sz="5500" dirty="0"/>
-              <a:t>Спроектировать структуру приложения и навигацию</a:t>
-            </a:r>
-            <a:r>
-              <a:rPr lang="ru-RU" sz="5500" dirty="0" smtClean="0"/>
-              <a:t>.</a:t>
-            </a:r>
-            <a:endParaRPr lang="ru-RU" sz="5500" dirty="0"/>
-          </a:p>
-          <a:p>
-            <a:pPr marL="0" indent="457200">
-              <a:buNone/>
-            </a:pPr>
-            <a:r>
-              <a:rPr lang="ru-RU" sz="5500" dirty="0"/>
-              <a:t>•	Разработка пользовательского интерфейса.</a:t>
-            </a:r>
-          </a:p>
-          <a:p>
-            <a:pPr marL="0" indent="457200">
-              <a:buNone/>
-            </a:pPr>
-            <a:r>
-              <a:rPr lang="ru-RU" sz="5500" dirty="0"/>
-              <a:t>•	</a:t>
-            </a:r>
-            <a:r>
-              <a:rPr lang="ru-RU" sz="5500" dirty="0"/>
-              <a:t>Реализовать клиентскую логику</a:t>
-            </a:r>
-            <a:r>
-              <a:rPr lang="ru-RU" sz="5500" dirty="0" smtClean="0"/>
-              <a:t>.</a:t>
-            </a:r>
-            <a:endParaRPr lang="en-US" sz="5500" dirty="0" smtClean="0"/>
-          </a:p>
-          <a:p>
-            <a:pPr marL="0" indent="457200">
-              <a:buNone/>
-            </a:pPr>
-            <a:r>
-              <a:rPr lang="ru-RU" sz="5500" dirty="0"/>
-              <a:t>•	</a:t>
-            </a:r>
-            <a:r>
-              <a:rPr lang="ru-RU" sz="5500" dirty="0"/>
-              <a:t>Обеспечить взаимодействие с серверной частью</a:t>
-            </a:r>
-            <a:r>
-              <a:rPr lang="ru-RU" sz="5500" dirty="0" smtClean="0"/>
-              <a:t>.</a:t>
-            </a:r>
-            <a:endParaRPr lang="en-US" sz="5500" dirty="0" smtClean="0"/>
-          </a:p>
-          <a:p>
-            <a:pPr marL="0" indent="457200">
-              <a:buNone/>
-            </a:pPr>
-            <a:r>
-              <a:rPr lang="ru-RU" sz="5500" dirty="0"/>
-              <a:t>•	</a:t>
-            </a:r>
-            <a:r>
-              <a:rPr lang="ru-RU" sz="5500" dirty="0"/>
-              <a:t>Реализовать локальное хранение данных</a:t>
-            </a:r>
-            <a:r>
-              <a:rPr lang="ru-RU" sz="5500" dirty="0" smtClean="0"/>
-              <a:t>.</a:t>
-            </a:r>
-            <a:endParaRPr lang="en-US" sz="5500" dirty="0" smtClean="0"/>
-          </a:p>
-          <a:p>
-            <a:pPr marL="0" indent="457200">
-              <a:buNone/>
-            </a:pPr>
-            <a:r>
-              <a:rPr lang="ru-RU" sz="5500" dirty="0"/>
-              <a:t>•	</a:t>
-            </a:r>
-            <a:r>
-              <a:rPr lang="ru-RU" sz="5500" dirty="0"/>
-              <a:t>Обеспечить визуализацию данных и состояний</a:t>
-            </a:r>
-            <a:r>
-              <a:rPr lang="ru-RU" sz="5500" dirty="0" smtClean="0"/>
-              <a:t>.</a:t>
-            </a:r>
-            <a:endParaRPr lang="en-US" sz="5500" dirty="0"/>
-          </a:p>
-          <a:p>
-            <a:pPr marL="0" indent="457200">
-              <a:buNone/>
-            </a:pPr>
-            <a:r>
-              <a:rPr lang="ru-RU" sz="5500" dirty="0"/>
-              <a:t>•	</a:t>
-            </a:r>
-            <a:r>
-              <a:rPr lang="ru-RU" sz="5500" dirty="0"/>
-              <a:t>Провести тестирование разработанного интерфейса и устранить выявленные ошибки</a:t>
-            </a:r>
-            <a:r>
-              <a:rPr lang="ru-RU" sz="5500" dirty="0" smtClean="0"/>
-              <a:t>.</a:t>
-            </a:r>
-            <a:endParaRPr lang="en-US" sz="5500" dirty="0"/>
-          </a:p>
-          <a:p>
-            <a:pPr marL="0" indent="457200">
-              <a:buNone/>
-            </a:pPr>
-            <a:endParaRPr lang="en-US" dirty="0" smtClean="0"/>
-          </a:p>
-          <a:p>
-            <a:pPr marL="0" indent="457200">
-              <a:buNone/>
-            </a:pPr>
-            <a:endParaRPr lang="en-US" dirty="0"/>
-          </a:p>
-          <a:p>
-            <a:pPr marL="0" indent="457200">
-              <a:buNone/>
-            </a:pPr>
-            <a:endParaRPr lang="en-US" dirty="0" smtClean="0"/>
-          </a:p>
-          <a:p>
-            <a:pPr marL="0" indent="457200">
-              <a:buNone/>
-            </a:pPr>
-            <a:endParaRPr lang="ru-RU" dirty="0"/>
-          </a:p>
-          <a:p>
-            <a:pPr marL="0" indent="0">
-              <a:buNone/>
-            </a:pPr>
-            <a:endParaRPr lang="ru-RU" dirty="0"/>
-          </a:p>
-        </p:txBody>
-      </p:sp>
-    </p:spTree>
-  </p:cSld>
-  <p:clrMapOvr>
-    <a:masterClrMapping/>
-  </p:clrMapOvr>
-</p:sld>
-</file>
-
-<file path=ppt/slides/slide4.xml><?xml version="1.0" encoding="utf-8"?>
-<p:sld xmlns:a="http://schemas.openxmlformats.org/drawingml/2006/main" xmlns:r="http://schemas.openxmlformats.org/officeDocument/2006/relationships" xmlns:p="http://schemas.openxmlformats.org/presentationml/2006/main">
-  <p:cSld>
-    <p:spTree>
-      <p:nvGrpSpPr>
-        <p:cNvPr id="1" name=""/>
-        <p:cNvGrpSpPr/>
-        <p:nvPr/>
-      </p:nvGrpSpPr>
-      <p:grpSpPr>
-        <a:xfrm>
-          <a:off x="0" y="0"/>
-          <a:ext cx="0" cy="0"/>
-          <a:chOff x="0" y="0"/>
-          <a:chExt cx="0" cy="0"/>
-        </a:xfrm>
-      </p:grpSpPr>
-      <p:sp>
-        <p:nvSpPr>
-          <p:cNvPr id="1048600" name="Заголовок 1"/>
-          <p:cNvSpPr>
-            <a:spLocks noGrp="1"/>
-          </p:cNvSpPr>
-          <p:nvPr>
-            <p:ph type="title"/>
-          </p:nvPr>
-        </p:nvSpPr>
-        <p:spPr/>
-        <p:txBody>
-          <a:bodyPr>
-            <a:normAutofit/>
-          </a:bodyPr>
-          <a:lstStyle/>
-          <a:p>
-            <a:r>
-              <a:rPr lang="ru-RU" dirty="0" smtClean="0"/>
-              <a:t>Объект</a:t>
-            </a:r>
-            <a:r>
-              <a:rPr lang="ru-RU" dirty="0"/>
-              <a:t> </a:t>
-            </a:r>
-            <a:r>
-              <a:rPr lang="ru-RU" dirty="0" smtClean="0"/>
-              <a:t>и</a:t>
-            </a:r>
-            <a:r>
-              <a:rPr lang="ru-RU" dirty="0" smtClean="0"/>
-              <a:t> Предмет исследования</a:t>
-            </a:r>
-            <a:endParaRPr lang="ru-RU" dirty="0"/>
-          </a:p>
-        </p:txBody>
-      </p:sp>
-      <p:sp>
-        <p:nvSpPr>
-          <p:cNvPr id="1048601" name="Объект 2"/>
-          <p:cNvSpPr>
-            <a:spLocks noGrp="1"/>
-          </p:cNvSpPr>
-          <p:nvPr>
-            <p:ph idx="1"/>
-          </p:nvPr>
-        </p:nvSpPr>
-        <p:spPr>
-          <a:xfrm>
-            <a:off x="352426" y="1906292"/>
-            <a:ext cx="11106149" cy="4497791"/>
-          </a:xfrm>
-        </p:spPr>
-        <p:txBody>
-          <a:bodyPr anchor="ctr">
-            <a:normAutofit/>
-          </a:bodyPr>
-          <a:lstStyle/>
-          <a:p>
-            <a:pPr marL="0" indent="0">
-              <a:buNone/>
-            </a:pPr>
-            <a:r>
-              <a:rPr lang="ru-RU" b="1" i="1" dirty="0"/>
-              <a:t>Объект исследования</a:t>
-            </a:r>
-            <a:r>
-              <a:rPr lang="ru-RU" b="1" dirty="0"/>
-              <a:t>: </a:t>
-            </a:r>
-            <a:endParaRPr lang="ru-RU" b="1" dirty="0" smtClean="0"/>
-          </a:p>
-          <a:p>
-            <a:pPr marL="0" indent="0">
-              <a:buNone/>
-            </a:pPr>
-            <a:r>
-              <a:rPr lang="ru-RU" dirty="0"/>
-              <a:t>	М</a:t>
-            </a:r>
-            <a:r>
-              <a:rPr lang="ru-RU" dirty="0" smtClean="0"/>
-              <a:t>обильное </a:t>
-            </a:r>
-            <a:r>
-              <a:rPr lang="ru-RU" dirty="0"/>
-              <a:t>приложение для эзотерических прогнозов (астрология и таро</a:t>
-            </a:r>
-            <a:r>
-              <a:rPr lang="ru-RU" dirty="0" smtClean="0"/>
-              <a:t>).</a:t>
-            </a:r>
-          </a:p>
-          <a:p>
-            <a:pPr marL="0" indent="0">
-              <a:buNone/>
-            </a:pPr>
-            <a:endParaRPr lang="ru-RU" dirty="0"/>
-          </a:p>
-          <a:p>
-            <a:pPr marL="0" indent="0">
-              <a:buNone/>
-            </a:pPr>
-            <a:r>
-              <a:rPr lang="ru-RU" b="1" i="1" dirty="0"/>
-              <a:t>Предмет исследования</a:t>
-            </a:r>
-            <a:r>
-              <a:rPr lang="ru-RU" b="1" dirty="0"/>
-              <a:t>: </a:t>
-            </a:r>
-            <a:endParaRPr lang="ru-RU" b="1" dirty="0" smtClean="0"/>
-          </a:p>
-          <a:p>
-            <a:pPr marL="0" indent="0">
-              <a:buNone/>
-            </a:pPr>
-            <a:r>
-              <a:rPr lang="ru-RU" dirty="0"/>
-              <a:t>	М</a:t>
-            </a:r>
-            <a:r>
-              <a:rPr lang="ru-RU" dirty="0" smtClean="0"/>
-              <a:t>етоды </a:t>
-            </a:r>
-            <a:r>
-              <a:rPr lang="ru-RU" dirty="0"/>
-              <a:t>и инструменты создания пользовательского интерфейса и клиентской логики, обеспечивающей формирование и отображение</a:t>
-            </a:r>
-            <a:r>
-              <a:rPr lang="ru-RU" dirty="0"/>
-              <a:t> астрологических прогнозов и таро-предсказаний.</a:t>
-            </a:r>
-            <a:endParaRPr lang="ru-RU" dirty="0" smtClean="0"/>
-          </a:p>
-        </p:txBody>
-      </p:sp>
-    </p:spTree>
-  </p:cSld>
-  <p:clrMapOvr>
-    <a:masterClrMapping/>
-  </p:clrMapOvr>
-</p:sld>
-</file>
-
-<file path=ppt/slides/slide5.xml><?xml version="1.0" encoding="utf-8"?>
-<p:sld xmlns:a="http://schemas.openxmlformats.org/drawingml/2006/main" xmlns:r="http://schemas.openxmlformats.org/officeDocument/2006/relationships" xmlns:p="http://schemas.openxmlformats.org/presentationml/2006/main">
-  <p:cSld>
-    <p:spTree>
-      <p:nvGrpSpPr>
-        <p:cNvPr id="1" name=""/>
-        <p:cNvGrpSpPr/>
-        <p:nvPr/>
-      </p:nvGrpSpPr>
-      <p:grpSpPr>
-        <a:xfrm>
-          <a:off x="0" y="0"/>
-          <a:ext cx="0" cy="0"/>
-          <a:chOff x="0" y="0"/>
-          <a:chExt cx="0" cy="0"/>
-        </a:xfrm>
-      </p:grpSpPr>
-      <p:sp>
-        <p:nvSpPr>
-          <p:cNvPr id="1048606" name="Заголовок 1"/>
-          <p:cNvSpPr>
-            <a:spLocks noGrp="1"/>
-          </p:cNvSpPr>
-          <p:nvPr>
-            <p:ph type="title"/>
-          </p:nvPr>
-        </p:nvSpPr>
-        <p:spPr>
-          <a:xfrm>
-            <a:off x="997527" y="236764"/>
-            <a:ext cx="10356272" cy="1412422"/>
-          </a:xfrm>
-        </p:spPr>
-        <p:txBody>
-          <a:bodyPr>
-            <a:normAutofit/>
-          </a:bodyPr>
-          <a:lstStyle/>
-          <a:p>
-            <a:r>
-              <a:rPr lang="ru-RU" sz="4800" dirty="0"/>
-              <a:t>Анализ предметной области</a:t>
-            </a:r>
-          </a:p>
-        </p:txBody>
-      </p:sp>
-      <p:sp>
-        <p:nvSpPr>
-          <p:cNvPr id="1048607" name="Объект 2"/>
-          <p:cNvSpPr>
-            <a:spLocks noGrp="1"/>
-          </p:cNvSpPr>
-          <p:nvPr>
-            <p:ph idx="1"/>
-          </p:nvPr>
-        </p:nvSpPr>
-        <p:spPr>
-          <a:xfrm>
-            <a:off x="299083" y="1796142"/>
-            <a:ext cx="11498310" cy="4898572"/>
-          </a:xfrm>
-        </p:spPr>
-        <p:txBody>
-          <a:bodyPr anchor="ctr">
-            <a:normAutofit fontScale="62500" lnSpcReduction="20000"/>
-          </a:bodyPr>
-          <a:lstStyle/>
-          <a:p>
-            <a:pPr marL="0" indent="0">
-              <a:lnSpc>
-                <a:spcPct val="100000"/>
-              </a:lnSpc>
-              <a:spcBef>
-                <a:spcPts val="500"/>
-              </a:spcBef>
-              <a:spcAft>
-                <a:spcPts val="500"/>
-              </a:spcAft>
-              <a:buNone/>
-            </a:pPr>
-            <a:r>
-              <a:rPr lang="ru-RU" sz="3200" i="1" dirty="0">
-                <a:latin typeface=""/>
-                <a:cs typeface="Times New Roman" panose="02020603050405020304" pitchFamily="18" charset="0"/>
-              </a:rPr>
-              <a:t>Предметной областью проекта являются сервисы самопознания и развлекательной мистики, реализованные в формате мобильного приложения. Ключевые сущности и процессы включают: </a:t>
-            </a:r>
-          </a:p>
-          <a:p>
-            <a:pPr marL="342900" indent="-342900">
-              <a:lnSpc>
-                <a:spcPct val="100000"/>
-              </a:lnSpc>
-              <a:spcBef>
-                <a:spcPts val="500"/>
-              </a:spcBef>
-              <a:spcAft>
-                <a:spcPts val="800"/>
-              </a:spcAft>
-              <a:buAutoNum type="arabicPeriod"/>
-            </a:pPr>
-            <a:r>
-              <a:rPr lang="ru-RU" b="1" dirty="0">
-                <a:latin typeface=""/>
-                <a:cs typeface="Times New Roman" panose="02020603050405020304" pitchFamily="18" charset="0"/>
-              </a:rPr>
-              <a:t>Гадание на картах Таро: </a:t>
-            </a:r>
-            <a:r>
-              <a:rPr lang="ru-RU" dirty="0">
-                <a:latin typeface=""/>
-                <a:cs typeface="Times New Roman" panose="02020603050405020304" pitchFamily="18" charset="0"/>
-              </a:rPr>
-              <a:t>Процесс генерации случайной выборки карт из колоды для заданного расклада (например, «Карта дня», «Три карты») с последующим отображением описания и интерпретации. Доступ к части раскладов ограничен премиум-подпиской. </a:t>
-            </a:r>
-          </a:p>
-          <a:p>
-            <a:pPr marL="342900" indent="-342900">
-              <a:lnSpc>
-                <a:spcPct val="100000"/>
-              </a:lnSpc>
-              <a:spcBef>
-                <a:spcPts val="500"/>
-              </a:spcBef>
-              <a:spcAft>
-                <a:spcPts val="800"/>
-              </a:spcAft>
-              <a:buAutoNum type="arabicPeriod"/>
-            </a:pPr>
-            <a:r>
-              <a:rPr lang="ru-RU" b="1" dirty="0">
-                <a:latin typeface=""/>
-                <a:cs typeface="Times New Roman" panose="02020603050405020304" pitchFamily="18" charset="0"/>
-              </a:rPr>
-              <a:t>Персональный гороскоп: </a:t>
-            </a:r>
-            <a:r>
-              <a:rPr lang="ru-RU" dirty="0">
-                <a:latin typeface=""/>
-                <a:cs typeface="Times New Roman" panose="02020603050405020304" pitchFamily="18" charset="0"/>
-              </a:rPr>
-              <a:t>Формирование текстового прогноза на основе знака зодиака, определяемого по дате рождения пользователя. </a:t>
-            </a:r>
-          </a:p>
-          <a:p>
-            <a:pPr marL="342900" indent="-342900">
-              <a:lnSpc>
-                <a:spcPct val="100000"/>
-              </a:lnSpc>
-              <a:spcBef>
-                <a:spcPts val="500"/>
-              </a:spcBef>
-              <a:spcAft>
-                <a:spcPts val="800"/>
-              </a:spcAft>
-              <a:buAutoNum type="arabicPeriod"/>
-            </a:pPr>
-            <a:r>
-              <a:rPr lang="ru-RU" b="1" dirty="0">
-                <a:latin typeface=""/>
-                <a:cs typeface="Times New Roman" panose="02020603050405020304" pitchFamily="18" charset="0"/>
-              </a:rPr>
-              <a:t>Нумерологический расчет (Матрица судьбы): </a:t>
-            </a:r>
-            <a:r>
-              <a:rPr lang="ru-RU" dirty="0">
-                <a:latin typeface=""/>
-                <a:cs typeface="Times New Roman" panose="02020603050405020304" pitchFamily="18" charset="0"/>
-              </a:rPr>
-              <a:t>Построение и визуализация нумерологической схемы на основе даты рождения пользователя с выводом расшифровки значений. </a:t>
-            </a:r>
-          </a:p>
-          <a:p>
-            <a:pPr marL="342900" indent="-342900">
-              <a:lnSpc>
-                <a:spcPct val="100000"/>
-              </a:lnSpc>
-              <a:spcBef>
-                <a:spcPts val="500"/>
-              </a:spcBef>
-              <a:spcAft>
-                <a:spcPts val="800"/>
-              </a:spcAft>
-              <a:buAutoNum type="arabicPeriod"/>
-            </a:pPr>
-            <a:r>
-              <a:rPr lang="ru-RU" b="1" dirty="0">
-                <a:latin typeface=""/>
-                <a:cs typeface="Times New Roman" panose="02020603050405020304" pitchFamily="18" charset="0"/>
-              </a:rPr>
-              <a:t>Психологические тесты: </a:t>
-            </a:r>
-            <a:r>
-              <a:rPr lang="ru-RU" dirty="0">
-                <a:latin typeface=""/>
-                <a:cs typeface="Times New Roman" panose="02020603050405020304" pitchFamily="18" charset="0"/>
-              </a:rPr>
-              <a:t>Интерактивные опросники (включая методики, аналогичные тесту </a:t>
-            </a:r>
-            <a:r>
-              <a:rPr lang="ru-RU" dirty="0" err="1">
-                <a:latin typeface=""/>
-                <a:cs typeface="Times New Roman" panose="02020603050405020304" pitchFamily="18" charset="0"/>
-              </a:rPr>
-              <a:t>Клифтона</a:t>
-            </a:r>
-            <a:r>
-              <a:rPr lang="ru-RU" dirty="0">
-                <a:latin typeface=""/>
-                <a:cs typeface="Times New Roman" panose="02020603050405020304" pitchFamily="18" charset="0"/>
-              </a:rPr>
-              <a:t>), где на основе ответов пользователя вычисляется результат и отображается интерпретация. Часть тестов является премиум-контентом. </a:t>
-            </a:r>
-          </a:p>
-          <a:p>
-            <a:pPr marL="342900" indent="-342900">
-              <a:lnSpc>
-                <a:spcPct val="100000"/>
-              </a:lnSpc>
-              <a:spcBef>
-                <a:spcPts val="500"/>
-              </a:spcBef>
-              <a:spcAft>
-                <a:spcPts val="800"/>
-              </a:spcAft>
-              <a:buAutoNum type="arabicPeriod"/>
-            </a:pPr>
-            <a:r>
-              <a:rPr lang="ru-RU" b="1" dirty="0">
-                <a:latin typeface=""/>
-                <a:cs typeface="Times New Roman" panose="02020603050405020304" pitchFamily="18" charset="0"/>
-              </a:rPr>
-              <a:t>Управление пользователями и монетизация: </a:t>
-            </a:r>
-            <a:r>
-              <a:rPr lang="ru-RU" dirty="0">
-                <a:latin typeface=""/>
-                <a:cs typeface="Times New Roman" panose="02020603050405020304" pitchFamily="18" charset="0"/>
-              </a:rPr>
-              <a:t>Поддержка гостевого режима и авторизованных пользователей (по e-</a:t>
-            </a:r>
-            <a:r>
-              <a:rPr lang="ru-RU" dirty="0" err="1">
-                <a:latin typeface=""/>
-                <a:cs typeface="Times New Roman" panose="02020603050405020304" pitchFamily="18" charset="0"/>
-              </a:rPr>
-              <a:t>mail</a:t>
-            </a:r>
-            <a:r>
-              <a:rPr lang="ru-RU" dirty="0">
-                <a:latin typeface=""/>
-                <a:cs typeface="Times New Roman" panose="02020603050405020304" pitchFamily="18" charset="0"/>
-              </a:rPr>
-              <a:t> и паролю) с хранением данных локально на устройстве (</a:t>
-            </a:r>
-            <a:r>
-              <a:rPr lang="ru-RU" dirty="0" err="1">
-                <a:latin typeface=""/>
-                <a:cs typeface="Times New Roman" panose="02020603050405020304" pitchFamily="18" charset="0"/>
-              </a:rPr>
-              <a:t>SQLite</a:t>
-            </a:r>
-            <a:r>
-              <a:rPr lang="ru-RU" dirty="0">
-                <a:latin typeface=""/>
-                <a:cs typeface="Times New Roman" panose="02020603050405020304" pitchFamily="18" charset="0"/>
-              </a:rPr>
-              <a:t>). Монетизация реализована через премиум-подписку, открывающую расширенный функционал. Попытка оформить подписку без авторизации инициирует переход на экран входа.</a:t>
-            </a:r>
-            <a:endParaRPr lang="ru-RU" sz="2200" dirty="0" smtClean="0"/>
-          </a:p>
-        </p:txBody>
-      </p:sp>
-    </p:spTree>
-  </p:cSld>
-  <p:clrMapOvr>
-    <a:masterClrMapping/>
-  </p:clrMapOvr>
-</p:sld>
-</file>
-
-<file path=ppt/slides/slide6.xml><?xml version="1.0" encoding="utf-8"?>
-<p:sld xmlns:a="http://schemas.openxmlformats.org/drawingml/2006/main" xmlns:r="http://schemas.openxmlformats.org/officeDocument/2006/relationships" xmlns:p="http://schemas.openxmlformats.org/presentationml/2006/main">
-  <p:cSld>
-    <p:spTree>
-      <p:nvGrpSpPr>
-        <p:cNvPr id="1" name=""/>
-        <p:cNvGrpSpPr/>
-        <p:nvPr/>
-      </p:nvGrpSpPr>
-      <p:grpSpPr>
-        <a:xfrm>
-          <a:off x="0" y="0"/>
-          <a:ext cx="0" cy="0"/>
-          <a:chOff x="0" y="0"/>
-          <a:chExt cx="0" cy="0"/>
-        </a:xfrm>
-      </p:grpSpPr>
-      <p:sp>
-        <p:nvSpPr>
-          <p:cNvPr id="1048611" name="Заголовок 1"/>
-          <p:cNvSpPr>
-            <a:spLocks noGrp="1"/>
-          </p:cNvSpPr>
-          <p:nvPr>
-            <p:ph type="title"/>
-          </p:nvPr>
-        </p:nvSpPr>
-        <p:spPr>
-          <a:xfrm>
-            <a:off x="997527" y="0"/>
-            <a:ext cx="10356272" cy="1296786"/>
-          </a:xfrm>
-        </p:spPr>
-        <p:txBody>
-          <a:bodyPr>
-            <a:normAutofit/>
-          </a:bodyPr>
-          <a:lstStyle/>
-          <a:p>
-            <a:r>
-              <a:rPr lang="ru-RU" sz="4800" dirty="0"/>
-              <a:t>Анализ предметной области</a:t>
-            </a:r>
-          </a:p>
-        </p:txBody>
-      </p:sp>
-      <p:sp>
-        <p:nvSpPr>
-          <p:cNvPr id="1048612" name="Заголовок 1"/>
-          <p:cNvSpPr txBox="1"/>
-          <p:nvPr/>
-        </p:nvSpPr>
-        <p:spPr>
-          <a:xfrm>
-            <a:off x="997527" y="824813"/>
-            <a:ext cx="10356272" cy="794085"/>
-          </a:xfrm>
-          <a:prstGeom prst="rect">
-            <a:avLst/>
-          </a:prstGeom>
-        </p:spPr>
-        <p:txBody>
-          <a:bodyPr vert="horz" lIns="91440" tIns="45720" rIns="91440" bIns="45720" rtlCol="0" anchor="ctr">
-            <a:normAutofit/>
-          </a:bodyPr>
-          <a:lstStyle>
-            <a:lvl1pPr algn="l" defTabSz="914400" rtl="0" eaLnBrk="1" latinLnBrk="0" hangingPunct="1">
-              <a:lnSpc>
-                <a:spcPct val="90000"/>
-              </a:lnSpc>
-              <a:spcBef>
-                <a:spcPct val="0"/>
-              </a:spcBef>
-              <a:buNone/>
-              <a:defRPr sz="4400" kern="1200">
-                <a:solidFill>
-                  <a:schemeClr val="tx1"/>
-                </a:solidFill>
-                <a:latin typeface="+mj-lt"/>
-                <a:ea typeface="+mj-ea"/>
-                <a:cs typeface="+mj-cs"/>
-              </a:defRPr>
-            </a:lvl1pPr>
-          </a:lstStyle>
-          <a:p>
-            <a:r>
-              <a:rPr lang="ru-RU" sz="2800" dirty="0"/>
-              <a:t>Функциональные возможности пользователей</a:t>
-            </a:r>
-          </a:p>
-        </p:txBody>
-      </p:sp>
-      <p:sp>
-        <p:nvSpPr>
-          <p:cNvPr id="2" name="AutoShape 2" descr="blob:https://web.telegram.org/2cfdf163-70d9-483c-a6ac-5ad7afbca373"/>
-          <p:cNvSpPr>
-            <a:spLocks noChangeAspect="1" noChangeArrowheads="1"/>
-          </p:cNvSpPr>
-          <p:nvPr/>
-        </p:nvSpPr>
-        <p:spPr bwMode="auto">
-          <a:xfrm>
-            <a:off x="155575" y="-144463"/>
-            <a:ext cx="304800" cy="304801"/>
-          </a:xfrm>
-          <a:prstGeom prst="rect">
-            <a:avLst/>
-          </a:prstGeom>
-          <a:noFill/>
-          <a:extLst>
-            <a:ext uri="{909E8E84-426E-40DD-AFC4-6F175D3DCCD1}">
-              <a14:hiddenFill xmlns:a14="http://schemas.microsoft.com/office/drawing/2010/main">
-                <a:solidFill>
-                  <a:srgbClr val="FFFFFF"/>
-                </a:solidFill>
-              </a14:hiddenFill>
-            </a:ext>
-          </a:extLst>
-        </p:spPr>
-        <p:txBody>
-          <a:bodyPr vert="horz" wrap="square" lIns="91440" tIns="45720" rIns="91440" bIns="45720" numCol="1" anchor="t" anchorCtr="0" compatLnSpc="1">
-            <a:prstTxWarp prst="textNoShape">
-              <a:avLst/>
-            </a:prstTxWarp>
-          </a:bodyPr>
-          <a:lstStyle/>
-          <a:p>
-            <a:endParaRPr lang="ru-RU"/>
-          </a:p>
-        </p:txBody>
-      </p:sp>
-      <p:pic>
-        <p:nvPicPr>
-          <p:cNvPr id="1027" name="Picture 3"/>
-          <p:cNvPicPr>
-            <a:picLocks noChangeAspect="1" noChangeArrowheads="1"/>
-          </p:cNvPicPr>
-          <p:nvPr/>
-        </p:nvPicPr>
-        <p:blipFill>
-          <a:blip r:embed="rId3">
-            <a:extLst>
-              <a:ext uri="{28A0092B-C50C-407E-A947-70E740481C1C}">
-                <a14:useLocalDpi xmlns:a14="http://schemas.microsoft.com/office/drawing/2010/main" val="0"/>
-              </a:ext>
-            </a:extLst>
-          </a:blip>
-          <a:srcRect/>
-          <a:stretch>
-            <a:fillRect/>
-          </a:stretch>
-        </p:blipFill>
-        <p:spPr bwMode="auto">
-          <a:xfrm>
-            <a:off x="1604189" y="1922752"/>
-            <a:ext cx="8016277" cy="4853605"/>
-          </a:xfrm>
-          <a:prstGeom prst="rect">
-            <a:avLst/>
-          </a:prstGeom>
-          <a:noFill/>
-          <a:ln>
-            <a:noFill/>
-          </a:ln>
-          <a:effectLst/>
-          <a:extLst>
-            <a:ext uri="{909E8E84-426E-40DD-AFC4-6F175D3DCCD1}">
-              <a14:hiddenFill xmlns:a14="http://schemas.microsoft.com/office/drawing/2010/main">
-                <a:solidFill>
-                  <a:schemeClr val="accent1"/>
-                </a:solidFill>
-              </a14:hiddenFill>
-            </a:ext>
-            <a:ext uri="{91240B29-F687-4F45-9708-019B960494DF}">
-              <a14:hiddenLine xmlns:a14="http://schemas.microsoft.com/office/drawing/2010/main" w="9525">
-                <a:solidFill>
-                  <a:schemeClr val="tx1"/>
-                </a:solidFill>
-                <a:miter lim="800000"/>
-                <a:headEnd/>
-                <a:tailEnd/>
-              </a14:hiddenLine>
-            </a:ext>
-            <a:ext uri="{AF507438-7753-43E0-B8FC-AC1667EBCBE1}">
-              <a14:hiddenEffects xmlns:a14="http://schemas.microsoft.com/office/drawing/2010/main">
-                <a:effectLst>
-                  <a:outerShdw dist="35921" dir="2700000" algn="ctr" rotWithShape="0">
-                    <a:schemeClr val="bg2"/>
-                  </a:outerShdw>
-                </a:effectLst>
-              </a14:hiddenEffects>
-            </a:ext>
-          </a:extLst>
-        </p:spPr>
-      </p:pic>
-    </p:spTree>
-  </p:cSld>
-  <p:clrMapOvr>
-    <a:masterClrMapping/>
-  </p:clrMapOvr>
-</p:sld>
-</file>
-
-<file path=ppt/slides/slide7.xml><?xml version="1.0" encoding="utf-8"?>
-<p:sld xmlns:a="http://schemas.openxmlformats.org/drawingml/2006/main" xmlns:r="http://schemas.openxmlformats.org/officeDocument/2006/relationships" xmlns:p="http://schemas.openxmlformats.org/presentationml/2006/main">
-  <p:cSld>
-    <p:spTree>
-      <p:nvGrpSpPr>
-        <p:cNvPr id="1" name=""/>
-        <p:cNvGrpSpPr/>
-        <p:nvPr/>
-      </p:nvGrpSpPr>
-      <p:grpSpPr>
-        <a:xfrm>
-          <a:off x="0" y="0"/>
-          <a:ext cx="0" cy="0"/>
-          <a:chOff x="0" y="0"/>
-          <a:chExt cx="0" cy="0"/>
-        </a:xfrm>
-      </p:grpSpPr>
-      <p:sp>
-        <p:nvSpPr>
-          <p:cNvPr id="1048611" name="Заголовок 1"/>
-          <p:cNvSpPr>
-            <a:spLocks noGrp="1"/>
-          </p:cNvSpPr>
-          <p:nvPr>
-            <p:ph type="title"/>
-          </p:nvPr>
-        </p:nvSpPr>
-        <p:spPr>
-          <a:xfrm>
-            <a:off x="997527" y="0"/>
-            <a:ext cx="10356272" cy="1296786"/>
-          </a:xfrm>
-        </p:spPr>
-        <p:txBody>
-          <a:bodyPr>
-            <a:normAutofit/>
-          </a:bodyPr>
-          <a:lstStyle/>
-          <a:p>
-            <a:r>
-              <a:rPr lang="ru-RU" sz="4800" dirty="0"/>
-              <a:t>Анализ предметной области</a:t>
-            </a:r>
-          </a:p>
-        </p:txBody>
-      </p:sp>
-      <p:sp>
-        <p:nvSpPr>
-          <p:cNvPr id="1048612" name="Заголовок 1"/>
-          <p:cNvSpPr txBox="1"/>
-          <p:nvPr/>
-        </p:nvSpPr>
-        <p:spPr>
-          <a:xfrm>
-            <a:off x="997527" y="824813"/>
-            <a:ext cx="10356272" cy="794085"/>
-          </a:xfrm>
-          <a:prstGeom prst="rect">
-            <a:avLst/>
-          </a:prstGeom>
-        </p:spPr>
-        <p:txBody>
-          <a:bodyPr vert="horz" lIns="91440" tIns="45720" rIns="91440" bIns="45720" rtlCol="0" anchor="ctr">
-            <a:normAutofit/>
-          </a:bodyPr>
-          <a:lstStyle>
-            <a:lvl1pPr algn="l" defTabSz="914400" rtl="0" eaLnBrk="1" latinLnBrk="0" hangingPunct="1">
-              <a:lnSpc>
-                <a:spcPct val="90000"/>
-              </a:lnSpc>
-              <a:spcBef>
-                <a:spcPct val="0"/>
-              </a:spcBef>
-              <a:buNone/>
-              <a:defRPr sz="4400" kern="1200">
-                <a:solidFill>
-                  <a:schemeClr val="tx1"/>
-                </a:solidFill>
-                <a:latin typeface="+mj-lt"/>
-                <a:ea typeface="+mj-ea"/>
-                <a:cs typeface="+mj-cs"/>
-              </a:defRPr>
-            </a:lvl1pPr>
-          </a:lstStyle>
-          <a:p>
-            <a:r>
-              <a:rPr lang="ru-RU" sz="2800" dirty="0"/>
-              <a:t>Функциональные возможности пользователей</a:t>
-            </a:r>
-          </a:p>
-        </p:txBody>
-      </p:sp>
-      <p:sp>
-        <p:nvSpPr>
-          <p:cNvPr id="2" name="AutoShape 2" descr="blob:https://web.telegram.org/2cfdf163-70d9-483c-a6ac-5ad7afbca373"/>
-          <p:cNvSpPr>
-            <a:spLocks noChangeAspect="1" noChangeArrowheads="1"/>
-          </p:cNvSpPr>
-          <p:nvPr/>
-        </p:nvSpPr>
-        <p:spPr bwMode="auto">
-          <a:xfrm>
-            <a:off x="155575" y="-144463"/>
-            <a:ext cx="304800" cy="304801"/>
-          </a:xfrm>
-          <a:prstGeom prst="rect">
-            <a:avLst/>
-          </a:prstGeom>
-          <a:noFill/>
-          <a:extLst>
-            <a:ext uri="{909E8E84-426E-40DD-AFC4-6F175D3DCCD1}">
-              <a14:hiddenFill xmlns:a14="http://schemas.microsoft.com/office/drawing/2010/main">
-                <a:solidFill>
-                  <a:srgbClr val="FFFFFF"/>
-                </a:solidFill>
-              </a14:hiddenFill>
-            </a:ext>
-          </a:extLst>
-        </p:spPr>
-        <p:txBody>
-          <a:bodyPr vert="horz" wrap="square" lIns="91440" tIns="45720" rIns="91440" bIns="45720" numCol="1" anchor="t" anchorCtr="0" compatLnSpc="1">
-            <a:prstTxWarp prst="textNoShape">
-              <a:avLst/>
-            </a:prstTxWarp>
-          </a:bodyPr>
-          <a:lstStyle/>
-          <a:p>
-            <a:endParaRPr lang="ru-RU"/>
-          </a:p>
-        </p:txBody>
-      </p:sp>
-      <p:sp>
-        <p:nvSpPr>
-          <p:cNvPr id="3" name="Прямоугольник 2"/>
-          <p:cNvSpPr/>
-          <p:nvPr/>
-        </p:nvSpPr>
-        <p:spPr>
-          <a:xfrm>
-            <a:off x="155575" y="1898968"/>
-            <a:ext cx="5575754" cy="4570482"/>
-          </a:xfrm>
-          <a:prstGeom prst="rect">
-            <a:avLst/>
-          </a:prstGeom>
-        </p:spPr>
-        <p:txBody>
-          <a:bodyPr wrap="square">
-            <a:spAutoFit/>
-          </a:bodyPr>
-          <a:lstStyle/>
-          <a:p>
-            <a:r>
-              <a:rPr lang="ru-RU" sz="2400" b="1" dirty="0" smtClean="0"/>
-              <a:t>Функциональный сценарий клиента: </a:t>
-            </a:r>
-          </a:p>
-          <a:p>
-            <a:endParaRPr lang="ru-RU" sz="2400" b="1" dirty="0" smtClean="0"/>
-          </a:p>
-          <a:p>
-            <a:pPr>
-              <a:lnSpc>
-                <a:spcPct val="150000"/>
-              </a:lnSpc>
-            </a:pPr>
-            <a:r>
-              <a:rPr lang="ru-RU" dirty="0" smtClean="0"/>
-              <a:t>Первый </a:t>
-            </a:r>
-            <a:r>
-              <a:rPr lang="ru-RU" dirty="0"/>
-              <a:t>запуск приложения (новый пользователь, гость</a:t>
-            </a:r>
-            <a:r>
-              <a:rPr lang="ru-RU" dirty="0" smtClean="0"/>
-              <a:t>): </a:t>
-            </a:r>
-          </a:p>
-          <a:p>
-            <a:pPr marL="342900" indent="-342900">
-              <a:lnSpc>
-                <a:spcPct val="150000"/>
-              </a:lnSpc>
-              <a:buAutoNum type="arabicPeriod"/>
-            </a:pPr>
-            <a:r>
-              <a:rPr lang="ru-RU" dirty="0" smtClean="0"/>
-              <a:t>Пользователь </a:t>
-            </a:r>
-            <a:r>
-              <a:rPr lang="ru-RU" dirty="0"/>
-              <a:t>открывает приложение впервые</a:t>
-            </a:r>
-            <a:r>
-              <a:rPr lang="ru-RU" dirty="0" smtClean="0"/>
-              <a:t>.</a:t>
-            </a:r>
-          </a:p>
-          <a:p>
-            <a:pPr marL="342900" indent="-342900">
-              <a:lnSpc>
-                <a:spcPct val="150000"/>
-              </a:lnSpc>
-              <a:buAutoNum type="arabicPeriod"/>
-            </a:pPr>
-            <a:r>
-              <a:rPr lang="ru-RU" dirty="0" smtClean="0"/>
-              <a:t>Приложение </a:t>
-            </a:r>
-            <a:r>
-              <a:rPr lang="ru-RU" dirty="0"/>
-              <a:t>проверяет: есть ли </a:t>
-            </a:r>
-            <a:r>
-              <a:rPr lang="ru-RU" dirty="0" smtClean="0"/>
-              <a:t>сохранённый идентификатор </a:t>
-            </a:r>
-            <a:r>
-              <a:rPr lang="ru-RU" dirty="0"/>
-              <a:t>пользователя в </a:t>
-            </a:r>
-            <a:r>
-              <a:rPr lang="ru-RU" dirty="0" err="1"/>
-              <a:t>AsyncStorage</a:t>
-            </a:r>
-            <a:r>
-              <a:rPr lang="ru-RU" dirty="0"/>
-              <a:t>? - Ответ: Нет (первый запуск). </a:t>
-            </a:r>
-            <a:endParaRPr lang="ru-RU" dirty="0" smtClean="0"/>
-          </a:p>
-          <a:p>
-            <a:pPr marL="342900" indent="-342900">
-              <a:lnSpc>
-                <a:spcPct val="150000"/>
-              </a:lnSpc>
-              <a:buAutoNum type="arabicPeriod"/>
-            </a:pPr>
-            <a:r>
-              <a:rPr lang="ru-RU" dirty="0" smtClean="0"/>
-              <a:t>Устанавливается </a:t>
-            </a:r>
-            <a:r>
-              <a:rPr lang="ru-RU" dirty="0"/>
-              <a:t>гостевой режим (</a:t>
-            </a:r>
-            <a:r>
-              <a:rPr lang="ru-RU" dirty="0" err="1"/>
-              <a:t>isGuest</a:t>
-            </a:r>
-            <a:r>
-              <a:rPr lang="ru-RU" dirty="0"/>
-              <a:t> = </a:t>
-            </a:r>
-            <a:r>
-              <a:rPr lang="ru-RU" dirty="0" err="1"/>
-              <a:t>true</a:t>
-            </a:r>
-            <a:r>
-              <a:rPr lang="ru-RU" dirty="0" smtClean="0"/>
-              <a:t>).</a:t>
-            </a:r>
-          </a:p>
-          <a:p>
-            <a:pPr marL="342900" indent="-342900">
-              <a:lnSpc>
-                <a:spcPct val="150000"/>
-              </a:lnSpc>
-              <a:buAutoNum type="arabicPeriod"/>
-            </a:pPr>
-            <a:r>
-              <a:rPr lang="ru-RU" dirty="0" smtClean="0"/>
-              <a:t>Открывается </a:t>
-            </a:r>
-            <a:r>
-              <a:rPr lang="ru-RU" dirty="0"/>
-              <a:t>главный экран (вкладки: </a:t>
-            </a:r>
-            <a:r>
-              <a:rPr lang="ru-RU" dirty="0" smtClean="0"/>
-              <a:t>Таро, Гороскоп</a:t>
-            </a:r>
-            <a:r>
-              <a:rPr lang="ru-RU" dirty="0"/>
-              <a:t>, Тесты, Профиль). </a:t>
-            </a:r>
-            <a:endParaRPr lang="ru-RU" dirty="0"/>
-          </a:p>
-        </p:txBody>
-      </p:sp>
-      <p:sp>
-        <p:nvSpPr>
-          <p:cNvPr id="4" name="Прямоугольник 3"/>
-          <p:cNvSpPr/>
-          <p:nvPr/>
-        </p:nvSpPr>
-        <p:spPr>
-          <a:xfrm>
-            <a:off x="5921828" y="1437189"/>
-            <a:ext cx="6096000" cy="5770811"/>
-          </a:xfrm>
-          <a:prstGeom prst="rect">
-            <a:avLst/>
-          </a:prstGeom>
-        </p:spPr>
-        <p:txBody>
-          <a:bodyPr>
-            <a:spAutoFit/>
-          </a:bodyPr>
-          <a:lstStyle/>
-          <a:p>
-            <a:pPr marL="342900" indent="-342900">
-              <a:lnSpc>
-                <a:spcPct val="150000"/>
-              </a:lnSpc>
-              <a:buAutoNum type="arabicPeriod" startAt="5"/>
-            </a:pPr>
-            <a:r>
-              <a:rPr lang="ru-RU" dirty="0" smtClean="0"/>
-              <a:t>Пользователь </a:t>
-            </a:r>
-            <a:r>
-              <a:rPr lang="ru-RU" dirty="0"/>
-              <a:t>может: - Вытянуть карту дня (</a:t>
-            </a:r>
-            <a:r>
-              <a:rPr lang="ru-RU" dirty="0" err="1"/>
-              <a:t>useDailyCard</a:t>
-            </a:r>
-            <a:r>
-              <a:rPr lang="ru-RU" dirty="0"/>
-              <a:t> проверяет дату → если новый день — можно вытянуть). - Сделать до 3 раскладов Таро за день (</a:t>
-            </a:r>
-            <a:r>
-              <a:rPr lang="ru-RU" dirty="0" err="1"/>
-              <a:t>useTarotReadings</a:t>
-            </a:r>
-            <a:r>
-              <a:rPr lang="ru-RU" dirty="0"/>
-              <a:t> считает количество). - Посмотреть урезанную версию матрицы судьбы / гороскопа (без ввода даты рождения или с ограничениями). - Пройти бесплатные тесты (результаты сохраняются в </a:t>
-            </a:r>
-            <a:r>
-              <a:rPr lang="ru-RU" dirty="0" err="1"/>
-              <a:t>AsyncStorage</a:t>
-            </a:r>
-            <a:r>
-              <a:rPr lang="ru-RU" dirty="0" smtClean="0"/>
-              <a:t>). </a:t>
-            </a:r>
-          </a:p>
-          <a:p>
-            <a:pPr marL="342900" indent="-342900">
-              <a:lnSpc>
-                <a:spcPct val="150000"/>
-              </a:lnSpc>
-              <a:buFontTx/>
-              <a:buAutoNum type="arabicPeriod" startAt="5"/>
-            </a:pPr>
-            <a:r>
-              <a:rPr lang="ru-RU" dirty="0"/>
-              <a:t>При попытке открыть премиум-функцию (например, 4-й расклад Таро, полный тест или расширенную матрицу): - Появляется сообщение: «Функция доступна только по подписке». - Происходит переход на экран авторизации (/</a:t>
-            </a:r>
-            <a:r>
-              <a:rPr lang="ru-RU" dirty="0" err="1"/>
-              <a:t>auth</a:t>
-            </a:r>
-            <a:r>
-              <a:rPr lang="ru-RU" dirty="0"/>
-              <a:t>), так как гость не может оформить подписку без аккаунта.</a:t>
-            </a:r>
-          </a:p>
-          <a:p>
-            <a:pPr marL="342900" indent="-342900">
-              <a:buAutoNum type="arabicPeriod" startAt="5"/>
-            </a:pPr>
-            <a:endParaRPr lang="ru-RU" dirty="0"/>
-          </a:p>
-        </p:txBody>
-      </p:sp>
-    </p:spTree>
-    <p:extLst>
-      <p:ext uri="{BB962C8B-B14F-4D97-AF65-F5344CB8AC3E}">
-        <p14:creationId xmlns:p14="http://schemas.microsoft.com/office/powerpoint/2010/main" val="172459090"/>
-      </p:ext>
-    </p:extLst>
-  </p:cSld>
-  <p:clrMapOvr>
-    <a:masterClrMapping/>
-  </p:clrMapOvr>
-</p:sld>
-</file>
-
-<file path=ppt/slides/slide8.xml><?xml version="1.0" encoding="utf-8"?>
-<p:sld xmlns:a="http://schemas.openxmlformats.org/drawingml/2006/main" xmlns:r="http://schemas.openxmlformats.org/officeDocument/2006/relationships" xmlns:p="http://schemas.openxmlformats.org/presentationml/2006/main" show="0">
-  <p:cSld>
-    <p:spTree>
-      <p:nvGrpSpPr>
-        <p:cNvPr id="1" name=""/>
-        <p:cNvGrpSpPr/>
-        <p:nvPr/>
-      </p:nvGrpSpPr>
-      <p:grpSpPr>
-        <a:xfrm>
-          <a:off x="0" y="0"/>
-          <a:ext cx="0" cy="0"/>
-          <a:chOff x="0" y="0"/>
-          <a:chExt cx="0" cy="0"/>
-        </a:xfrm>
-      </p:grpSpPr>
-      <p:sp>
-        <p:nvSpPr>
-          <p:cNvPr id="1048611" name="Заголовок 1"/>
-          <p:cNvSpPr>
-            <a:spLocks noGrp="1"/>
-          </p:cNvSpPr>
-          <p:nvPr>
-            <p:ph type="title"/>
-          </p:nvPr>
-        </p:nvSpPr>
-        <p:spPr>
-          <a:xfrm>
-            <a:off x="997527" y="0"/>
-            <a:ext cx="10356272" cy="1296786"/>
-          </a:xfrm>
-        </p:spPr>
-        <p:txBody>
-          <a:bodyPr>
-            <a:normAutofit/>
-          </a:bodyPr>
-          <a:lstStyle/>
-          <a:p>
-            <a:r>
-              <a:rPr lang="ru-RU" sz="4800" dirty="0"/>
-              <a:t>Анализ предметной области</a:t>
-            </a:r>
-          </a:p>
-        </p:txBody>
-      </p:sp>
-      <p:sp>
-        <p:nvSpPr>
-          <p:cNvPr id="1048612" name="Заголовок 1"/>
-          <p:cNvSpPr txBox="1"/>
-          <p:nvPr/>
-        </p:nvSpPr>
-        <p:spPr>
-          <a:xfrm>
-            <a:off x="997527" y="899743"/>
-            <a:ext cx="10356272" cy="794085"/>
-          </a:xfrm>
-          <a:prstGeom prst="rect">
-            <a:avLst/>
-          </a:prstGeom>
-        </p:spPr>
-        <p:txBody>
-          <a:bodyPr vert="horz" lIns="91440" tIns="45720" rIns="91440" bIns="45720" rtlCol="0" anchor="ctr">
-            <a:normAutofit/>
-          </a:bodyPr>
-          <a:lstStyle>
-            <a:lvl1pPr algn="l" defTabSz="914400" rtl="0" eaLnBrk="1" latinLnBrk="0" hangingPunct="1">
-              <a:lnSpc>
-                <a:spcPct val="90000"/>
-              </a:lnSpc>
-              <a:spcBef>
-                <a:spcPct val="0"/>
-              </a:spcBef>
-              <a:buNone/>
-              <a:defRPr sz="4400" kern="1200">
-                <a:solidFill>
-                  <a:schemeClr val="tx1"/>
-                </a:solidFill>
-                <a:latin typeface="+mj-lt"/>
-                <a:ea typeface="+mj-ea"/>
-                <a:cs typeface="+mj-cs"/>
-              </a:defRPr>
-            </a:lvl1pPr>
-          </a:lstStyle>
-          <a:p>
-            <a:r>
-              <a:rPr lang="ru-RU" sz="3600" dirty="0"/>
-              <a:t>Функциональные возможности пользователей</a:t>
-            </a:r>
-          </a:p>
-        </p:txBody>
-      </p:sp>
-      <p:pic>
-        <p:nvPicPr>
-          <p:cNvPr id="9" name="Рисунок 8"/>
-          <p:cNvPicPr/>
-          <p:nvPr/>
-        </p:nvPicPr>
-        <p:blipFill>
-          <a:blip r:embed="rId3"/>
-          <a:srcRect l="1672" t="3019" b="6053"/>
-          <a:stretch>
-            <a:fillRect/>
-          </a:stretch>
-        </p:blipFill>
-        <p:spPr>
-          <a:xfrm>
-            <a:off x="525780" y="1986280"/>
-            <a:ext cx="11560175" cy="4244975"/>
-          </a:xfrm>
-          <a:prstGeom prst="rect">
-            <a:avLst/>
-          </a:prstGeom>
-        </p:spPr>
-      </p:pic>
-      <p:sp>
-        <p:nvSpPr>
-          <p:cNvPr id="2" name="Прямоугольник 1"/>
-          <p:cNvSpPr/>
-          <p:nvPr/>
-        </p:nvSpPr>
-        <p:spPr>
-          <a:xfrm>
-            <a:off x="3231167" y="6231458"/>
-            <a:ext cx="6150610" cy="460375"/>
-          </a:xfrm>
-          <a:prstGeom prst="rect">
-            <a:avLst/>
-          </a:prstGeom>
-        </p:spPr>
-        <p:txBody>
-          <a:bodyPr wrap="none">
-            <a:spAutoFit/>
-          </a:bodyPr>
-          <a:lstStyle/>
-          <a:p>
-            <a:pPr algn="ctr">
-              <a:lnSpc>
-                <a:spcPct val="150000"/>
-              </a:lnSpc>
-              <a:spcAft>
-                <a:spcPts val="1000"/>
-              </a:spcAft>
-            </a:pPr>
-            <a:r>
-              <a:rPr lang="en-US" altLang="en-US" sz="1600" i="1" dirty="0">
-                <a:solidFill>
-                  <a:srgbClr val="000000"/>
-                </a:solidFill>
-                <a:latin typeface="+mj-lt"/>
-                <a:ea typeface="Times New Roman" panose="02020603050405020304" pitchFamily="18" charset="0"/>
-                <a:cs typeface="Times New Roman" panose="02020603050405020304" pitchFamily="18" charset="0"/>
-              </a:rPr>
-              <a:t>Функциональная</a:t>
-            </a:r>
-            <a:r>
-              <a:rPr lang="en-US" altLang="ru-RU" sz="1600" i="1" dirty="0">
-                <a:solidFill>
-                  <a:srgbClr val="000000"/>
-                </a:solidFill>
-                <a:latin typeface="+mj-lt"/>
-                <a:ea typeface="Times New Roman" panose="02020603050405020304" pitchFamily="18" charset="0"/>
-                <a:cs typeface="Times New Roman" panose="02020603050405020304" pitchFamily="18" charset="0"/>
-              </a:rPr>
-              <a:t> </a:t>
-            </a:r>
-            <a:r>
-              <a:rPr lang="en-US" altLang="en-US" sz="1600" i="1" dirty="0">
-                <a:solidFill>
-                  <a:srgbClr val="000000"/>
-                </a:solidFill>
-                <a:latin typeface="+mj-lt"/>
-                <a:ea typeface="Times New Roman" panose="02020603050405020304" pitchFamily="18" charset="0"/>
-                <a:cs typeface="Times New Roman" panose="02020603050405020304" pitchFamily="18" charset="0"/>
-              </a:rPr>
-              <a:t>диаграмма</a:t>
-            </a:r>
-            <a:r>
-              <a:rPr lang="en-US" altLang="ru-RU" sz="1600" i="1" dirty="0">
-                <a:solidFill>
-                  <a:srgbClr val="000000"/>
-                </a:solidFill>
-                <a:latin typeface="+mj-lt"/>
-                <a:ea typeface="Times New Roman" panose="02020603050405020304" pitchFamily="18" charset="0"/>
-                <a:cs typeface="Times New Roman" panose="02020603050405020304" pitchFamily="18" charset="0"/>
-              </a:rPr>
-              <a:t> (</a:t>
-            </a:r>
-            <a:r>
-              <a:rPr lang="ru-RU" sz="1600" i="1" dirty="0">
-                <a:solidFill>
-                  <a:srgbClr val="000000"/>
-                </a:solidFill>
-                <a:latin typeface="+mj-lt"/>
-                <a:ea typeface="Times New Roman" panose="02020603050405020304" pitchFamily="18" charset="0"/>
-                <a:cs typeface="Times New Roman" panose="02020603050405020304" pitchFamily="18" charset="0"/>
-              </a:rPr>
-              <a:t>для организатора (Педагог/Родитель)</a:t>
-            </a:r>
-            <a:endParaRPr lang="ru-RU" sz="1200" dirty="0">
-              <a:effectLst/>
-              <a:latin typeface="+mj-lt"/>
-              <a:ea typeface="Times New Roman" panose="02020603050405020304" pitchFamily="18" charset="0"/>
-              <a:cs typeface="Times New Roman" panose="02020603050405020304" pitchFamily="18" charset="0"/>
-            </a:endParaRPr>
-          </a:p>
-        </p:txBody>
-      </p:sp>
-    </p:spTree>
-  </p:cSld>
-  <p:clrMapOvr>
-    <a:masterClrMapping/>
-  </p:clrMapOvr>
-  <mc:AlternateContent xmlns:mc="http://schemas.openxmlformats.org/markup-compatibility/2006">
-    <mc:Choice xmlns:p14="http://schemas.microsoft.com/office/powerpoint/2010/main" Requires="p14">
-      <p:transition spd="slow" p14:dur="2000"/>
-    </mc:Choice>
-    <mc:Fallback>
-      <p:transition spd="slow"/>
-    </mc:Fallback>
-  </mc:AlternateContent>
-</p:sld>
-</file>
-
-<file path=ppt/slides/slide9.xml><?xml version="1.0" encoding="utf-8"?>
-<p:sld xmlns:a="http://schemas.openxmlformats.org/drawingml/2006/main" xmlns:r="http://schemas.openxmlformats.org/officeDocument/2006/relationships" xmlns:p="http://schemas.openxmlformats.org/presentationml/2006/main" show="0">
-  <p:cSld>
-    <p:spTree>
-      <p:nvGrpSpPr>
-        <p:cNvPr id="1" name=""/>
-        <p:cNvGrpSpPr/>
-        <p:nvPr/>
-      </p:nvGrpSpPr>
-      <p:grpSpPr>
-        <a:xfrm>
-          <a:off x="0" y="0"/>
-          <a:ext cx="0" cy="0"/>
-          <a:chOff x="0" y="0"/>
-          <a:chExt cx="0" cy="0"/>
-        </a:xfrm>
-      </p:grpSpPr>
-      <p:pic>
-        <p:nvPicPr>
-          <p:cNvPr id="6" name="Рисунок 5"/>
-          <p:cNvPicPr/>
-          <p:nvPr/>
-        </p:nvPicPr>
-        <p:blipFill>
-          <a:blip r:embed="rId3"/>
-          <a:srcRect t="4961"/>
-          <a:stretch>
-            <a:fillRect/>
-          </a:stretch>
-        </p:blipFill>
-        <p:spPr>
-          <a:xfrm>
-            <a:off x="447040" y="1884045"/>
-            <a:ext cx="11276330" cy="4513580"/>
-          </a:xfrm>
-          <a:prstGeom prst="rect">
-            <a:avLst/>
-          </a:prstGeom>
-        </p:spPr>
-      </p:pic>
-      <p:sp>
-        <p:nvSpPr>
-          <p:cNvPr id="1048611" name="Заголовок 1"/>
-          <p:cNvSpPr>
-            <a:spLocks noGrp="1"/>
-          </p:cNvSpPr>
-          <p:nvPr>
-            <p:ph type="title"/>
-          </p:nvPr>
-        </p:nvSpPr>
-        <p:spPr>
-          <a:xfrm>
-            <a:off x="997527" y="0"/>
-            <a:ext cx="10356272" cy="1296786"/>
-          </a:xfrm>
-        </p:spPr>
-        <p:txBody>
-          <a:bodyPr>
-            <a:normAutofit/>
-          </a:bodyPr>
-          <a:lstStyle/>
-          <a:p>
-            <a:r>
-              <a:rPr lang="ru-RU" sz="4800" dirty="0"/>
-              <a:t>Анализ предметной области</a:t>
-            </a:r>
-          </a:p>
-        </p:txBody>
-      </p:sp>
-      <p:sp>
-        <p:nvSpPr>
-          <p:cNvPr id="1048612" name="Заголовок 1"/>
-          <p:cNvSpPr txBox="1"/>
-          <p:nvPr/>
-        </p:nvSpPr>
-        <p:spPr>
-          <a:xfrm>
-            <a:off x="997527" y="899743"/>
-            <a:ext cx="10356272" cy="794085"/>
-          </a:xfrm>
-          <a:prstGeom prst="rect">
-            <a:avLst/>
-          </a:prstGeom>
-        </p:spPr>
-        <p:txBody>
-          <a:bodyPr vert="horz" lIns="91440" tIns="45720" rIns="91440" bIns="45720" rtlCol="0" anchor="ctr">
-            <a:normAutofit/>
-          </a:bodyPr>
-          <a:lstStyle>
-            <a:lvl1pPr algn="l" defTabSz="914400" rtl="0" eaLnBrk="1" latinLnBrk="0" hangingPunct="1">
-              <a:lnSpc>
-                <a:spcPct val="90000"/>
-              </a:lnSpc>
-              <a:spcBef>
-                <a:spcPct val="0"/>
-              </a:spcBef>
-              <a:buNone/>
-              <a:defRPr sz="4400" kern="1200">
-                <a:solidFill>
-                  <a:schemeClr val="tx1"/>
-                </a:solidFill>
-                <a:latin typeface="+mj-lt"/>
-                <a:ea typeface="+mj-ea"/>
-                <a:cs typeface="+mj-cs"/>
-              </a:defRPr>
-            </a:lvl1pPr>
-          </a:lstStyle>
-          <a:p>
-            <a:r>
-              <a:rPr lang="ru-RU" sz="3600" dirty="0"/>
-              <a:t>Функциональные возможности пользователей</a:t>
-            </a:r>
-          </a:p>
-        </p:txBody>
-      </p:sp>
-      <p:sp>
-        <p:nvSpPr>
-          <p:cNvPr id="2" name="Прямоугольник 1"/>
-          <p:cNvSpPr/>
-          <p:nvPr/>
-        </p:nvSpPr>
-        <p:spPr>
-          <a:xfrm>
-            <a:off x="3784252" y="6200978"/>
-            <a:ext cx="4602480" cy="460375"/>
-          </a:xfrm>
-          <a:prstGeom prst="rect">
-            <a:avLst/>
-          </a:prstGeom>
-        </p:spPr>
-        <p:txBody>
-          <a:bodyPr wrap="none">
-            <a:spAutoFit/>
-          </a:bodyPr>
-          <a:lstStyle/>
-          <a:p>
-            <a:pPr algn="ctr">
-              <a:lnSpc>
-                <a:spcPct val="150000"/>
-              </a:lnSpc>
-              <a:spcAft>
-                <a:spcPts val="1000"/>
-              </a:spcAft>
-            </a:pPr>
-            <a:r>
-              <a:rPr lang="en-US" altLang="en-US" sz="1600" i="1" dirty="0">
-                <a:solidFill>
-                  <a:srgbClr val="000000"/>
-                </a:solidFill>
-                <a:latin typeface="+mj-lt"/>
-                <a:ea typeface="Times New Roman" panose="02020603050405020304" pitchFamily="18" charset="0"/>
-                <a:cs typeface="Times New Roman" panose="02020603050405020304" pitchFamily="18" charset="0"/>
-              </a:rPr>
-              <a:t>Функциональная</a:t>
-            </a:r>
-            <a:r>
-              <a:rPr lang="en-US" altLang="ru-RU" sz="1600" i="1" dirty="0">
-                <a:solidFill>
-                  <a:srgbClr val="000000"/>
-                </a:solidFill>
-                <a:latin typeface="+mj-lt"/>
-                <a:ea typeface="Times New Roman" panose="02020603050405020304" pitchFamily="18" charset="0"/>
-                <a:cs typeface="Times New Roman" panose="02020603050405020304" pitchFamily="18" charset="0"/>
-              </a:rPr>
-              <a:t> </a:t>
-            </a:r>
-            <a:r>
-              <a:rPr lang="en-US" altLang="en-US" sz="1600" i="1" dirty="0">
-                <a:solidFill>
-                  <a:srgbClr val="000000"/>
-                </a:solidFill>
-                <a:latin typeface="+mj-lt"/>
-                <a:ea typeface="Times New Roman" panose="02020603050405020304" pitchFamily="18" charset="0"/>
-                <a:cs typeface="Times New Roman" panose="02020603050405020304" pitchFamily="18" charset="0"/>
-              </a:rPr>
-              <a:t>диаграмма</a:t>
-            </a:r>
-            <a:r>
-              <a:rPr lang="en-US" altLang="ru-RU" sz="1600" i="1" dirty="0">
-                <a:solidFill>
-                  <a:srgbClr val="000000"/>
-                </a:solidFill>
-                <a:latin typeface="+mj-lt"/>
-                <a:ea typeface="Times New Roman" panose="02020603050405020304" pitchFamily="18" charset="0"/>
-                <a:cs typeface="Times New Roman" panose="02020603050405020304" pitchFamily="18" charset="0"/>
-              </a:rPr>
-              <a:t> </a:t>
-            </a:r>
-            <a:r>
-              <a:rPr lang="ru-RU" sz="1600" i="1" dirty="0">
-                <a:solidFill>
-                  <a:srgbClr val="000000"/>
-                </a:solidFill>
-                <a:latin typeface="+mj-lt"/>
-                <a:ea typeface="Times New Roman" panose="02020603050405020304" pitchFamily="18" charset="0"/>
-                <a:cs typeface="Times New Roman" panose="02020603050405020304" pitchFamily="18" charset="0"/>
-              </a:rPr>
-              <a:t>для </a:t>
-            </a:r>
-            <a:r>
-              <a:rPr lang="ru-RU" sz="1600" i="1" dirty="0" smtClean="0">
-                <a:solidFill>
-                  <a:srgbClr val="000000"/>
-                </a:solidFill>
-                <a:latin typeface="+mj-lt"/>
-                <a:ea typeface="Times New Roman" panose="02020603050405020304" pitchFamily="18" charset="0"/>
-                <a:cs typeface="Times New Roman" panose="02020603050405020304" pitchFamily="18" charset="0"/>
-              </a:rPr>
-              <a:t>администратора</a:t>
-            </a:r>
-            <a:endParaRPr lang="ru-RU" sz="1200" dirty="0">
-              <a:effectLst/>
-              <a:latin typeface="+mj-lt"/>
-              <a:ea typeface="Times New Roman" panose="02020603050405020304" pitchFamily="18" charset="0"/>
-              <a:cs typeface="Times New Roman" panose="02020603050405020304" pitchFamily="18" charset="0"/>
-            </a:endParaRPr>
-          </a:p>
-        </p:txBody>
-      </p:sp>
-    </p:spTree>
-  </p:cSld>
-  <p:clrMapOvr>
-    <a:masterClrMapping/>
-  </p:clrMapOvr>
-  <mc:AlternateContent xmlns:mc="http://schemas.openxmlformats.org/markup-compatibility/2006">
-    <mc:Choice xmlns:p14="http://schemas.microsoft.com/office/powerpoint/2010/main" Requires="p14">
-      <p:transition spd="slow" p14:dur="2000"/>
-    </mc:Choice>
-    <mc:Fallback>
-      <p:transition spd="slow"/>
-    </mc:Fallback>
-  </mc:AlternateContent>
 </p:sld>
 </file>
 
@@ -9618,7 +8619,7 @@
   <a:extraClrSchemeLst/>
   <a:extLst>
     <a:ext uri="{05A4C25C-085E-4340-85A3-A5531E510DB2}">
-      <thm15:themeFamily xmlns:thm15="http://schemas.microsoft.com/office/thememl/2012/main" xmlns="" name="Office Theme" id="{62F939B6-93AF-4DB8-9C6B-D6C7DFDC589F}" vid="{4A3C46E8-61CC-4603-A589-7422A47A8E4A}"/>
+      <thm15:themeFamily xmlns="" xmlns:thm15="http://schemas.microsoft.com/office/thememl/2012/main" name="Office Theme" id="{62F939B6-93AF-4DB8-9C6B-D6C7DFDC589F}" vid="{4A3C46E8-61CC-4603-A589-7422A47A8E4A}"/>
     </a:ext>
   </a:extLst>
 </a:theme>
@@ -9879,7 +8880,7 @@
   <a:extraClrSchemeLst/>
   <a:extLst>
     <a:ext uri="{05A4C25C-085E-4340-85A3-A5531E510DB2}">
-      <thm15:themeFamily xmlns:thm15="http://schemas.microsoft.com/office/thememl/2012/main" xmlns="" name="Office Theme" id="{62F939B6-93AF-4DB8-9C6B-D6C7DFDC589F}" vid="{4A3C46E8-61CC-4603-A589-7422A47A8E4A}"/>
+      <thm15:themeFamily xmlns="" xmlns:thm15="http://schemas.microsoft.com/office/thememl/2012/main" name="Office Theme" id="{62F939B6-93AF-4DB8-9C6B-D6C7DFDC589F}" vid="{4A3C46E8-61CC-4603-A589-7422A47A8E4A}"/>
     </a:ext>
   </a:extLst>
 </a:theme>
@@ -10140,7 +9141,7 @@
   <a:extraClrSchemeLst/>
   <a:extLst>
     <a:ext uri="{05A4C25C-085E-4340-85A3-A5531E510DB2}">
-      <thm15:themeFamily xmlns:thm15="http://schemas.microsoft.com/office/thememl/2012/main" xmlns="" name="Office Theme" id="{62F939B6-93AF-4DB8-9C6B-D6C7DFDC589F}" vid="{4A3C46E8-61CC-4603-A589-7422A47A8E4A}"/>
+      <thm15:themeFamily xmlns="" xmlns:thm15="http://schemas.microsoft.com/office/thememl/2012/main" name="Office Theme" id="{62F939B6-93AF-4DB8-9C6B-D6C7DFDC589F}" vid="{4A3C46E8-61CC-4603-A589-7422A47A8E4A}"/>
     </a:ext>
   </a:extLst>
 </a:theme>
